--- a/Documents/ПРИ123-ТП-КП-Презентация-Ле.pptx
+++ b/Documents/ПРИ123-ТП-КП-Презентация-Ле.pptx
@@ -5,26 +5,36 @@
     <p:sldMasterId id="2147483648" r:id="rId1"/>
   </p:sldMasterIdLst>
   <p:notesMasterIdLst>
-    <p:notesMasterId r:id="rId16"/>
+    <p:notesMasterId r:id="rId26"/>
   </p:notesMasterIdLst>
   <p:handoutMasterIdLst>
-    <p:handoutMasterId r:id="rId17"/>
+    <p:handoutMasterId r:id="rId27"/>
   </p:handoutMasterIdLst>
   <p:sldIdLst>
     <p:sldId id="256" r:id="rId2"/>
-    <p:sldId id="257" r:id="rId3"/>
-    <p:sldId id="258" r:id="rId4"/>
-    <p:sldId id="275" r:id="rId5"/>
-    <p:sldId id="260" r:id="rId6"/>
-    <p:sldId id="262" r:id="rId7"/>
-    <p:sldId id="274" r:id="rId8"/>
-    <p:sldId id="263" r:id="rId9"/>
-    <p:sldId id="266" r:id="rId10"/>
-    <p:sldId id="277" r:id="rId11"/>
-    <p:sldId id="279" r:id="rId12"/>
-    <p:sldId id="280" r:id="rId13"/>
-    <p:sldId id="264" r:id="rId14"/>
-    <p:sldId id="270" r:id="rId15"/>
+    <p:sldId id="281" r:id="rId3"/>
+    <p:sldId id="257" r:id="rId4"/>
+    <p:sldId id="258" r:id="rId5"/>
+    <p:sldId id="275" r:id="rId6"/>
+    <p:sldId id="260" r:id="rId7"/>
+    <p:sldId id="262" r:id="rId8"/>
+    <p:sldId id="274" r:id="rId9"/>
+    <p:sldId id="263" r:id="rId10"/>
+    <p:sldId id="266" r:id="rId11"/>
+    <p:sldId id="277" r:id="rId12"/>
+    <p:sldId id="279" r:id="rId13"/>
+    <p:sldId id="280" r:id="rId14"/>
+    <p:sldId id="264" r:id="rId15"/>
+    <p:sldId id="282" r:id="rId16"/>
+    <p:sldId id="283" r:id="rId17"/>
+    <p:sldId id="284" r:id="rId18"/>
+    <p:sldId id="285" r:id="rId19"/>
+    <p:sldId id="286" r:id="rId20"/>
+    <p:sldId id="287" r:id="rId21"/>
+    <p:sldId id="288" r:id="rId22"/>
+    <p:sldId id="289" r:id="rId23"/>
+    <p:sldId id="290" r:id="rId24"/>
+    <p:sldId id="270" r:id="rId25"/>
   </p:sldIdLst>
   <p:sldSz cx="12192000" cy="6858000"/>
   <p:notesSz cx="6858000" cy="9144000"/>
@@ -228,7 +238,7 @@
           <a:p>
             <a:fld id="{CC5803AB-70AF-46BA-A97F-360719B42A94}" type="datetimeFigureOut">
               <a:rPr lang="ru-RU" smtClean="0"/>
-              <a:t>22.12.2025</a:t>
+              <a:t>25.12.2025</a:t>
             </a:fld>
             <a:endParaRPr lang="ru-RU"/>
           </a:p>
@@ -405,7 +415,7 @@
           <a:p>
             <a:fld id="{155A5D7E-8C29-41EC-827C-31FD8EE82E35}" type="datetimeFigureOut">
               <a:rPr lang="ru-RU" smtClean="0"/>
-              <a:t>22.12.2025</a:t>
+              <a:t>25.12.2025</a:t>
             </a:fld>
             <a:endParaRPr lang="ru-RU"/>
           </a:p>
@@ -819,7 +829,7 @@
           <a:p>
             <a:fld id="{3ADAB8F6-CA97-4397-AA01-61AA9A92B7B1}" type="datetime1">
               <a:rPr lang="ru-RU" smtClean="0"/>
-              <a:t>22.12.2025</a:t>
+              <a:t>25.12.2025</a:t>
             </a:fld>
             <a:endParaRPr lang="ru-RU"/>
           </a:p>
@@ -1079,7 +1089,7 @@
           <a:p>
             <a:fld id="{CB120C60-F316-4E0B-8E8C-0F331644C25A}" type="datetime1">
               <a:rPr lang="ru-RU" smtClean="0"/>
-              <a:t>22.12.2025</a:t>
+              <a:t>25.12.2025</a:t>
             </a:fld>
             <a:endParaRPr lang="ru-RU"/>
           </a:p>
@@ -1287,7 +1297,7 @@
           <a:p>
             <a:fld id="{A111D87B-6244-4F09-B288-26942B856BBA}" type="datetime1">
               <a:rPr lang="ru-RU" smtClean="0"/>
-              <a:t>22.12.2025</a:t>
+              <a:t>25.12.2025</a:t>
             </a:fld>
             <a:endParaRPr lang="ru-RU"/>
           </a:p>
@@ -1485,7 +1495,7 @@
           <a:p>
             <a:fld id="{BD86320E-3258-41E3-A2C0-4FA748F56997}" type="datetime1">
               <a:rPr lang="ru-RU" smtClean="0"/>
-              <a:t>22.12.2025</a:t>
+              <a:t>25.12.2025</a:t>
             </a:fld>
             <a:endParaRPr lang="ru-RU"/>
           </a:p>
@@ -1760,7 +1770,7 @@
           <a:p>
             <a:fld id="{93B09EA3-F521-43CB-A83E-AB38FD04BBF3}" type="datetime1">
               <a:rPr lang="ru-RU" smtClean="0"/>
-              <a:t>22.12.2025</a:t>
+              <a:t>25.12.2025</a:t>
             </a:fld>
             <a:endParaRPr lang="ru-RU"/>
           </a:p>
@@ -2025,7 +2035,7 @@
           <a:p>
             <a:fld id="{CCEC6FEA-1061-442A-B7BD-CACE33E91450}" type="datetime1">
               <a:rPr lang="ru-RU" smtClean="0"/>
-              <a:t>22.12.2025</a:t>
+              <a:t>25.12.2025</a:t>
             </a:fld>
             <a:endParaRPr lang="ru-RU"/>
           </a:p>
@@ -2437,7 +2447,7 @@
           <a:p>
             <a:fld id="{E2579B60-4A9A-435F-870D-BA3C64BE299E}" type="datetime1">
               <a:rPr lang="ru-RU" smtClean="0"/>
-              <a:t>22.12.2025</a:t>
+              <a:t>25.12.2025</a:t>
             </a:fld>
             <a:endParaRPr lang="ru-RU"/>
           </a:p>
@@ -2578,7 +2588,7 @@
           <a:p>
             <a:fld id="{CCAA3BE1-B99C-4345-A3C1-1E40F27AC1F4}" type="datetime1">
               <a:rPr lang="ru-RU" smtClean="0"/>
-              <a:t>22.12.2025</a:t>
+              <a:t>25.12.2025</a:t>
             </a:fld>
             <a:endParaRPr lang="ru-RU"/>
           </a:p>
@@ -2691,7 +2701,7 @@
           <a:p>
             <a:fld id="{F60A1695-556E-46EC-B764-D2848BC7579B}" type="datetime1">
               <a:rPr lang="ru-RU" smtClean="0"/>
-              <a:t>22.12.2025</a:t>
+              <a:t>25.12.2025</a:t>
             </a:fld>
             <a:endParaRPr lang="ru-RU"/>
           </a:p>
@@ -3002,7 +3012,7 @@
           <a:p>
             <a:fld id="{0B6E7493-CD43-4E29-BC10-8A20CE3685ED}" type="datetime1">
               <a:rPr lang="ru-RU" smtClean="0"/>
-              <a:t>22.12.2025</a:t>
+              <a:t>25.12.2025</a:t>
             </a:fld>
             <a:endParaRPr lang="ru-RU"/>
           </a:p>
@@ -3290,7 +3300,7 @@
           <a:p>
             <a:fld id="{2D5E7992-6605-4886-BFC3-B3B38425DC70}" type="datetime1">
               <a:rPr lang="ru-RU" smtClean="0"/>
-              <a:t>22.12.2025</a:t>
+              <a:t>25.12.2025</a:t>
             </a:fld>
             <a:endParaRPr lang="ru-RU"/>
           </a:p>
@@ -3585,7 +3595,7 @@
           <a:p>
             <a:fld id="{74A9A7D0-0137-45AC-8E86-590BF6B958FD}" type="datetime1">
               <a:rPr lang="ru-RU" smtClean="0"/>
-              <a:t>22.12.2025</a:t>
+              <a:t>25.12.2025</a:t>
             </a:fld>
             <a:endParaRPr lang="ru-RU"/>
           </a:p>
@@ -4589,35 +4599,21 @@
                 <a:latin typeface="Courier New" panose="02070309020205020404" pitchFamily="49" charset="0"/>
                 <a:cs typeface="Courier New" panose="02070309020205020404" pitchFamily="49" charset="0"/>
               </a:rPr>
-              <a:t> var </a:t>
+              <a:t>[</a:t>
             </a:r>
             <a:r>
               <a:rPr lang="en-US" sz="1400" dirty="0" err="1">
                 <a:latin typeface="Courier New" panose="02070309020205020404" pitchFamily="49" charset="0"/>
                 <a:cs typeface="Courier New" panose="02070309020205020404" pitchFamily="49" charset="0"/>
               </a:rPr>
-              <a:t>errorMsg</a:t>
+              <a:t>HttpPost</a:t>
             </a:r>
             <a:r>
               <a:rPr lang="en-US" sz="1400" dirty="0">
                 <a:latin typeface="Courier New" panose="02070309020205020404" pitchFamily="49" charset="0"/>
                 <a:cs typeface="Courier New" panose="02070309020205020404" pitchFamily="49" charset="0"/>
               </a:rPr>
-              <a:t> = </a:t>
-            </a:r>
-            <a:r>
-              <a:rPr lang="en-US" sz="1400" dirty="0" err="1">
-                <a:latin typeface="Courier New" panose="02070309020205020404" pitchFamily="49" charset="0"/>
-                <a:cs typeface="Courier New" panose="02070309020205020404" pitchFamily="49" charset="0"/>
-              </a:rPr>
-              <a:t>refundResponse</a:t>
-            </a:r>
-            <a:r>
-              <a:rPr lang="en-US" sz="1400" dirty="0">
-                <a:latin typeface="Courier New" panose="02070309020205020404" pitchFamily="49" charset="0"/>
-                <a:cs typeface="Courier New" panose="02070309020205020404" pitchFamily="49" charset="0"/>
-              </a:rPr>
-              <a:t>?.Message ?? "Unknown error during refund";</a:t>
+              <a:t>("cancel/{id}")]</a:t>
             </a:r>
           </a:p>
           <a:p>
@@ -4635,35 +4631,35 @@
                 <a:latin typeface="Courier New" panose="02070309020205020404" pitchFamily="49" charset="0"/>
                 <a:cs typeface="Courier New" panose="02070309020205020404" pitchFamily="49" charset="0"/>
               </a:rPr>
-              <a:t>            return </a:t>
+              <a:t>public async Task&lt;</a:t>
             </a:r>
             <a:r>
               <a:rPr lang="en-US" sz="1400" dirty="0" err="1">
                 <a:latin typeface="Courier New" panose="02070309020205020404" pitchFamily="49" charset="0"/>
                 <a:cs typeface="Courier New" panose="02070309020205020404" pitchFamily="49" charset="0"/>
               </a:rPr>
-              <a:t>StatusCode</a:t>
+              <a:t>IActionResult</a:t>
             </a:r>
             <a:r>
               <a:rPr lang="en-US" sz="1400" dirty="0">
                 <a:latin typeface="Courier New" panose="02070309020205020404" pitchFamily="49" charset="0"/>
                 <a:cs typeface="Courier New" panose="02070309020205020404" pitchFamily="49" charset="0"/>
               </a:rPr>
-              <a:t>(500, $"Failed to refund payment: {</a:t>
+              <a:t>&gt; </a:t>
             </a:r>
             <a:r>
               <a:rPr lang="en-US" sz="1400" dirty="0" err="1">
                 <a:latin typeface="Courier New" panose="02070309020205020404" pitchFamily="49" charset="0"/>
                 <a:cs typeface="Courier New" panose="02070309020205020404" pitchFamily="49" charset="0"/>
               </a:rPr>
-              <a:t>errorMsg</a:t>
+              <a:t>CancelBooking</a:t>
             </a:r>
             <a:r>
               <a:rPr lang="en-US" sz="1400" dirty="0">
                 <a:latin typeface="Courier New" panose="02070309020205020404" pitchFamily="49" charset="0"/>
                 <a:cs typeface="Courier New" panose="02070309020205020404" pitchFamily="49" charset="0"/>
               </a:rPr>
-              <a:t>}");</a:t>
+              <a:t>(int id)</a:t>
             </a:r>
           </a:p>
           <a:p>
@@ -4681,7 +4677,7 @@
                 <a:latin typeface="Courier New" panose="02070309020205020404" pitchFamily="49" charset="0"/>
                 <a:cs typeface="Courier New" panose="02070309020205020404" pitchFamily="49" charset="0"/>
               </a:rPr>
-              <a:t>        }</a:t>
+              <a:t>{</a:t>
             </a:r>
           </a:p>
           <a:p>
@@ -4699,7 +4695,35 @@
                 <a:latin typeface="Courier New" panose="02070309020205020404" pitchFamily="49" charset="0"/>
                 <a:cs typeface="Courier New" panose="02070309020205020404" pitchFamily="49" charset="0"/>
               </a:rPr>
-              <a:t>    }</a:t>
+              <a:t>    var </a:t>
+            </a:r>
+            <a:r>
+              <a:rPr lang="en-US" sz="1400" dirty="0" err="1">
+                <a:latin typeface="Courier New" panose="02070309020205020404" pitchFamily="49" charset="0"/>
+                <a:cs typeface="Courier New" panose="02070309020205020404" pitchFamily="49" charset="0"/>
+              </a:rPr>
+              <a:t>userId</a:t>
+            </a:r>
+            <a:r>
+              <a:rPr lang="en-US" sz="1400" dirty="0">
+                <a:latin typeface="Courier New" panose="02070309020205020404" pitchFamily="49" charset="0"/>
+                <a:cs typeface="Courier New" panose="02070309020205020404" pitchFamily="49" charset="0"/>
+              </a:rPr>
+              <a:t> = </a:t>
+            </a:r>
+            <a:r>
+              <a:rPr lang="en-US" sz="1400" dirty="0" err="1">
+                <a:latin typeface="Courier New" panose="02070309020205020404" pitchFamily="49" charset="0"/>
+                <a:cs typeface="Courier New" panose="02070309020205020404" pitchFamily="49" charset="0"/>
+              </a:rPr>
+              <a:t>GetUserId</a:t>
+            </a:r>
+            <a:r>
+              <a:rPr lang="en-US" sz="1400" dirty="0">
+                <a:latin typeface="Courier New" panose="02070309020205020404" pitchFamily="49" charset="0"/>
+                <a:cs typeface="Courier New" panose="02070309020205020404" pitchFamily="49" charset="0"/>
+              </a:rPr>
+              <a:t>();</a:t>
             </a:r>
           </a:p>
           <a:p>
@@ -4717,63 +4741,21 @@
                 <a:latin typeface="Courier New" panose="02070309020205020404" pitchFamily="49" charset="0"/>
                 <a:cs typeface="Courier New" panose="02070309020205020404" pitchFamily="49" charset="0"/>
               </a:rPr>
-              <a:t>    if (</a:t>
+              <a:t>    var token = </a:t>
             </a:r>
             <a:r>
               <a:rPr lang="en-US" sz="1400" dirty="0" err="1">
                 <a:latin typeface="Courier New" panose="02070309020205020404" pitchFamily="49" charset="0"/>
                 <a:cs typeface="Courier New" panose="02070309020205020404" pitchFamily="49" charset="0"/>
               </a:rPr>
-              <a:t>booking.Status</a:t>
+              <a:t>GetToken</a:t>
             </a:r>
             <a:r>
               <a:rPr lang="en-US" sz="1400" dirty="0">
                 <a:latin typeface="Courier New" panose="02070309020205020404" pitchFamily="49" charset="0"/>
                 <a:cs typeface="Courier New" panose="02070309020205020404" pitchFamily="49" charset="0"/>
               </a:rPr>
-              <a:t> == </a:t>
-            </a:r>
-            <a:r>
-              <a:rPr lang="en-US" sz="1400" dirty="0" err="1">
-                <a:latin typeface="Courier New" panose="02070309020205020404" pitchFamily="49" charset="0"/>
-                <a:cs typeface="Courier New" panose="02070309020205020404" pitchFamily="49" charset="0"/>
-              </a:rPr>
-              <a:t>BookingStatus.Confirmed</a:t>
-            </a:r>
-            <a:r>
-              <a:rPr lang="en-US" sz="1400" dirty="0">
-                <a:latin typeface="Courier New" panose="02070309020205020404" pitchFamily="49" charset="0"/>
-                <a:cs typeface="Courier New" panose="02070309020205020404" pitchFamily="49" charset="0"/>
-              </a:rPr>
-              <a:t> || </a:t>
-            </a:r>
-            <a:r>
-              <a:rPr lang="en-US" sz="1400" dirty="0" err="1">
-                <a:latin typeface="Courier New" panose="02070309020205020404" pitchFamily="49" charset="0"/>
-                <a:cs typeface="Courier New" panose="02070309020205020404" pitchFamily="49" charset="0"/>
-              </a:rPr>
-              <a:t>booking.Status</a:t>
-            </a:r>
-            <a:r>
-              <a:rPr lang="en-US" sz="1400" dirty="0">
-                <a:latin typeface="Courier New" panose="02070309020205020404" pitchFamily="49" charset="0"/>
-                <a:cs typeface="Courier New" panose="02070309020205020404" pitchFamily="49" charset="0"/>
-              </a:rPr>
-              <a:t> == </a:t>
-            </a:r>
-            <a:r>
-              <a:rPr lang="en-US" sz="1400" dirty="0" err="1">
-                <a:latin typeface="Courier New" panose="02070309020205020404" pitchFamily="49" charset="0"/>
-                <a:cs typeface="Courier New" panose="02070309020205020404" pitchFamily="49" charset="0"/>
-              </a:rPr>
-              <a:t>BookingStatus.PendingPayment</a:t>
-            </a:r>
-            <a:r>
-              <a:rPr lang="en-US" sz="1400" dirty="0">
-                <a:latin typeface="Courier New" panose="02070309020205020404" pitchFamily="49" charset="0"/>
-                <a:cs typeface="Courier New" panose="02070309020205020404" pitchFamily="49" charset="0"/>
-              </a:rPr>
-              <a:t>)</a:t>
+              <a:t>();</a:t>
             </a:r>
           </a:p>
           <a:p>
@@ -4791,7 +4773,21 @@
                 <a:latin typeface="Courier New" panose="02070309020205020404" pitchFamily="49" charset="0"/>
                 <a:cs typeface="Courier New" panose="02070309020205020404" pitchFamily="49" charset="0"/>
               </a:rPr>
-              <a:t>    {</a:t>
+              <a:t>    var booking = await _</a:t>
+            </a:r>
+            <a:r>
+              <a:rPr lang="en-US" sz="1400" dirty="0" err="1">
+                <a:latin typeface="Courier New" panose="02070309020205020404" pitchFamily="49" charset="0"/>
+                <a:cs typeface="Courier New" panose="02070309020205020404" pitchFamily="49" charset="0"/>
+              </a:rPr>
+              <a:t>context.Bookings.FindAsync</a:t>
+            </a:r>
+            <a:r>
+              <a:rPr lang="en-US" sz="1400" dirty="0">
+                <a:latin typeface="Courier New" panose="02070309020205020404" pitchFamily="49" charset="0"/>
+                <a:cs typeface="Courier New" panose="02070309020205020404" pitchFamily="49" charset="0"/>
+              </a:rPr>
+              <a:t>(id);</a:t>
             </a:r>
           </a:p>
           <a:p>
@@ -4804,55 +4800,10 @@
               </a:spcBef>
               <a:buNone/>
             </a:pPr>
-            <a:r>
-              <a:rPr lang="en-US" sz="1400" dirty="0">
-                <a:latin typeface="Courier New" panose="02070309020205020404" pitchFamily="49" charset="0"/>
-                <a:cs typeface="Courier New" panose="02070309020205020404" pitchFamily="49" charset="0"/>
-              </a:rPr>
-              <a:t>        await _</a:t>
-            </a:r>
-            <a:r>
-              <a:rPr lang="en-US" sz="1400" dirty="0" err="1">
-                <a:latin typeface="Courier New" panose="02070309020205020404" pitchFamily="49" charset="0"/>
-                <a:cs typeface="Courier New" panose="02070309020205020404" pitchFamily="49" charset="0"/>
-              </a:rPr>
-              <a:t>tourService.ReleaseSeatAsync</a:t>
-            </a:r>
-            <a:r>
-              <a:rPr lang="en-US" sz="1400" dirty="0">
-                <a:latin typeface="Courier New" panose="02070309020205020404" pitchFamily="49" charset="0"/>
-                <a:cs typeface="Courier New" panose="02070309020205020404" pitchFamily="49" charset="0"/>
-              </a:rPr>
-              <a:t>(</a:t>
-            </a:r>
-            <a:r>
-              <a:rPr lang="en-US" sz="1400" dirty="0" err="1">
-                <a:latin typeface="Courier New" panose="02070309020205020404" pitchFamily="49" charset="0"/>
-                <a:cs typeface="Courier New" panose="02070309020205020404" pitchFamily="49" charset="0"/>
-              </a:rPr>
-              <a:t>booking.TourId</a:t>
-            </a:r>
-            <a:r>
-              <a:rPr lang="en-US" sz="1400" dirty="0">
-                <a:latin typeface="Courier New" panose="02070309020205020404" pitchFamily="49" charset="0"/>
-                <a:cs typeface="Courier New" panose="02070309020205020404" pitchFamily="49" charset="0"/>
-              </a:rPr>
-              <a:t>, </a:t>
-            </a:r>
-            <a:r>
-              <a:rPr lang="en-US" sz="1400" dirty="0" err="1">
-                <a:latin typeface="Courier New" panose="02070309020205020404" pitchFamily="49" charset="0"/>
-                <a:cs typeface="Courier New" panose="02070309020205020404" pitchFamily="49" charset="0"/>
-              </a:rPr>
-              <a:t>booking.NumberOfSeats</a:t>
-            </a:r>
-            <a:r>
-              <a:rPr lang="en-US" sz="1400" dirty="0">
-                <a:latin typeface="Courier New" panose="02070309020205020404" pitchFamily="49" charset="0"/>
-                <a:cs typeface="Courier New" panose="02070309020205020404" pitchFamily="49" charset="0"/>
-              </a:rPr>
-              <a:t>, token);</a:t>
-            </a:r>
+            <a:endParaRPr lang="en-US" sz="1400" dirty="0">
+              <a:latin typeface="Courier New" panose="02070309020205020404" pitchFamily="49" charset="0"/>
+              <a:cs typeface="Courier New" panose="02070309020205020404" pitchFamily="49" charset="0"/>
+            </a:endParaRPr>
           </a:p>
           <a:p>
             <a:pPr marL="0" indent="0">
@@ -4869,7 +4820,21 @@
                 <a:latin typeface="Courier New" panose="02070309020205020404" pitchFamily="49" charset="0"/>
                 <a:cs typeface="Courier New" panose="02070309020205020404" pitchFamily="49" charset="0"/>
               </a:rPr>
-              <a:t>    }</a:t>
+              <a:t>    if (booking == null) return </a:t>
+            </a:r>
+            <a:r>
+              <a:rPr lang="en-US" sz="1400" dirty="0" err="1">
+                <a:latin typeface="Courier New" panose="02070309020205020404" pitchFamily="49" charset="0"/>
+                <a:cs typeface="Courier New" panose="02070309020205020404" pitchFamily="49" charset="0"/>
+              </a:rPr>
+              <a:t>NotFound</a:t>
+            </a:r>
+            <a:r>
+              <a:rPr lang="en-US" sz="1400" dirty="0">
+                <a:latin typeface="Courier New" panose="02070309020205020404" pitchFamily="49" charset="0"/>
+                <a:cs typeface="Courier New" panose="02070309020205020404" pitchFamily="49" charset="0"/>
+              </a:rPr>
+              <a:t>();</a:t>
             </a:r>
           </a:p>
           <a:p>
@@ -4882,41 +4847,10 @@
               </a:spcBef>
               <a:buNone/>
             </a:pPr>
-            <a:r>
-              <a:rPr lang="en-US" sz="1400" dirty="0">
-                <a:latin typeface="Courier New" panose="02070309020205020404" pitchFamily="49" charset="0"/>
-                <a:cs typeface="Courier New" panose="02070309020205020404" pitchFamily="49" charset="0"/>
-              </a:rPr>
-              <a:t>    </a:t>
-            </a:r>
-            <a:r>
-              <a:rPr lang="en-US" sz="1400" dirty="0" err="1">
-                <a:latin typeface="Courier New" panose="02070309020205020404" pitchFamily="49" charset="0"/>
-                <a:cs typeface="Courier New" panose="02070309020205020404" pitchFamily="49" charset="0"/>
-              </a:rPr>
-              <a:t>booking.Status</a:t>
-            </a:r>
-            <a:r>
-              <a:rPr lang="en-US" sz="1400" dirty="0">
-                <a:latin typeface="Courier New" panose="02070309020205020404" pitchFamily="49" charset="0"/>
-                <a:cs typeface="Courier New" panose="02070309020205020404" pitchFamily="49" charset="0"/>
-              </a:rPr>
-              <a:t> = </a:t>
-            </a:r>
-            <a:r>
-              <a:rPr lang="en-US" sz="1400" dirty="0" err="1">
-                <a:latin typeface="Courier New" panose="02070309020205020404" pitchFamily="49" charset="0"/>
-                <a:cs typeface="Courier New" panose="02070309020205020404" pitchFamily="49" charset="0"/>
-              </a:rPr>
-              <a:t>BookingStatus.Cancelled</a:t>
-            </a:r>
-            <a:r>
-              <a:rPr lang="en-US" sz="1400" dirty="0">
-                <a:latin typeface="Courier New" panose="02070309020205020404" pitchFamily="49" charset="0"/>
-                <a:cs typeface="Courier New" panose="02070309020205020404" pitchFamily="49" charset="0"/>
-              </a:rPr>
-              <a:t>;</a:t>
-            </a:r>
+            <a:endParaRPr lang="en-US" sz="1400" dirty="0">
+              <a:latin typeface="Courier New" panose="02070309020205020404" pitchFamily="49" charset="0"/>
+              <a:cs typeface="Courier New" panose="02070309020205020404" pitchFamily="49" charset="0"/>
+            </a:endParaRPr>
           </a:p>
           <a:p>
             <a:pPr marL="0" indent="0">
@@ -4933,21 +4867,49 @@
                 <a:latin typeface="Courier New" panose="02070309020205020404" pitchFamily="49" charset="0"/>
                 <a:cs typeface="Courier New" panose="02070309020205020404" pitchFamily="49" charset="0"/>
               </a:rPr>
-              <a:t>    </a:t>
+              <a:t>    bool </a:t>
             </a:r>
             <a:r>
               <a:rPr lang="en-US" sz="1400" dirty="0" err="1">
                 <a:latin typeface="Courier New" panose="02070309020205020404" pitchFamily="49" charset="0"/>
                 <a:cs typeface="Courier New" panose="02070309020205020404" pitchFamily="49" charset="0"/>
               </a:rPr>
-              <a:t>booking.FailureReason</a:t>
+              <a:t>isStaff</a:t>
             </a:r>
             <a:r>
               <a:rPr lang="en-US" sz="1400" dirty="0">
                 <a:latin typeface="Courier New" panose="02070309020205020404" pitchFamily="49" charset="0"/>
                 <a:cs typeface="Courier New" panose="02070309020205020404" pitchFamily="49" charset="0"/>
               </a:rPr>
-              <a:t> = "Cancelled by user/manager.";</a:t>
+              <a:t> = </a:t>
+            </a:r>
+            <a:r>
+              <a:rPr lang="en-US" sz="1400" dirty="0" err="1">
+                <a:latin typeface="Courier New" panose="02070309020205020404" pitchFamily="49" charset="0"/>
+                <a:cs typeface="Courier New" panose="02070309020205020404" pitchFamily="49" charset="0"/>
+              </a:rPr>
+              <a:t>User.IsInRole</a:t>
+            </a:r>
+            <a:r>
+              <a:rPr lang="en-US" sz="1400" dirty="0">
+                <a:latin typeface="Courier New" panose="02070309020205020404" pitchFamily="49" charset="0"/>
+                <a:cs typeface="Courier New" panose="02070309020205020404" pitchFamily="49" charset="0"/>
+              </a:rPr>
+              <a:t>("Admin") || </a:t>
+            </a:r>
+            <a:r>
+              <a:rPr lang="en-US" sz="1400" dirty="0" err="1">
+                <a:latin typeface="Courier New" panose="02070309020205020404" pitchFamily="49" charset="0"/>
+                <a:cs typeface="Courier New" panose="02070309020205020404" pitchFamily="49" charset="0"/>
+              </a:rPr>
+              <a:t>User.IsInRole</a:t>
+            </a:r>
+            <a:r>
+              <a:rPr lang="en-US" sz="1400" dirty="0">
+                <a:latin typeface="Courier New" panose="02070309020205020404" pitchFamily="49" charset="0"/>
+                <a:cs typeface="Courier New" panose="02070309020205020404" pitchFamily="49" charset="0"/>
+              </a:rPr>
+              <a:t>("Manager");</a:t>
             </a:r>
           </a:p>
           <a:p>
@@ -4965,21 +4927,49 @@
                 <a:latin typeface="Courier New" panose="02070309020205020404" pitchFamily="49" charset="0"/>
                 <a:cs typeface="Courier New" panose="02070309020205020404" pitchFamily="49" charset="0"/>
               </a:rPr>
-              <a:t>    await _</a:t>
+              <a:t>    if (</a:t>
             </a:r>
             <a:r>
               <a:rPr lang="en-US" sz="1400" dirty="0" err="1">
                 <a:latin typeface="Courier New" panose="02070309020205020404" pitchFamily="49" charset="0"/>
                 <a:cs typeface="Courier New" panose="02070309020205020404" pitchFamily="49" charset="0"/>
               </a:rPr>
-              <a:t>context.SaveChangesAsync</a:t>
+              <a:t>booking.UserId</a:t>
             </a:r>
             <a:r>
               <a:rPr lang="en-US" sz="1400" dirty="0">
                 <a:latin typeface="Courier New" panose="02070309020205020404" pitchFamily="49" charset="0"/>
                 <a:cs typeface="Courier New" panose="02070309020205020404" pitchFamily="49" charset="0"/>
               </a:rPr>
-              <a:t>();</a:t>
+              <a:t> != </a:t>
+            </a:r>
+            <a:r>
+              <a:rPr lang="en-US" sz="1400" dirty="0" err="1">
+                <a:latin typeface="Courier New" panose="02070309020205020404" pitchFamily="49" charset="0"/>
+                <a:cs typeface="Courier New" panose="02070309020205020404" pitchFamily="49" charset="0"/>
+              </a:rPr>
+              <a:t>userId</a:t>
+            </a:r>
+            <a:r>
+              <a:rPr lang="en-US" sz="1400" dirty="0">
+                <a:latin typeface="Courier New" panose="02070309020205020404" pitchFamily="49" charset="0"/>
+                <a:cs typeface="Courier New" panose="02070309020205020404" pitchFamily="49" charset="0"/>
+              </a:rPr>
+              <a:t> &amp;&amp; !</a:t>
+            </a:r>
+            <a:r>
+              <a:rPr lang="en-US" sz="1400" dirty="0" err="1">
+                <a:latin typeface="Courier New" panose="02070309020205020404" pitchFamily="49" charset="0"/>
+                <a:cs typeface="Courier New" panose="02070309020205020404" pitchFamily="49" charset="0"/>
+              </a:rPr>
+              <a:t>isStaff</a:t>
+            </a:r>
+            <a:r>
+              <a:rPr lang="en-US" sz="1400" dirty="0">
+                <a:latin typeface="Courier New" panose="02070309020205020404" pitchFamily="49" charset="0"/>
+                <a:cs typeface="Courier New" panose="02070309020205020404" pitchFamily="49" charset="0"/>
+              </a:rPr>
+              <a:t>) return Forbid();</a:t>
             </a:r>
           </a:p>
           <a:p>
@@ -4992,13 +4982,10 @@
               </a:spcBef>
               <a:buNone/>
             </a:pPr>
-            <a:r>
-              <a:rPr lang="en-US" sz="1400" dirty="0">
-                <a:latin typeface="Courier New" panose="02070309020205020404" pitchFamily="49" charset="0"/>
-                <a:cs typeface="Courier New" panose="02070309020205020404" pitchFamily="49" charset="0"/>
-              </a:rPr>
-              <a:t>    return Ok(new { Message = "Booking cancelled successfully." });</a:t>
-            </a:r>
+            <a:endParaRPr lang="en-US" sz="1400" dirty="0">
+              <a:latin typeface="Courier New" panose="02070309020205020404" pitchFamily="49" charset="0"/>
+              <a:cs typeface="Courier New" panose="02070309020205020404" pitchFamily="49" charset="0"/>
+            </a:endParaRPr>
           </a:p>
           <a:p>
             <a:pPr marL="0" indent="0">
@@ -5015,7 +5002,63 @@
                 <a:latin typeface="Courier New" panose="02070309020205020404" pitchFamily="49" charset="0"/>
                 <a:cs typeface="Courier New" panose="02070309020205020404" pitchFamily="49" charset="0"/>
               </a:rPr>
-              <a:t>}</a:t>
+              <a:t>    if (</a:t>
+            </a:r>
+            <a:r>
+              <a:rPr lang="en-US" sz="1400" dirty="0" err="1">
+                <a:latin typeface="Courier New" panose="02070309020205020404" pitchFamily="49" charset="0"/>
+                <a:cs typeface="Courier New" panose="02070309020205020404" pitchFamily="49" charset="0"/>
+              </a:rPr>
+              <a:t>booking.Status</a:t>
+            </a:r>
+            <a:r>
+              <a:rPr lang="en-US" sz="1400" dirty="0">
+                <a:latin typeface="Courier New" panose="02070309020205020404" pitchFamily="49" charset="0"/>
+                <a:cs typeface="Courier New" panose="02070309020205020404" pitchFamily="49" charset="0"/>
+              </a:rPr>
+              <a:t> == </a:t>
+            </a:r>
+            <a:r>
+              <a:rPr lang="en-US" sz="1400" dirty="0" err="1">
+                <a:latin typeface="Courier New" panose="02070309020205020404" pitchFamily="49" charset="0"/>
+                <a:cs typeface="Courier New" panose="02070309020205020404" pitchFamily="49" charset="0"/>
+              </a:rPr>
+              <a:t>BookingStatus.Cancelled</a:t>
+            </a:r>
+            <a:r>
+              <a:rPr lang="en-US" sz="1400" dirty="0">
+                <a:latin typeface="Courier New" panose="02070309020205020404" pitchFamily="49" charset="0"/>
+                <a:cs typeface="Courier New" panose="02070309020205020404" pitchFamily="49" charset="0"/>
+              </a:rPr>
+              <a:t> || </a:t>
+            </a:r>
+            <a:r>
+              <a:rPr lang="en-US" sz="1400" dirty="0" err="1">
+                <a:latin typeface="Courier New" panose="02070309020205020404" pitchFamily="49" charset="0"/>
+                <a:cs typeface="Courier New" panose="02070309020205020404" pitchFamily="49" charset="0"/>
+              </a:rPr>
+              <a:t>booking.Status</a:t>
+            </a:r>
+            <a:r>
+              <a:rPr lang="en-US" sz="1400" dirty="0">
+                <a:latin typeface="Courier New" panose="02070309020205020404" pitchFamily="49" charset="0"/>
+                <a:cs typeface="Courier New" panose="02070309020205020404" pitchFamily="49" charset="0"/>
+              </a:rPr>
+              <a:t> == </a:t>
+            </a:r>
+            <a:r>
+              <a:rPr lang="en-US" sz="1400" dirty="0" err="1">
+                <a:latin typeface="Courier New" panose="02070309020205020404" pitchFamily="49" charset="0"/>
+                <a:cs typeface="Courier New" panose="02070309020205020404" pitchFamily="49" charset="0"/>
+              </a:rPr>
+              <a:t>BookingStatus.Failed</a:t>
+            </a:r>
+            <a:r>
+              <a:rPr lang="en-US" sz="1400" dirty="0">
+                <a:latin typeface="Courier New" panose="02070309020205020404" pitchFamily="49" charset="0"/>
+                <a:cs typeface="Courier New" panose="02070309020205020404" pitchFamily="49" charset="0"/>
+              </a:rPr>
+              <a:t>)</a:t>
             </a:r>
           </a:p>
           <a:p>
@@ -5028,6 +5071,53 @@
               </a:spcBef>
               <a:buNone/>
             </a:pPr>
+            <a:r>
+              <a:rPr lang="en-US" sz="1400" dirty="0">
+                <a:latin typeface="Courier New" panose="02070309020205020404" pitchFamily="49" charset="0"/>
+                <a:cs typeface="Courier New" panose="02070309020205020404" pitchFamily="49" charset="0"/>
+              </a:rPr>
+              <a:t>        return </a:t>
+            </a:r>
+            <a:r>
+              <a:rPr lang="en-US" sz="1400" dirty="0" err="1">
+                <a:latin typeface="Courier New" panose="02070309020205020404" pitchFamily="49" charset="0"/>
+                <a:cs typeface="Courier New" panose="02070309020205020404" pitchFamily="49" charset="0"/>
+              </a:rPr>
+              <a:t>BadRequest</a:t>
+            </a:r>
+            <a:r>
+              <a:rPr lang="en-US" sz="1400" dirty="0">
+                <a:latin typeface="Courier New" panose="02070309020205020404" pitchFamily="49" charset="0"/>
+                <a:cs typeface="Courier New" panose="02070309020205020404" pitchFamily="49" charset="0"/>
+              </a:rPr>
+              <a:t>("Booking cannot be cancelled.");</a:t>
+            </a:r>
+          </a:p>
+          <a:p>
+            <a:pPr marL="0" indent="0">
+              <a:lnSpc>
+                <a:spcPct val="100000"/>
+              </a:lnSpc>
+              <a:spcBef>
+                <a:spcPts val="0"/>
+              </a:spcBef>
+              <a:buNone/>
+            </a:pPr>
+            <a:endParaRPr lang="en-US" sz="1400" dirty="0">
+              <a:latin typeface="Courier New" panose="02070309020205020404" pitchFamily="49" charset="0"/>
+              <a:cs typeface="Courier New" panose="02070309020205020404" pitchFamily="49" charset="0"/>
+            </a:endParaRPr>
+          </a:p>
+          <a:p>
+            <a:pPr marL="0" indent="0">
+              <a:lnSpc>
+                <a:spcPct val="100000"/>
+              </a:lnSpc>
+              <a:spcBef>
+                <a:spcPts val="0"/>
+              </a:spcBef>
+              <a:buNone/>
+            </a:pPr>
             <a:endParaRPr lang="ru-RU" sz="1300" dirty="0">
               <a:latin typeface="Courier New" panose="02070309020205020404" pitchFamily="49" charset="0"/>
               <a:cs typeface="Courier New" panose="02070309020205020404" pitchFamily="49" charset="0"/>
@@ -5076,6 +5166,912 @@
             <a:fld id="{53C82F7A-B581-4A0B-8CFB-8CE1E64145D9}" type="slidenum">
               <a:rPr lang="ru-RU" smtClean="0"/>
               <a:t>10</a:t>
+            </a:fld>
+            <a:endParaRPr lang="ru-RU" dirty="0"/>
+          </a:p>
+        </p:txBody>
+      </p:sp>
+      <p:sp>
+        <p:nvSpPr>
+          <p:cNvPr id="7" name="TextBox 6">
+            <a:extLst>
+              <a:ext uri="{FF2B5EF4-FFF2-40B4-BE49-F238E27FC236}">
+                <a16:creationId xmlns:a16="http://schemas.microsoft.com/office/drawing/2014/main" id="{B6D5C462-6D7F-48CD-B376-2B3D97669118}"/>
+              </a:ext>
+            </a:extLst>
+          </p:cNvPr>
+          <p:cNvSpPr txBox="1"/>
+          <p:nvPr/>
+        </p:nvSpPr>
+        <p:spPr>
+          <a:xfrm>
+            <a:off x="6427302" y="1780298"/>
+            <a:ext cx="5052392" cy="4185761"/>
+          </a:xfrm>
+          <a:prstGeom prst="rect">
+            <a:avLst/>
+          </a:prstGeom>
+          <a:noFill/>
+        </p:spPr>
+        <p:txBody>
+          <a:bodyPr wrap="square" rtlCol="0">
+            <a:spAutoFit/>
+          </a:bodyPr>
+          <a:lstStyle/>
+          <a:p>
+            <a:r>
+              <a:rPr lang="en-US" sz="1400" dirty="0">
+                <a:latin typeface="Courier New" panose="02070309020205020404" pitchFamily="49" charset="0"/>
+                <a:cs typeface="Courier New" panose="02070309020205020404" pitchFamily="49" charset="0"/>
+              </a:rPr>
+              <a:t> if (</a:t>
+            </a:r>
+            <a:r>
+              <a:rPr lang="en-US" sz="1400" dirty="0" err="1">
+                <a:latin typeface="Courier New" panose="02070309020205020404" pitchFamily="49" charset="0"/>
+                <a:cs typeface="Courier New" panose="02070309020205020404" pitchFamily="49" charset="0"/>
+              </a:rPr>
+              <a:t>booking.Status</a:t>
+            </a:r>
+            <a:r>
+              <a:rPr lang="en-US" sz="1400" dirty="0">
+                <a:latin typeface="Courier New" panose="02070309020205020404" pitchFamily="49" charset="0"/>
+                <a:cs typeface="Courier New" panose="02070309020205020404" pitchFamily="49" charset="0"/>
+              </a:rPr>
+              <a:t> == </a:t>
+            </a:r>
+            <a:r>
+              <a:rPr lang="en-US" sz="1400" dirty="0" err="1">
+                <a:latin typeface="Courier New" panose="02070309020205020404" pitchFamily="49" charset="0"/>
+                <a:cs typeface="Courier New" panose="02070309020205020404" pitchFamily="49" charset="0"/>
+              </a:rPr>
+              <a:t>BookingStatus.Confirmed</a:t>
+            </a:r>
+            <a:r>
+              <a:rPr lang="en-US" sz="1400" dirty="0">
+                <a:latin typeface="Courier New" panose="02070309020205020404" pitchFamily="49" charset="0"/>
+                <a:cs typeface="Courier New" panose="02070309020205020404" pitchFamily="49" charset="0"/>
+              </a:rPr>
+              <a:t> &amp;&amp; </a:t>
+            </a:r>
+            <a:r>
+              <a:rPr lang="en-US" sz="1400" dirty="0" err="1">
+                <a:latin typeface="Courier New" panose="02070309020205020404" pitchFamily="49" charset="0"/>
+                <a:cs typeface="Courier New" panose="02070309020205020404" pitchFamily="49" charset="0"/>
+              </a:rPr>
+              <a:t>booking.PaymentId.HasValue</a:t>
+            </a:r>
+            <a:r>
+              <a:rPr lang="en-US" sz="1400" dirty="0">
+                <a:latin typeface="Courier New" panose="02070309020205020404" pitchFamily="49" charset="0"/>
+                <a:cs typeface="Courier New" panose="02070309020205020404" pitchFamily="49" charset="0"/>
+              </a:rPr>
+              <a:t>)</a:t>
+            </a:r>
+          </a:p>
+          <a:p>
+            <a:r>
+              <a:rPr lang="en-US" sz="1400" dirty="0">
+                <a:latin typeface="Courier New" panose="02070309020205020404" pitchFamily="49" charset="0"/>
+                <a:cs typeface="Courier New" panose="02070309020205020404" pitchFamily="49" charset="0"/>
+              </a:rPr>
+              <a:t>    {</a:t>
+            </a:r>
+          </a:p>
+          <a:p>
+            <a:r>
+              <a:rPr lang="en-US" sz="1400" dirty="0">
+                <a:latin typeface="Courier New" panose="02070309020205020404" pitchFamily="49" charset="0"/>
+                <a:cs typeface="Courier New" panose="02070309020205020404" pitchFamily="49" charset="0"/>
+              </a:rPr>
+              <a:t>        var </a:t>
+            </a:r>
+            <a:r>
+              <a:rPr lang="en-US" sz="1400" dirty="0" err="1">
+                <a:latin typeface="Courier New" panose="02070309020205020404" pitchFamily="49" charset="0"/>
+                <a:cs typeface="Courier New" panose="02070309020205020404" pitchFamily="49" charset="0"/>
+              </a:rPr>
+              <a:t>refundReq</a:t>
+            </a:r>
+            <a:r>
+              <a:rPr lang="en-US" sz="1400" dirty="0">
+                <a:latin typeface="Courier New" panose="02070309020205020404" pitchFamily="49" charset="0"/>
+                <a:cs typeface="Courier New" panose="02070309020205020404" pitchFamily="49" charset="0"/>
+              </a:rPr>
+              <a:t> = new </a:t>
+            </a:r>
+            <a:r>
+              <a:rPr lang="en-US" sz="1400" dirty="0" err="1">
+                <a:latin typeface="Courier New" panose="02070309020205020404" pitchFamily="49" charset="0"/>
+                <a:cs typeface="Courier New" panose="02070309020205020404" pitchFamily="49" charset="0"/>
+              </a:rPr>
+              <a:t>RefundRequest</a:t>
+            </a:r>
+            <a:endParaRPr lang="en-US" sz="1400" dirty="0">
+              <a:latin typeface="Courier New" panose="02070309020205020404" pitchFamily="49" charset="0"/>
+              <a:cs typeface="Courier New" panose="02070309020205020404" pitchFamily="49" charset="0"/>
+            </a:endParaRPr>
+          </a:p>
+          <a:p>
+            <a:r>
+              <a:rPr lang="en-US" sz="1400" dirty="0">
+                <a:latin typeface="Courier New" panose="02070309020205020404" pitchFamily="49" charset="0"/>
+                <a:cs typeface="Courier New" panose="02070309020205020404" pitchFamily="49" charset="0"/>
+              </a:rPr>
+              <a:t>        {</a:t>
+            </a:r>
+          </a:p>
+          <a:p>
+            <a:r>
+              <a:rPr lang="en-US" sz="1400" dirty="0">
+                <a:latin typeface="Courier New" panose="02070309020205020404" pitchFamily="49" charset="0"/>
+                <a:cs typeface="Courier New" panose="02070309020205020404" pitchFamily="49" charset="0"/>
+              </a:rPr>
+              <a:t>            </a:t>
+            </a:r>
+            <a:r>
+              <a:rPr lang="en-US" sz="1400" dirty="0" err="1">
+                <a:latin typeface="Courier New" panose="02070309020205020404" pitchFamily="49" charset="0"/>
+                <a:cs typeface="Courier New" panose="02070309020205020404" pitchFamily="49" charset="0"/>
+              </a:rPr>
+              <a:t>PaymentId</a:t>
+            </a:r>
+            <a:r>
+              <a:rPr lang="en-US" sz="1400" dirty="0">
+                <a:latin typeface="Courier New" panose="02070309020205020404" pitchFamily="49" charset="0"/>
+                <a:cs typeface="Courier New" panose="02070309020205020404" pitchFamily="49" charset="0"/>
+              </a:rPr>
+              <a:t> = </a:t>
+            </a:r>
+            <a:r>
+              <a:rPr lang="en-US" sz="1400" dirty="0" err="1">
+                <a:latin typeface="Courier New" panose="02070309020205020404" pitchFamily="49" charset="0"/>
+                <a:cs typeface="Courier New" panose="02070309020205020404" pitchFamily="49" charset="0"/>
+              </a:rPr>
+              <a:t>booking.PaymentId.Value</a:t>
+            </a:r>
+            <a:r>
+              <a:rPr lang="en-US" sz="1400" dirty="0">
+                <a:latin typeface="Courier New" panose="02070309020205020404" pitchFamily="49" charset="0"/>
+                <a:cs typeface="Courier New" panose="02070309020205020404" pitchFamily="49" charset="0"/>
+              </a:rPr>
+              <a:t>,</a:t>
+            </a:r>
+          </a:p>
+          <a:p>
+            <a:r>
+              <a:rPr lang="en-US" sz="1400" dirty="0">
+                <a:latin typeface="Courier New" panose="02070309020205020404" pitchFamily="49" charset="0"/>
+                <a:cs typeface="Courier New" panose="02070309020205020404" pitchFamily="49" charset="0"/>
+              </a:rPr>
+              <a:t>            Reason = "User requested cancellation of booking."</a:t>
+            </a:r>
+          </a:p>
+          <a:p>
+            <a:r>
+              <a:rPr lang="en-US" sz="1400" dirty="0">
+                <a:latin typeface="Courier New" panose="02070309020205020404" pitchFamily="49" charset="0"/>
+                <a:cs typeface="Courier New" panose="02070309020205020404" pitchFamily="49" charset="0"/>
+              </a:rPr>
+              <a:t>        };</a:t>
+            </a:r>
+          </a:p>
+          <a:p>
+            <a:endParaRPr lang="en-US" sz="1400" dirty="0">
+              <a:latin typeface="Courier New" panose="02070309020205020404" pitchFamily="49" charset="0"/>
+              <a:cs typeface="Courier New" panose="02070309020205020404" pitchFamily="49" charset="0"/>
+            </a:endParaRPr>
+          </a:p>
+          <a:p>
+            <a:r>
+              <a:rPr lang="en-US" sz="1400" dirty="0">
+                <a:latin typeface="Courier New" panose="02070309020205020404" pitchFamily="49" charset="0"/>
+                <a:cs typeface="Courier New" panose="02070309020205020404" pitchFamily="49" charset="0"/>
+              </a:rPr>
+              <a:t>        var </a:t>
+            </a:r>
+            <a:r>
+              <a:rPr lang="en-US" sz="1400" dirty="0" err="1">
+                <a:latin typeface="Courier New" panose="02070309020205020404" pitchFamily="49" charset="0"/>
+                <a:cs typeface="Courier New" panose="02070309020205020404" pitchFamily="49" charset="0"/>
+              </a:rPr>
+              <a:t>refundResponse</a:t>
+            </a:r>
+            <a:r>
+              <a:rPr lang="en-US" sz="1400" dirty="0">
+                <a:latin typeface="Courier New" panose="02070309020205020404" pitchFamily="49" charset="0"/>
+                <a:cs typeface="Courier New" panose="02070309020205020404" pitchFamily="49" charset="0"/>
+              </a:rPr>
+              <a:t> = await _</a:t>
+            </a:r>
+            <a:r>
+              <a:rPr lang="en-US" sz="1400" dirty="0" err="1">
+                <a:latin typeface="Courier New" panose="02070309020205020404" pitchFamily="49" charset="0"/>
+                <a:cs typeface="Courier New" panose="02070309020205020404" pitchFamily="49" charset="0"/>
+              </a:rPr>
+              <a:t>paymentService.RefundPaymentAsync</a:t>
+            </a:r>
+            <a:r>
+              <a:rPr lang="en-US" sz="1400" dirty="0">
+                <a:latin typeface="Courier New" panose="02070309020205020404" pitchFamily="49" charset="0"/>
+                <a:cs typeface="Courier New" panose="02070309020205020404" pitchFamily="49" charset="0"/>
+              </a:rPr>
+              <a:t>(</a:t>
+            </a:r>
+            <a:r>
+              <a:rPr lang="en-US" sz="1400" dirty="0" err="1">
+                <a:latin typeface="Courier New" panose="02070309020205020404" pitchFamily="49" charset="0"/>
+                <a:cs typeface="Courier New" panose="02070309020205020404" pitchFamily="49" charset="0"/>
+              </a:rPr>
+              <a:t>refundReq</a:t>
+            </a:r>
+            <a:r>
+              <a:rPr lang="en-US" sz="1400" dirty="0">
+                <a:latin typeface="Courier New" panose="02070309020205020404" pitchFamily="49" charset="0"/>
+                <a:cs typeface="Courier New" panose="02070309020205020404" pitchFamily="49" charset="0"/>
+              </a:rPr>
+              <a:t>, token);</a:t>
+            </a:r>
+          </a:p>
+          <a:p>
+            <a:endParaRPr lang="en-US" sz="1400" dirty="0">
+              <a:latin typeface="Courier New" panose="02070309020205020404" pitchFamily="49" charset="0"/>
+              <a:cs typeface="Courier New" panose="02070309020205020404" pitchFamily="49" charset="0"/>
+            </a:endParaRPr>
+          </a:p>
+          <a:p>
+            <a:r>
+              <a:rPr lang="en-US" sz="1400" dirty="0">
+                <a:latin typeface="Courier New" panose="02070309020205020404" pitchFamily="49" charset="0"/>
+                <a:cs typeface="Courier New" panose="02070309020205020404" pitchFamily="49" charset="0"/>
+              </a:rPr>
+              <a:t>        if (</a:t>
+            </a:r>
+            <a:r>
+              <a:rPr lang="en-US" sz="1400" dirty="0" err="1">
+                <a:latin typeface="Courier New" panose="02070309020205020404" pitchFamily="49" charset="0"/>
+                <a:cs typeface="Courier New" panose="02070309020205020404" pitchFamily="49" charset="0"/>
+              </a:rPr>
+              <a:t>refundResponse</a:t>
+            </a:r>
+            <a:r>
+              <a:rPr lang="en-US" sz="1400" dirty="0">
+                <a:latin typeface="Courier New" panose="02070309020205020404" pitchFamily="49" charset="0"/>
+                <a:cs typeface="Courier New" panose="02070309020205020404" pitchFamily="49" charset="0"/>
+              </a:rPr>
+              <a:t> == null || !</a:t>
+            </a:r>
+            <a:r>
+              <a:rPr lang="en-US" sz="1400" dirty="0" err="1">
+                <a:latin typeface="Courier New" panose="02070309020205020404" pitchFamily="49" charset="0"/>
+                <a:cs typeface="Courier New" panose="02070309020205020404" pitchFamily="49" charset="0"/>
+              </a:rPr>
+              <a:t>refundResponse.IsSuccess</a:t>
+            </a:r>
+            <a:r>
+              <a:rPr lang="en-US" sz="1400" dirty="0">
+                <a:latin typeface="Courier New" panose="02070309020205020404" pitchFamily="49" charset="0"/>
+                <a:cs typeface="Courier New" panose="02070309020205020404" pitchFamily="49" charset="0"/>
+              </a:rPr>
+              <a:t>)</a:t>
+            </a:r>
+          </a:p>
+          <a:p>
+            <a:r>
+              <a:rPr lang="en-US" sz="1400" dirty="0">
+                <a:latin typeface="Courier New" panose="02070309020205020404" pitchFamily="49" charset="0"/>
+                <a:cs typeface="Courier New" panose="02070309020205020404" pitchFamily="49" charset="0"/>
+              </a:rPr>
+              <a:t>        {</a:t>
+            </a:r>
+          </a:p>
+        </p:txBody>
+      </p:sp>
+      <p:sp>
+        <p:nvSpPr>
+          <p:cNvPr id="9" name="Заголовок 1">
+            <a:extLst>
+              <a:ext uri="{FF2B5EF4-FFF2-40B4-BE49-F238E27FC236}">
+                <a16:creationId xmlns:a16="http://schemas.microsoft.com/office/drawing/2014/main" id="{9538AF17-E65C-47E0-978B-04F070465663}"/>
+              </a:ext>
+            </a:extLst>
+          </p:cNvPr>
+          <p:cNvSpPr>
+            <a:spLocks noGrp="1"/>
+          </p:cNvSpPr>
+          <p:nvPr>
+            <p:ph type="title"/>
+          </p:nvPr>
+        </p:nvSpPr>
+        <p:spPr>
+          <a:xfrm>
+            <a:off x="683260" y="320675"/>
+            <a:ext cx="10825480" cy="1325563"/>
+          </a:xfrm>
+        </p:spPr>
+        <p:txBody>
+          <a:bodyPr>
+            <a:normAutofit/>
+          </a:bodyPr>
+          <a:lstStyle/>
+          <a:p>
+            <a:r>
+              <a:rPr lang="ru-RU" sz="3600" dirty="0"/>
+              <a:t>Реализация</a:t>
+            </a:r>
+            <a:br>
+              <a:rPr lang="ru-RU" sz="3600" dirty="0"/>
+            </a:br>
+            <a:r>
+              <a:rPr lang="ru-RU" sz="2400" dirty="0"/>
+              <a:t>Веб-приложение: метод отмены бронирования</a:t>
+            </a:r>
+            <a:endParaRPr lang="ru-RU" sz="3600" dirty="0"/>
+          </a:p>
+        </p:txBody>
+      </p:sp>
+    </p:spTree>
+    <p:extLst>
+      <p:ext uri="{BB962C8B-B14F-4D97-AF65-F5344CB8AC3E}">
+        <p14:creationId xmlns:p14="http://schemas.microsoft.com/office/powerpoint/2010/main" val="3167726737"/>
+      </p:ext>
+    </p:extLst>
+  </p:cSld>
+  <p:clrMapOvr>
+    <a:masterClrMapping/>
+  </p:clrMapOvr>
+  <p:transition spd="slow">
+    <p:push dir="u"/>
+  </p:transition>
+</p:sld>
+</file>
+
+<file path=ppt/slides/slide11.xml><?xml version="1.0" encoding="utf-8"?>
+<p:sld xmlns:a="http://schemas.openxmlformats.org/drawingml/2006/main" xmlns:r="http://schemas.openxmlformats.org/officeDocument/2006/relationships" xmlns:p="http://schemas.openxmlformats.org/presentationml/2006/main">
+  <p:cSld>
+    <p:spTree>
+      <p:nvGrpSpPr>
+        <p:cNvPr id="1" name=""/>
+        <p:cNvGrpSpPr/>
+        <p:nvPr/>
+      </p:nvGrpSpPr>
+      <p:grpSpPr>
+        <a:xfrm>
+          <a:off x="0" y="0"/>
+          <a:ext cx="0" cy="0"/>
+          <a:chOff x="0" y="0"/>
+          <a:chExt cx="0" cy="0"/>
+        </a:xfrm>
+      </p:grpSpPr>
+      <p:sp>
+        <p:nvSpPr>
+          <p:cNvPr id="3" name="Объект 2">
+            <a:extLst>
+              <a:ext uri="{FF2B5EF4-FFF2-40B4-BE49-F238E27FC236}">
+                <a16:creationId xmlns:a16="http://schemas.microsoft.com/office/drawing/2014/main" id="{F390DBCE-CB13-4B52-BAF8-B83E8E4EE106}"/>
+              </a:ext>
+            </a:extLst>
+          </p:cNvPr>
+          <p:cNvSpPr>
+            <a:spLocks noGrp="1"/>
+          </p:cNvSpPr>
+          <p:nvPr>
+            <p:ph idx="1"/>
+          </p:nvPr>
+        </p:nvSpPr>
+        <p:spPr>
+          <a:xfrm>
+            <a:off x="712306" y="1875498"/>
+            <a:ext cx="5579994" cy="4180025"/>
+          </a:xfrm>
+        </p:spPr>
+        <p:txBody>
+          <a:bodyPr>
+            <a:noAutofit/>
+          </a:bodyPr>
+          <a:lstStyle/>
+          <a:p>
+            <a:pPr marL="0" indent="0">
+              <a:lnSpc>
+                <a:spcPct val="100000"/>
+              </a:lnSpc>
+              <a:spcBef>
+                <a:spcPts val="0"/>
+              </a:spcBef>
+              <a:buNone/>
+            </a:pPr>
+            <a:r>
+              <a:rPr lang="en-US" sz="1400" dirty="0">
+                <a:latin typeface="Courier New" panose="02070309020205020404" pitchFamily="49" charset="0"/>
+                <a:cs typeface="Courier New" panose="02070309020205020404" pitchFamily="49" charset="0"/>
+              </a:rPr>
+              <a:t> var </a:t>
+            </a:r>
+            <a:r>
+              <a:rPr lang="en-US" sz="1400" dirty="0" err="1">
+                <a:latin typeface="Courier New" panose="02070309020205020404" pitchFamily="49" charset="0"/>
+                <a:cs typeface="Courier New" panose="02070309020205020404" pitchFamily="49" charset="0"/>
+              </a:rPr>
+              <a:t>errorMsg</a:t>
+            </a:r>
+            <a:r>
+              <a:rPr lang="en-US" sz="1400" dirty="0">
+                <a:latin typeface="Courier New" panose="02070309020205020404" pitchFamily="49" charset="0"/>
+                <a:cs typeface="Courier New" panose="02070309020205020404" pitchFamily="49" charset="0"/>
+              </a:rPr>
+              <a:t> = </a:t>
+            </a:r>
+            <a:r>
+              <a:rPr lang="en-US" sz="1400" dirty="0" err="1">
+                <a:latin typeface="Courier New" panose="02070309020205020404" pitchFamily="49" charset="0"/>
+                <a:cs typeface="Courier New" panose="02070309020205020404" pitchFamily="49" charset="0"/>
+              </a:rPr>
+              <a:t>refundResponse</a:t>
+            </a:r>
+            <a:r>
+              <a:rPr lang="en-US" sz="1400" dirty="0">
+                <a:latin typeface="Courier New" panose="02070309020205020404" pitchFamily="49" charset="0"/>
+                <a:cs typeface="Courier New" panose="02070309020205020404" pitchFamily="49" charset="0"/>
+              </a:rPr>
+              <a:t>?.Message ?? "Unknown error during refund";</a:t>
+            </a:r>
+          </a:p>
+          <a:p>
+            <a:pPr marL="0" indent="0">
+              <a:lnSpc>
+                <a:spcPct val="100000"/>
+              </a:lnSpc>
+              <a:spcBef>
+                <a:spcPts val="0"/>
+              </a:spcBef>
+              <a:buNone/>
+            </a:pPr>
+            <a:r>
+              <a:rPr lang="en-US" sz="1400" dirty="0">
+                <a:latin typeface="Courier New" panose="02070309020205020404" pitchFamily="49" charset="0"/>
+                <a:cs typeface="Courier New" panose="02070309020205020404" pitchFamily="49" charset="0"/>
+              </a:rPr>
+              <a:t>            return </a:t>
+            </a:r>
+            <a:r>
+              <a:rPr lang="en-US" sz="1400" dirty="0" err="1">
+                <a:latin typeface="Courier New" panose="02070309020205020404" pitchFamily="49" charset="0"/>
+                <a:cs typeface="Courier New" panose="02070309020205020404" pitchFamily="49" charset="0"/>
+              </a:rPr>
+              <a:t>StatusCode</a:t>
+            </a:r>
+            <a:r>
+              <a:rPr lang="en-US" sz="1400" dirty="0">
+                <a:latin typeface="Courier New" panose="02070309020205020404" pitchFamily="49" charset="0"/>
+                <a:cs typeface="Courier New" panose="02070309020205020404" pitchFamily="49" charset="0"/>
+              </a:rPr>
+              <a:t>(500, $"Failed to refund payment: {</a:t>
+            </a:r>
+            <a:r>
+              <a:rPr lang="en-US" sz="1400" dirty="0" err="1">
+                <a:latin typeface="Courier New" panose="02070309020205020404" pitchFamily="49" charset="0"/>
+                <a:cs typeface="Courier New" panose="02070309020205020404" pitchFamily="49" charset="0"/>
+              </a:rPr>
+              <a:t>errorMsg</a:t>
+            </a:r>
+            <a:r>
+              <a:rPr lang="en-US" sz="1400" dirty="0">
+                <a:latin typeface="Courier New" panose="02070309020205020404" pitchFamily="49" charset="0"/>
+                <a:cs typeface="Courier New" panose="02070309020205020404" pitchFamily="49" charset="0"/>
+              </a:rPr>
+              <a:t>}");</a:t>
+            </a:r>
+          </a:p>
+          <a:p>
+            <a:pPr marL="0" indent="0">
+              <a:lnSpc>
+                <a:spcPct val="100000"/>
+              </a:lnSpc>
+              <a:spcBef>
+                <a:spcPts val="0"/>
+              </a:spcBef>
+              <a:buNone/>
+            </a:pPr>
+            <a:r>
+              <a:rPr lang="en-US" sz="1400" dirty="0">
+                <a:latin typeface="Courier New" panose="02070309020205020404" pitchFamily="49" charset="0"/>
+                <a:cs typeface="Courier New" panose="02070309020205020404" pitchFamily="49" charset="0"/>
+              </a:rPr>
+              <a:t>        }</a:t>
+            </a:r>
+          </a:p>
+          <a:p>
+            <a:pPr marL="0" indent="0">
+              <a:lnSpc>
+                <a:spcPct val="100000"/>
+              </a:lnSpc>
+              <a:spcBef>
+                <a:spcPts val="0"/>
+              </a:spcBef>
+              <a:buNone/>
+            </a:pPr>
+            <a:r>
+              <a:rPr lang="en-US" sz="1400" dirty="0">
+                <a:latin typeface="Courier New" panose="02070309020205020404" pitchFamily="49" charset="0"/>
+                <a:cs typeface="Courier New" panose="02070309020205020404" pitchFamily="49" charset="0"/>
+              </a:rPr>
+              <a:t>    }</a:t>
+            </a:r>
+          </a:p>
+          <a:p>
+            <a:pPr marL="0" indent="0">
+              <a:lnSpc>
+                <a:spcPct val="100000"/>
+              </a:lnSpc>
+              <a:spcBef>
+                <a:spcPts val="0"/>
+              </a:spcBef>
+              <a:buNone/>
+            </a:pPr>
+            <a:r>
+              <a:rPr lang="en-US" sz="1400" dirty="0">
+                <a:latin typeface="Courier New" panose="02070309020205020404" pitchFamily="49" charset="0"/>
+                <a:cs typeface="Courier New" panose="02070309020205020404" pitchFamily="49" charset="0"/>
+              </a:rPr>
+              <a:t>    if (</a:t>
+            </a:r>
+            <a:r>
+              <a:rPr lang="en-US" sz="1400" dirty="0" err="1">
+                <a:latin typeface="Courier New" panose="02070309020205020404" pitchFamily="49" charset="0"/>
+                <a:cs typeface="Courier New" panose="02070309020205020404" pitchFamily="49" charset="0"/>
+              </a:rPr>
+              <a:t>booking.Status</a:t>
+            </a:r>
+            <a:r>
+              <a:rPr lang="en-US" sz="1400" dirty="0">
+                <a:latin typeface="Courier New" panose="02070309020205020404" pitchFamily="49" charset="0"/>
+                <a:cs typeface="Courier New" panose="02070309020205020404" pitchFamily="49" charset="0"/>
+              </a:rPr>
+              <a:t> == </a:t>
+            </a:r>
+            <a:r>
+              <a:rPr lang="en-US" sz="1400" dirty="0" err="1">
+                <a:latin typeface="Courier New" panose="02070309020205020404" pitchFamily="49" charset="0"/>
+                <a:cs typeface="Courier New" panose="02070309020205020404" pitchFamily="49" charset="0"/>
+              </a:rPr>
+              <a:t>BookingStatus.Confirmed</a:t>
+            </a:r>
+            <a:r>
+              <a:rPr lang="en-US" sz="1400" dirty="0">
+                <a:latin typeface="Courier New" panose="02070309020205020404" pitchFamily="49" charset="0"/>
+                <a:cs typeface="Courier New" panose="02070309020205020404" pitchFamily="49" charset="0"/>
+              </a:rPr>
+              <a:t> || </a:t>
+            </a:r>
+            <a:r>
+              <a:rPr lang="en-US" sz="1400" dirty="0" err="1">
+                <a:latin typeface="Courier New" panose="02070309020205020404" pitchFamily="49" charset="0"/>
+                <a:cs typeface="Courier New" panose="02070309020205020404" pitchFamily="49" charset="0"/>
+              </a:rPr>
+              <a:t>booking.Status</a:t>
+            </a:r>
+            <a:r>
+              <a:rPr lang="en-US" sz="1400" dirty="0">
+                <a:latin typeface="Courier New" panose="02070309020205020404" pitchFamily="49" charset="0"/>
+                <a:cs typeface="Courier New" panose="02070309020205020404" pitchFamily="49" charset="0"/>
+              </a:rPr>
+              <a:t> == </a:t>
+            </a:r>
+            <a:r>
+              <a:rPr lang="en-US" sz="1400" dirty="0" err="1">
+                <a:latin typeface="Courier New" panose="02070309020205020404" pitchFamily="49" charset="0"/>
+                <a:cs typeface="Courier New" panose="02070309020205020404" pitchFamily="49" charset="0"/>
+              </a:rPr>
+              <a:t>BookingStatus.PendingPayment</a:t>
+            </a:r>
+            <a:r>
+              <a:rPr lang="en-US" sz="1400" dirty="0">
+                <a:latin typeface="Courier New" panose="02070309020205020404" pitchFamily="49" charset="0"/>
+                <a:cs typeface="Courier New" panose="02070309020205020404" pitchFamily="49" charset="0"/>
+              </a:rPr>
+              <a:t>)</a:t>
+            </a:r>
+          </a:p>
+          <a:p>
+            <a:pPr marL="0" indent="0">
+              <a:lnSpc>
+                <a:spcPct val="100000"/>
+              </a:lnSpc>
+              <a:spcBef>
+                <a:spcPts val="0"/>
+              </a:spcBef>
+              <a:buNone/>
+            </a:pPr>
+            <a:r>
+              <a:rPr lang="en-US" sz="1400" dirty="0">
+                <a:latin typeface="Courier New" panose="02070309020205020404" pitchFamily="49" charset="0"/>
+                <a:cs typeface="Courier New" panose="02070309020205020404" pitchFamily="49" charset="0"/>
+              </a:rPr>
+              <a:t>    {</a:t>
+            </a:r>
+          </a:p>
+          <a:p>
+            <a:pPr marL="0" indent="0">
+              <a:lnSpc>
+                <a:spcPct val="100000"/>
+              </a:lnSpc>
+              <a:spcBef>
+                <a:spcPts val="0"/>
+              </a:spcBef>
+              <a:buNone/>
+            </a:pPr>
+            <a:r>
+              <a:rPr lang="en-US" sz="1400" dirty="0">
+                <a:latin typeface="Courier New" panose="02070309020205020404" pitchFamily="49" charset="0"/>
+                <a:cs typeface="Courier New" panose="02070309020205020404" pitchFamily="49" charset="0"/>
+              </a:rPr>
+              <a:t>        await _</a:t>
+            </a:r>
+            <a:r>
+              <a:rPr lang="en-US" sz="1400" dirty="0" err="1">
+                <a:latin typeface="Courier New" panose="02070309020205020404" pitchFamily="49" charset="0"/>
+                <a:cs typeface="Courier New" panose="02070309020205020404" pitchFamily="49" charset="0"/>
+              </a:rPr>
+              <a:t>tourService.ReleaseSeatAsync</a:t>
+            </a:r>
+            <a:r>
+              <a:rPr lang="en-US" sz="1400" dirty="0">
+                <a:latin typeface="Courier New" panose="02070309020205020404" pitchFamily="49" charset="0"/>
+                <a:cs typeface="Courier New" panose="02070309020205020404" pitchFamily="49" charset="0"/>
+              </a:rPr>
+              <a:t>(</a:t>
+            </a:r>
+            <a:r>
+              <a:rPr lang="en-US" sz="1400" dirty="0" err="1">
+                <a:latin typeface="Courier New" panose="02070309020205020404" pitchFamily="49" charset="0"/>
+                <a:cs typeface="Courier New" panose="02070309020205020404" pitchFamily="49" charset="0"/>
+              </a:rPr>
+              <a:t>booking.TourId</a:t>
+            </a:r>
+            <a:r>
+              <a:rPr lang="en-US" sz="1400" dirty="0">
+                <a:latin typeface="Courier New" panose="02070309020205020404" pitchFamily="49" charset="0"/>
+                <a:cs typeface="Courier New" panose="02070309020205020404" pitchFamily="49" charset="0"/>
+              </a:rPr>
+              <a:t>, </a:t>
+            </a:r>
+            <a:r>
+              <a:rPr lang="en-US" sz="1400" dirty="0" err="1">
+                <a:latin typeface="Courier New" panose="02070309020205020404" pitchFamily="49" charset="0"/>
+                <a:cs typeface="Courier New" panose="02070309020205020404" pitchFamily="49" charset="0"/>
+              </a:rPr>
+              <a:t>booking.NumberOfSeats</a:t>
+            </a:r>
+            <a:r>
+              <a:rPr lang="en-US" sz="1400" dirty="0">
+                <a:latin typeface="Courier New" panose="02070309020205020404" pitchFamily="49" charset="0"/>
+                <a:cs typeface="Courier New" panose="02070309020205020404" pitchFamily="49" charset="0"/>
+              </a:rPr>
+              <a:t>, token);</a:t>
+            </a:r>
+          </a:p>
+          <a:p>
+            <a:pPr marL="0" indent="0">
+              <a:lnSpc>
+                <a:spcPct val="100000"/>
+              </a:lnSpc>
+              <a:spcBef>
+                <a:spcPts val="0"/>
+              </a:spcBef>
+              <a:buNone/>
+            </a:pPr>
+            <a:r>
+              <a:rPr lang="en-US" sz="1400" dirty="0">
+                <a:latin typeface="Courier New" panose="02070309020205020404" pitchFamily="49" charset="0"/>
+                <a:cs typeface="Courier New" panose="02070309020205020404" pitchFamily="49" charset="0"/>
+              </a:rPr>
+              <a:t>    }</a:t>
+            </a:r>
+          </a:p>
+          <a:p>
+            <a:pPr marL="0" indent="0">
+              <a:lnSpc>
+                <a:spcPct val="100000"/>
+              </a:lnSpc>
+              <a:spcBef>
+                <a:spcPts val="0"/>
+              </a:spcBef>
+              <a:buNone/>
+            </a:pPr>
+            <a:r>
+              <a:rPr lang="en-US" sz="1400" dirty="0">
+                <a:latin typeface="Courier New" panose="02070309020205020404" pitchFamily="49" charset="0"/>
+                <a:cs typeface="Courier New" panose="02070309020205020404" pitchFamily="49" charset="0"/>
+              </a:rPr>
+              <a:t>    </a:t>
+            </a:r>
+            <a:r>
+              <a:rPr lang="en-US" sz="1400" dirty="0" err="1">
+                <a:latin typeface="Courier New" panose="02070309020205020404" pitchFamily="49" charset="0"/>
+                <a:cs typeface="Courier New" panose="02070309020205020404" pitchFamily="49" charset="0"/>
+              </a:rPr>
+              <a:t>booking.Status</a:t>
+            </a:r>
+            <a:r>
+              <a:rPr lang="en-US" sz="1400" dirty="0">
+                <a:latin typeface="Courier New" panose="02070309020205020404" pitchFamily="49" charset="0"/>
+                <a:cs typeface="Courier New" panose="02070309020205020404" pitchFamily="49" charset="0"/>
+              </a:rPr>
+              <a:t> = </a:t>
+            </a:r>
+            <a:r>
+              <a:rPr lang="en-US" sz="1400" dirty="0" err="1">
+                <a:latin typeface="Courier New" panose="02070309020205020404" pitchFamily="49" charset="0"/>
+                <a:cs typeface="Courier New" panose="02070309020205020404" pitchFamily="49" charset="0"/>
+              </a:rPr>
+              <a:t>BookingStatus.Cancelled</a:t>
+            </a:r>
+            <a:r>
+              <a:rPr lang="en-US" sz="1400" dirty="0">
+                <a:latin typeface="Courier New" panose="02070309020205020404" pitchFamily="49" charset="0"/>
+                <a:cs typeface="Courier New" panose="02070309020205020404" pitchFamily="49" charset="0"/>
+              </a:rPr>
+              <a:t>;</a:t>
+            </a:r>
+          </a:p>
+          <a:p>
+            <a:pPr marL="0" indent="0">
+              <a:lnSpc>
+                <a:spcPct val="100000"/>
+              </a:lnSpc>
+              <a:spcBef>
+                <a:spcPts val="0"/>
+              </a:spcBef>
+              <a:buNone/>
+            </a:pPr>
+            <a:r>
+              <a:rPr lang="en-US" sz="1400" dirty="0">
+                <a:latin typeface="Courier New" panose="02070309020205020404" pitchFamily="49" charset="0"/>
+                <a:cs typeface="Courier New" panose="02070309020205020404" pitchFamily="49" charset="0"/>
+              </a:rPr>
+              <a:t>    </a:t>
+            </a:r>
+            <a:r>
+              <a:rPr lang="en-US" sz="1400" dirty="0" err="1">
+                <a:latin typeface="Courier New" panose="02070309020205020404" pitchFamily="49" charset="0"/>
+                <a:cs typeface="Courier New" panose="02070309020205020404" pitchFamily="49" charset="0"/>
+              </a:rPr>
+              <a:t>booking.FailureReason</a:t>
+            </a:r>
+            <a:r>
+              <a:rPr lang="en-US" sz="1400" dirty="0">
+                <a:latin typeface="Courier New" panose="02070309020205020404" pitchFamily="49" charset="0"/>
+                <a:cs typeface="Courier New" panose="02070309020205020404" pitchFamily="49" charset="0"/>
+              </a:rPr>
+              <a:t> = "Cancelled by user/manager.";</a:t>
+            </a:r>
+          </a:p>
+          <a:p>
+            <a:pPr marL="0" indent="0">
+              <a:lnSpc>
+                <a:spcPct val="100000"/>
+              </a:lnSpc>
+              <a:spcBef>
+                <a:spcPts val="0"/>
+              </a:spcBef>
+              <a:buNone/>
+            </a:pPr>
+            <a:r>
+              <a:rPr lang="en-US" sz="1400" dirty="0">
+                <a:latin typeface="Courier New" panose="02070309020205020404" pitchFamily="49" charset="0"/>
+                <a:cs typeface="Courier New" panose="02070309020205020404" pitchFamily="49" charset="0"/>
+              </a:rPr>
+              <a:t>    await _</a:t>
+            </a:r>
+            <a:r>
+              <a:rPr lang="en-US" sz="1400" dirty="0" err="1">
+                <a:latin typeface="Courier New" panose="02070309020205020404" pitchFamily="49" charset="0"/>
+                <a:cs typeface="Courier New" panose="02070309020205020404" pitchFamily="49" charset="0"/>
+              </a:rPr>
+              <a:t>context.SaveChangesAsync</a:t>
+            </a:r>
+            <a:r>
+              <a:rPr lang="en-US" sz="1400" dirty="0">
+                <a:latin typeface="Courier New" panose="02070309020205020404" pitchFamily="49" charset="0"/>
+                <a:cs typeface="Courier New" panose="02070309020205020404" pitchFamily="49" charset="0"/>
+              </a:rPr>
+              <a:t>();</a:t>
+            </a:r>
+          </a:p>
+          <a:p>
+            <a:pPr marL="0" indent="0">
+              <a:lnSpc>
+                <a:spcPct val="100000"/>
+              </a:lnSpc>
+              <a:spcBef>
+                <a:spcPts val="0"/>
+              </a:spcBef>
+              <a:buNone/>
+            </a:pPr>
+            <a:r>
+              <a:rPr lang="en-US" sz="1400" dirty="0">
+                <a:latin typeface="Courier New" panose="02070309020205020404" pitchFamily="49" charset="0"/>
+                <a:cs typeface="Courier New" panose="02070309020205020404" pitchFamily="49" charset="0"/>
+              </a:rPr>
+              <a:t>    return Ok(new { Message = "Booking cancelled successfully." });</a:t>
+            </a:r>
+          </a:p>
+          <a:p>
+            <a:pPr marL="0" indent="0">
+              <a:lnSpc>
+                <a:spcPct val="100000"/>
+              </a:lnSpc>
+              <a:spcBef>
+                <a:spcPts val="0"/>
+              </a:spcBef>
+              <a:buNone/>
+            </a:pPr>
+            <a:r>
+              <a:rPr lang="en-US" sz="1400" dirty="0">
+                <a:latin typeface="Courier New" panose="02070309020205020404" pitchFamily="49" charset="0"/>
+                <a:cs typeface="Courier New" panose="02070309020205020404" pitchFamily="49" charset="0"/>
+              </a:rPr>
+              <a:t>}</a:t>
+            </a:r>
+          </a:p>
+          <a:p>
+            <a:pPr marL="0" indent="0">
+              <a:lnSpc>
+                <a:spcPct val="100000"/>
+              </a:lnSpc>
+              <a:spcBef>
+                <a:spcPts val="0"/>
+              </a:spcBef>
+              <a:buNone/>
+            </a:pPr>
+            <a:endParaRPr lang="ru-RU" sz="1300" dirty="0">
+              <a:latin typeface="Courier New" panose="02070309020205020404" pitchFamily="49" charset="0"/>
+              <a:cs typeface="Courier New" panose="02070309020205020404" pitchFamily="49" charset="0"/>
+            </a:endParaRPr>
+          </a:p>
+          <a:p>
+            <a:pPr marL="0" indent="0">
+              <a:lnSpc>
+                <a:spcPct val="100000"/>
+              </a:lnSpc>
+              <a:buNone/>
+            </a:pPr>
+            <a:endParaRPr lang="ru-RU" sz="1200" dirty="0">
+              <a:latin typeface="Courier New" panose="02070309020205020404" pitchFamily="49" charset="0"/>
+              <a:cs typeface="Courier New" panose="02070309020205020404" pitchFamily="49" charset="0"/>
+            </a:endParaRPr>
+          </a:p>
+        </p:txBody>
+      </p:sp>
+      <p:sp>
+        <p:nvSpPr>
+          <p:cNvPr id="4" name="Номер слайда 3">
+            <a:extLst>
+              <a:ext uri="{FF2B5EF4-FFF2-40B4-BE49-F238E27FC236}">
+                <a16:creationId xmlns:a16="http://schemas.microsoft.com/office/drawing/2014/main" id="{43464F56-7AB1-43FB-8EF2-541E8608D0DA}"/>
+              </a:ext>
+            </a:extLst>
+          </p:cNvPr>
+          <p:cNvSpPr>
+            <a:spLocks noGrp="1"/>
+          </p:cNvSpPr>
+          <p:nvPr>
+            <p:ph type="sldNum" sz="quarter" idx="12"/>
+          </p:nvPr>
+        </p:nvSpPr>
+        <p:spPr>
+          <a:xfrm>
+            <a:off x="11353800" y="5991225"/>
+            <a:ext cx="514350" cy="365125"/>
+          </a:xfrm>
+        </p:spPr>
+        <p:txBody>
+          <a:bodyPr/>
+          <a:lstStyle/>
+          <a:p>
+            <a:fld id="{53C82F7A-B581-4A0B-8CFB-8CE1E64145D9}" type="slidenum">
+              <a:rPr lang="ru-RU" smtClean="0"/>
+              <a:t>11</a:t>
             </a:fld>
             <a:endParaRPr lang="ru-RU" dirty="0"/>
           </a:p>
@@ -5169,7 +6165,7 @@
 </p:sld>
 </file>
 
-<file path=ppt/slides/slide11.xml><?xml version="1.0" encoding="utf-8"?>
+<file path=ppt/slides/slide12.xml><?xml version="1.0" encoding="utf-8"?>
 <p:sld xmlns:a="http://schemas.openxmlformats.org/drawingml/2006/main" xmlns:r="http://schemas.openxmlformats.org/officeDocument/2006/relationships" xmlns:p="http://schemas.openxmlformats.org/presentationml/2006/main">
   <p:cSld>
     <p:spTree>
@@ -5214,7 +6210,7 @@
           <a:p>
             <a:fld id="{53C82F7A-B581-4A0B-8CFB-8CE1E64145D9}" type="slidenum">
               <a:rPr lang="ru-RU" smtClean="0"/>
-              <a:t>11</a:t>
+              <a:t>12</a:t>
             </a:fld>
             <a:endParaRPr lang="ru-RU" dirty="0"/>
           </a:p>
@@ -5309,7 +6305,7 @@
 </p:sld>
 </file>
 
-<file path=ppt/slides/slide12.xml><?xml version="1.0" encoding="utf-8"?>
+<file path=ppt/slides/slide13.xml><?xml version="1.0" encoding="utf-8"?>
 <p:sld xmlns:a="http://schemas.openxmlformats.org/drawingml/2006/main" xmlns:r="http://schemas.openxmlformats.org/officeDocument/2006/relationships" xmlns:p="http://schemas.openxmlformats.org/presentationml/2006/main">
   <p:cSld>
     <p:spTree>
@@ -5493,7 +6489,7 @@
           <a:p>
             <a:fld id="{53C82F7A-B581-4A0B-8CFB-8CE1E64145D9}" type="slidenum">
               <a:rPr lang="ru-RU" smtClean="0"/>
-              <a:t>12</a:t>
+              <a:t>13</a:t>
             </a:fld>
             <a:endParaRPr lang="ru-RU" dirty="0"/>
           </a:p>
@@ -5545,7 +6541,7 @@
 </p:sld>
 </file>
 
-<file path=ppt/slides/slide13.xml><?xml version="1.0" encoding="utf-8"?>
+<file path=ppt/slides/slide14.xml><?xml version="1.0" encoding="utf-8"?>
 <p:sld xmlns:a="http://schemas.openxmlformats.org/drawingml/2006/main" xmlns:r="http://schemas.openxmlformats.org/officeDocument/2006/relationships" xmlns:p="http://schemas.openxmlformats.org/presentationml/2006/main">
   <p:cSld>
     <p:spTree>
@@ -5614,7 +6610,7 @@
           <a:p>
             <a:fld id="{53C82F7A-B581-4A0B-8CFB-8CE1E64145D9}" type="slidenum">
               <a:rPr lang="ru-RU" smtClean="0"/>
-              <a:t>13</a:t>
+              <a:t>14</a:t>
             </a:fld>
             <a:endParaRPr lang="ru-RU" dirty="0"/>
           </a:p>
@@ -5696,7 +6692,7 @@
 </p:sld>
 </file>
 
-<file path=ppt/slides/slide14.xml><?xml version="1.0" encoding="utf-8"?>
+<file path=ppt/slides/slide15.xml><?xml version="1.0" encoding="utf-8"?>
 <p:sld xmlns:a="http://schemas.openxmlformats.org/drawingml/2006/main" xmlns:r="http://schemas.openxmlformats.org/officeDocument/2006/relationships" xmlns:p="http://schemas.openxmlformats.org/presentationml/2006/main">
   <p:cSld>
     <p:spTree>
@@ -5718,7 +6714,7 @@
           <p:cNvPr id="2" name="Заголовок 1">
             <a:extLst>
               <a:ext uri="{FF2B5EF4-FFF2-40B4-BE49-F238E27FC236}">
-                <a16:creationId xmlns:a16="http://schemas.microsoft.com/office/drawing/2014/main" id="{EC8C8325-E058-49EC-B1F2-6F926BFC82B9}"/>
+                <a16:creationId xmlns:a16="http://schemas.microsoft.com/office/drawing/2014/main" id="{8767A4F2-1BA6-494A-8876-CA07390784A1}"/>
               </a:ext>
             </a:extLst>
           </p:cNvPr>
@@ -5729,227 +6725,596 @@
             <p:ph type="title"/>
           </p:nvPr>
         </p:nvSpPr>
+        <p:spPr/>
+        <p:txBody>
+          <a:bodyPr/>
+          <a:lstStyle/>
+          <a:p>
+            <a:r>
+              <a:rPr lang="ru-RU" dirty="0"/>
+              <a:t>Результаты реализации</a:t>
+            </a:r>
+            <a:endParaRPr lang="ru-RU" sz="2000" dirty="0"/>
+          </a:p>
+        </p:txBody>
+      </p:sp>
+      <p:sp>
+        <p:nvSpPr>
+          <p:cNvPr id="4" name="Номер слайда 3">
+            <a:extLst>
+              <a:ext uri="{FF2B5EF4-FFF2-40B4-BE49-F238E27FC236}">
+                <a16:creationId xmlns:a16="http://schemas.microsoft.com/office/drawing/2014/main" id="{43464F56-7AB1-43FB-8EF2-541E8608D0DA}"/>
+              </a:ext>
+            </a:extLst>
+          </p:cNvPr>
+          <p:cNvSpPr>
+            <a:spLocks noGrp="1"/>
+          </p:cNvSpPr>
+          <p:nvPr>
+            <p:ph type="sldNum" sz="quarter" idx="12"/>
+          </p:nvPr>
+        </p:nvSpPr>
+        <p:spPr/>
+        <p:txBody>
+          <a:bodyPr/>
+          <a:lstStyle/>
+          <a:p>
+            <a:fld id="{53C82F7A-B581-4A0B-8CFB-8CE1E64145D9}" type="slidenum">
+              <a:rPr lang="ru-RU" smtClean="0"/>
+              <a:t>15</a:t>
+            </a:fld>
+            <a:endParaRPr lang="ru-RU" dirty="0"/>
+          </a:p>
+        </p:txBody>
+      </p:sp>
+      <p:pic>
+        <p:nvPicPr>
+          <p:cNvPr id="5" name="Рисунок 4">
+            <a:extLst>
+              <a:ext uri="{FF2B5EF4-FFF2-40B4-BE49-F238E27FC236}">
+                <a16:creationId xmlns:a16="http://schemas.microsoft.com/office/drawing/2014/main" id="{08845E34-C3A0-4324-84A4-93319482EFAA}"/>
+              </a:ext>
+            </a:extLst>
+          </p:cNvPr>
+          <p:cNvPicPr>
+            <a:picLocks noChangeAspect="1"/>
+          </p:cNvPicPr>
+          <p:nvPr/>
+        </p:nvPicPr>
+        <p:blipFill>
+          <a:blip r:embed="rId2">
+            <a:extLst>
+              <a:ext uri="{28A0092B-C50C-407E-A947-70E740481C1C}">
+                <a14:useLocalDpi xmlns:a14="http://schemas.microsoft.com/office/drawing/2010/main" val="0"/>
+              </a:ext>
+            </a:extLst>
+          </a:blip>
+          <a:stretch>
+            <a:fillRect/>
+          </a:stretch>
+        </p:blipFill>
         <p:spPr>
           <a:xfrm>
-            <a:off x="838200" y="203993"/>
-            <a:ext cx="10515600" cy="1325563"/>
+            <a:off x="2307166" y="1567657"/>
+            <a:ext cx="7577667" cy="4546600"/>
           </a:xfrm>
+          <a:prstGeom prst="rect">
+            <a:avLst/>
+          </a:prstGeom>
         </p:spPr>
-        <p:txBody>
-          <a:bodyPr/>
-          <a:lstStyle/>
-          <a:p>
-            <a:r>
-              <a:rPr lang="ru-RU" dirty="0"/>
-              <a:t>Заключение</a:t>
-            </a:r>
-          </a:p>
-        </p:txBody>
-      </p:sp>
-      <p:sp>
-        <p:nvSpPr>
-          <p:cNvPr id="3" name="Объект 2">
-            <a:extLst>
-              <a:ext uri="{FF2B5EF4-FFF2-40B4-BE49-F238E27FC236}">
-                <a16:creationId xmlns:a16="http://schemas.microsoft.com/office/drawing/2014/main" id="{7F0F6151-1AA9-4DB0-B16B-65CD98B20C76}"/>
-              </a:ext>
-            </a:extLst>
-          </p:cNvPr>
-          <p:cNvSpPr>
-            <a:spLocks noGrp="1"/>
-          </p:cNvSpPr>
-          <p:nvPr>
-            <p:ph idx="1"/>
-          </p:nvPr>
-        </p:nvSpPr>
-        <p:spPr>
-          <a:xfrm>
-            <a:off x="838200" y="1333948"/>
-            <a:ext cx="10515600" cy="4351338"/>
-          </a:xfrm>
-        </p:spPr>
-        <p:txBody>
-          <a:bodyPr>
-            <a:noAutofit/>
-          </a:bodyPr>
-          <a:lstStyle/>
-          <a:p>
-            <a:pPr marL="0" indent="0" algn="just">
-              <a:lnSpc>
-                <a:spcPct val="130000"/>
-              </a:lnSpc>
-              <a:spcBef>
-                <a:spcPts val="1200"/>
-              </a:spcBef>
-              <a:buNone/>
-            </a:pPr>
-            <a:r>
-              <a:rPr lang="ru-RU" sz="1800" dirty="0"/>
-              <a:t>В рамках курсового проекта была разработана программная система «Туристическое агентство» на базе </a:t>
-            </a:r>
-            <a:r>
-              <a:rPr lang="ru-RU" sz="1800" dirty="0" err="1"/>
-              <a:t>микросервисной</a:t>
-            </a:r>
-            <a:r>
-              <a:rPr lang="ru-RU" sz="1800" dirty="0"/>
-              <a:t> архитектуры. Проект реализован путем декомпозиции общего функционала на пять независимых сервисов, каждый из которых управляет своим набором данных.</a:t>
-            </a:r>
-          </a:p>
-          <a:p>
-            <a:pPr marL="0" indent="0" algn="just">
-              <a:lnSpc>
-                <a:spcPct val="130000"/>
-              </a:lnSpc>
-              <a:spcBef>
-                <a:spcPts val="1200"/>
-              </a:spcBef>
-              <a:buNone/>
-            </a:pPr>
-            <a:r>
-              <a:rPr lang="ru-RU" sz="1800" dirty="0"/>
-              <a:t>Использовался стек ASP.NET </a:t>
-            </a:r>
-            <a:r>
-              <a:rPr lang="ru-RU" sz="1800" dirty="0" err="1"/>
-              <a:t>Core</a:t>
-            </a:r>
-            <a:r>
-              <a:rPr lang="ru-RU" sz="1800" dirty="0"/>
-              <a:t>, </a:t>
-            </a:r>
-            <a:r>
-              <a:rPr lang="ru-RU" sz="1800" dirty="0" err="1"/>
-              <a:t>Code</a:t>
-            </a:r>
-            <a:r>
-              <a:rPr lang="ru-RU" sz="1800" dirty="0"/>
-              <a:t> </a:t>
-            </a:r>
-            <a:r>
-              <a:rPr lang="ru-RU" sz="1800" dirty="0" err="1"/>
-              <a:t>First</a:t>
-            </a:r>
-            <a:r>
-              <a:rPr lang="ru-RU" sz="1800" dirty="0"/>
-              <a:t> с ORM </a:t>
-            </a:r>
-            <a:r>
-              <a:rPr lang="ru-RU" sz="1800" dirty="0" err="1"/>
-              <a:t>Entity</a:t>
-            </a:r>
-            <a:r>
-              <a:rPr lang="ru-RU" sz="1800" dirty="0"/>
-              <a:t> </a:t>
-            </a:r>
-            <a:r>
-              <a:rPr lang="ru-RU" sz="1800" dirty="0" err="1"/>
-              <a:t>Framework</a:t>
-            </a:r>
-            <a:r>
-              <a:rPr lang="ru-RU" sz="1800" dirty="0"/>
-              <a:t> </a:t>
-            </a:r>
-            <a:r>
-              <a:rPr lang="ru-RU" sz="1800" dirty="0" err="1"/>
-              <a:t>Core</a:t>
-            </a:r>
-            <a:r>
-              <a:rPr lang="ru-RU" sz="1800" dirty="0"/>
-              <a:t> на базе СУБД </a:t>
-            </a:r>
-            <a:r>
-              <a:rPr lang="ru-RU" sz="1800" dirty="0" err="1"/>
-              <a:t>MySQL</a:t>
-            </a:r>
-            <a:r>
-              <a:rPr lang="ru-RU" sz="1800" dirty="0"/>
-              <a:t>. Критически важные аспекты безопасности, включая аутентификацию и авторизацию, были реализованы на основе протокола JWT.</a:t>
-            </a:r>
-          </a:p>
-          <a:p>
-            <a:pPr marL="0" indent="0" algn="just">
-              <a:lnSpc>
-                <a:spcPct val="130000"/>
-              </a:lnSpc>
-              <a:spcBef>
-                <a:spcPts val="1200"/>
-              </a:spcBef>
-              <a:buNone/>
-            </a:pPr>
-            <a:r>
-              <a:rPr lang="ru-RU" sz="1800" dirty="0"/>
-              <a:t>Результатом работы стала полностью функционирующая система </a:t>
-            </a:r>
-            <a:r>
-              <a:rPr lang="ru-RU" sz="1800" dirty="0" err="1"/>
-              <a:t>микросервисов</a:t>
-            </a:r>
-            <a:r>
-              <a:rPr lang="ru-RU" sz="1800" dirty="0"/>
-              <a:t>, готовая к использованию в туристическом агентстве. Надёжность и корректность взаимодействия между всеми компонентами были подтверждены функциональным тестированием API с использованием инструмента </a:t>
-            </a:r>
-            <a:r>
-              <a:rPr lang="ru-RU" sz="1800" dirty="0" err="1"/>
-              <a:t>Postman</a:t>
-            </a:r>
-            <a:r>
-              <a:rPr lang="ru-RU" sz="1800" dirty="0"/>
-              <a:t>.</a:t>
-            </a:r>
-          </a:p>
-          <a:p>
-            <a:pPr marL="0" indent="0" algn="just">
-              <a:lnSpc>
-                <a:spcPct val="130000"/>
-              </a:lnSpc>
-              <a:spcBef>
-                <a:spcPts val="1200"/>
-              </a:spcBef>
-              <a:buNone/>
-            </a:pPr>
-            <a:endParaRPr lang="ru-RU" sz="1800" dirty="0"/>
-          </a:p>
-        </p:txBody>
-      </p:sp>
-      <p:sp>
-        <p:nvSpPr>
-          <p:cNvPr id="4" name="Номер слайда 3">
-            <a:extLst>
-              <a:ext uri="{FF2B5EF4-FFF2-40B4-BE49-F238E27FC236}">
-                <a16:creationId xmlns:a16="http://schemas.microsoft.com/office/drawing/2014/main" id="{377B06A1-8B12-481A-AFF1-7E7430DCBED7}"/>
-              </a:ext>
-            </a:extLst>
-          </p:cNvPr>
-          <p:cNvSpPr>
-            <a:spLocks noGrp="1"/>
-          </p:cNvSpPr>
-          <p:nvPr>
-            <p:ph type="sldNum" sz="quarter" idx="12"/>
-          </p:nvPr>
-        </p:nvSpPr>
-        <p:spPr>
-          <a:xfrm>
-            <a:off x="11380304" y="5991225"/>
-            <a:ext cx="514350" cy="365125"/>
-          </a:xfrm>
-        </p:spPr>
-        <p:txBody>
-          <a:bodyPr/>
-          <a:lstStyle/>
-          <a:p>
-            <a:fld id="{53C82F7A-B581-4A0B-8CFB-8CE1E64145D9}" type="slidenum">
-              <a:rPr lang="ru-RU" smtClean="0"/>
-              <a:t>14</a:t>
-            </a:fld>
-            <a:endParaRPr lang="ru-RU" dirty="0"/>
-          </a:p>
-        </p:txBody>
-      </p:sp>
+      </p:pic>
     </p:spTree>
     <p:extLst>
       <p:ext uri="{BB962C8B-B14F-4D97-AF65-F5344CB8AC3E}">
-        <p14:creationId xmlns:p14="http://schemas.microsoft.com/office/powerpoint/2010/main" val="1764304748"/>
+        <p14:creationId xmlns:p14="http://schemas.microsoft.com/office/powerpoint/2010/main" val="1029899706"/>
+      </p:ext>
+    </p:extLst>
+  </p:cSld>
+  <p:clrMapOvr>
+    <a:masterClrMapping/>
+  </p:clrMapOvr>
+  <p:transition spd="slow">
+    <p:push dir="u"/>
+  </p:transition>
+</p:sld>
+</file>
+
+<file path=ppt/slides/slide16.xml><?xml version="1.0" encoding="utf-8"?>
+<p:sld xmlns:a="http://schemas.openxmlformats.org/drawingml/2006/main" xmlns:r="http://schemas.openxmlformats.org/officeDocument/2006/relationships" xmlns:p="http://schemas.openxmlformats.org/presentationml/2006/main">
+  <p:cSld>
+    <p:spTree>
+      <p:nvGrpSpPr>
+        <p:cNvPr id="1" name=""/>
+        <p:cNvGrpSpPr/>
+        <p:nvPr/>
+      </p:nvGrpSpPr>
+      <p:grpSpPr>
+        <a:xfrm>
+          <a:off x="0" y="0"/>
+          <a:ext cx="0" cy="0"/>
+          <a:chOff x="0" y="0"/>
+          <a:chExt cx="0" cy="0"/>
+        </a:xfrm>
+      </p:grpSpPr>
+      <p:sp>
+        <p:nvSpPr>
+          <p:cNvPr id="2" name="Заголовок 1">
+            <a:extLst>
+              <a:ext uri="{FF2B5EF4-FFF2-40B4-BE49-F238E27FC236}">
+                <a16:creationId xmlns:a16="http://schemas.microsoft.com/office/drawing/2014/main" id="{8767A4F2-1BA6-494A-8876-CA07390784A1}"/>
+              </a:ext>
+            </a:extLst>
+          </p:cNvPr>
+          <p:cNvSpPr>
+            <a:spLocks noGrp="1"/>
+          </p:cNvSpPr>
+          <p:nvPr>
+            <p:ph type="title"/>
+          </p:nvPr>
+        </p:nvSpPr>
+        <p:spPr/>
+        <p:txBody>
+          <a:bodyPr/>
+          <a:lstStyle/>
+          <a:p>
+            <a:r>
+              <a:rPr lang="ru-RU" dirty="0"/>
+              <a:t>Результаты реализации</a:t>
+            </a:r>
+            <a:endParaRPr lang="ru-RU" sz="2000" dirty="0"/>
+          </a:p>
+        </p:txBody>
+      </p:sp>
+      <p:sp>
+        <p:nvSpPr>
+          <p:cNvPr id="4" name="Номер слайда 3">
+            <a:extLst>
+              <a:ext uri="{FF2B5EF4-FFF2-40B4-BE49-F238E27FC236}">
+                <a16:creationId xmlns:a16="http://schemas.microsoft.com/office/drawing/2014/main" id="{43464F56-7AB1-43FB-8EF2-541E8608D0DA}"/>
+              </a:ext>
+            </a:extLst>
+          </p:cNvPr>
+          <p:cNvSpPr>
+            <a:spLocks noGrp="1"/>
+          </p:cNvSpPr>
+          <p:nvPr>
+            <p:ph type="sldNum" sz="quarter" idx="12"/>
+          </p:nvPr>
+        </p:nvSpPr>
+        <p:spPr/>
+        <p:txBody>
+          <a:bodyPr/>
+          <a:lstStyle/>
+          <a:p>
+            <a:fld id="{53C82F7A-B581-4A0B-8CFB-8CE1E64145D9}" type="slidenum">
+              <a:rPr lang="ru-RU" smtClean="0"/>
+              <a:t>16</a:t>
+            </a:fld>
+            <a:endParaRPr lang="ru-RU" dirty="0"/>
+          </a:p>
+        </p:txBody>
+      </p:sp>
+      <p:pic>
+        <p:nvPicPr>
+          <p:cNvPr id="6" name="Рисунок 5">
+            <a:extLst>
+              <a:ext uri="{FF2B5EF4-FFF2-40B4-BE49-F238E27FC236}">
+                <a16:creationId xmlns:a16="http://schemas.microsoft.com/office/drawing/2014/main" id="{071685A5-B125-4E0C-A534-FDD7BF15769B}"/>
+              </a:ext>
+            </a:extLst>
+          </p:cNvPr>
+          <p:cNvPicPr>
+            <a:picLocks noChangeAspect="1"/>
+          </p:cNvPicPr>
+          <p:nvPr/>
+        </p:nvPicPr>
+        <p:blipFill>
+          <a:blip r:embed="rId2">
+            <a:extLst>
+              <a:ext uri="{28A0092B-C50C-407E-A947-70E740481C1C}">
+                <a14:useLocalDpi xmlns:a14="http://schemas.microsoft.com/office/drawing/2010/main" val="0"/>
+              </a:ext>
+            </a:extLst>
+          </a:blip>
+          <a:stretch>
+            <a:fillRect/>
+          </a:stretch>
+        </p:blipFill>
+        <p:spPr>
+          <a:xfrm>
+            <a:off x="2382573" y="1535113"/>
+            <a:ext cx="7426853" cy="4456112"/>
+          </a:xfrm>
+          <a:prstGeom prst="rect">
+            <a:avLst/>
+          </a:prstGeom>
+        </p:spPr>
+      </p:pic>
+    </p:spTree>
+    <p:extLst>
+      <p:ext uri="{BB962C8B-B14F-4D97-AF65-F5344CB8AC3E}">
+        <p14:creationId xmlns:p14="http://schemas.microsoft.com/office/powerpoint/2010/main" val="3355568408"/>
+      </p:ext>
+    </p:extLst>
+  </p:cSld>
+  <p:clrMapOvr>
+    <a:masterClrMapping/>
+  </p:clrMapOvr>
+  <p:transition spd="slow">
+    <p:push dir="u"/>
+  </p:transition>
+</p:sld>
+</file>
+
+<file path=ppt/slides/slide17.xml><?xml version="1.0" encoding="utf-8"?>
+<p:sld xmlns:a="http://schemas.openxmlformats.org/drawingml/2006/main" xmlns:r="http://schemas.openxmlformats.org/officeDocument/2006/relationships" xmlns:p="http://schemas.openxmlformats.org/presentationml/2006/main">
+  <p:cSld>
+    <p:spTree>
+      <p:nvGrpSpPr>
+        <p:cNvPr id="1" name=""/>
+        <p:cNvGrpSpPr/>
+        <p:nvPr/>
+      </p:nvGrpSpPr>
+      <p:grpSpPr>
+        <a:xfrm>
+          <a:off x="0" y="0"/>
+          <a:ext cx="0" cy="0"/>
+          <a:chOff x="0" y="0"/>
+          <a:chExt cx="0" cy="0"/>
+        </a:xfrm>
+      </p:grpSpPr>
+      <p:sp>
+        <p:nvSpPr>
+          <p:cNvPr id="2" name="Заголовок 1">
+            <a:extLst>
+              <a:ext uri="{FF2B5EF4-FFF2-40B4-BE49-F238E27FC236}">
+                <a16:creationId xmlns:a16="http://schemas.microsoft.com/office/drawing/2014/main" id="{8767A4F2-1BA6-494A-8876-CA07390784A1}"/>
+              </a:ext>
+            </a:extLst>
+          </p:cNvPr>
+          <p:cNvSpPr>
+            <a:spLocks noGrp="1"/>
+          </p:cNvSpPr>
+          <p:nvPr>
+            <p:ph type="title"/>
+          </p:nvPr>
+        </p:nvSpPr>
+        <p:spPr/>
+        <p:txBody>
+          <a:bodyPr/>
+          <a:lstStyle/>
+          <a:p>
+            <a:r>
+              <a:rPr lang="ru-RU" dirty="0"/>
+              <a:t>Результаты реализации</a:t>
+            </a:r>
+            <a:endParaRPr lang="ru-RU" sz="2000" dirty="0"/>
+          </a:p>
+        </p:txBody>
+      </p:sp>
+      <p:sp>
+        <p:nvSpPr>
+          <p:cNvPr id="4" name="Номер слайда 3">
+            <a:extLst>
+              <a:ext uri="{FF2B5EF4-FFF2-40B4-BE49-F238E27FC236}">
+                <a16:creationId xmlns:a16="http://schemas.microsoft.com/office/drawing/2014/main" id="{43464F56-7AB1-43FB-8EF2-541E8608D0DA}"/>
+              </a:ext>
+            </a:extLst>
+          </p:cNvPr>
+          <p:cNvSpPr>
+            <a:spLocks noGrp="1"/>
+          </p:cNvSpPr>
+          <p:nvPr>
+            <p:ph type="sldNum" sz="quarter" idx="12"/>
+          </p:nvPr>
+        </p:nvSpPr>
+        <p:spPr/>
+        <p:txBody>
+          <a:bodyPr/>
+          <a:lstStyle/>
+          <a:p>
+            <a:fld id="{53C82F7A-B581-4A0B-8CFB-8CE1E64145D9}" type="slidenum">
+              <a:rPr lang="ru-RU" smtClean="0"/>
+              <a:t>17</a:t>
+            </a:fld>
+            <a:endParaRPr lang="ru-RU" dirty="0"/>
+          </a:p>
+        </p:txBody>
+      </p:sp>
+      <p:pic>
+        <p:nvPicPr>
+          <p:cNvPr id="6" name="Рисунок 5">
+            <a:extLst>
+              <a:ext uri="{FF2B5EF4-FFF2-40B4-BE49-F238E27FC236}">
+                <a16:creationId xmlns:a16="http://schemas.microsoft.com/office/drawing/2014/main" id="{5624A417-C842-49F9-BAAB-D5FAA30A139F}"/>
+              </a:ext>
+            </a:extLst>
+          </p:cNvPr>
+          <p:cNvPicPr>
+            <a:picLocks noChangeAspect="1"/>
+          </p:cNvPicPr>
+          <p:nvPr/>
+        </p:nvPicPr>
+        <p:blipFill>
+          <a:blip r:embed="rId2">
+            <a:extLst>
+              <a:ext uri="{28A0092B-C50C-407E-A947-70E740481C1C}">
+                <a14:useLocalDpi xmlns:a14="http://schemas.microsoft.com/office/drawing/2010/main" val="0"/>
+              </a:ext>
+            </a:extLst>
+          </a:blip>
+          <a:stretch>
+            <a:fillRect/>
+          </a:stretch>
+        </p:blipFill>
+        <p:spPr>
+          <a:xfrm>
+            <a:off x="2421467" y="1581786"/>
+            <a:ext cx="7349065" cy="4409439"/>
+          </a:xfrm>
+          <a:prstGeom prst="rect">
+            <a:avLst/>
+          </a:prstGeom>
+        </p:spPr>
+      </p:pic>
+    </p:spTree>
+    <p:extLst>
+      <p:ext uri="{BB962C8B-B14F-4D97-AF65-F5344CB8AC3E}">
+        <p14:creationId xmlns:p14="http://schemas.microsoft.com/office/powerpoint/2010/main" val="742888280"/>
+      </p:ext>
+    </p:extLst>
+  </p:cSld>
+  <p:clrMapOvr>
+    <a:masterClrMapping/>
+  </p:clrMapOvr>
+  <p:transition spd="slow">
+    <p:push dir="u"/>
+  </p:transition>
+</p:sld>
+</file>
+
+<file path=ppt/slides/slide18.xml><?xml version="1.0" encoding="utf-8"?>
+<p:sld xmlns:a="http://schemas.openxmlformats.org/drawingml/2006/main" xmlns:r="http://schemas.openxmlformats.org/officeDocument/2006/relationships" xmlns:p="http://schemas.openxmlformats.org/presentationml/2006/main">
+  <p:cSld>
+    <p:spTree>
+      <p:nvGrpSpPr>
+        <p:cNvPr id="1" name=""/>
+        <p:cNvGrpSpPr/>
+        <p:nvPr/>
+      </p:nvGrpSpPr>
+      <p:grpSpPr>
+        <a:xfrm>
+          <a:off x="0" y="0"/>
+          <a:ext cx="0" cy="0"/>
+          <a:chOff x="0" y="0"/>
+          <a:chExt cx="0" cy="0"/>
+        </a:xfrm>
+      </p:grpSpPr>
+      <p:sp>
+        <p:nvSpPr>
+          <p:cNvPr id="2" name="Заголовок 1">
+            <a:extLst>
+              <a:ext uri="{FF2B5EF4-FFF2-40B4-BE49-F238E27FC236}">
+                <a16:creationId xmlns:a16="http://schemas.microsoft.com/office/drawing/2014/main" id="{8767A4F2-1BA6-494A-8876-CA07390784A1}"/>
+              </a:ext>
+            </a:extLst>
+          </p:cNvPr>
+          <p:cNvSpPr>
+            <a:spLocks noGrp="1"/>
+          </p:cNvSpPr>
+          <p:nvPr>
+            <p:ph type="title"/>
+          </p:nvPr>
+        </p:nvSpPr>
+        <p:spPr/>
+        <p:txBody>
+          <a:bodyPr/>
+          <a:lstStyle/>
+          <a:p>
+            <a:r>
+              <a:rPr lang="ru-RU" dirty="0"/>
+              <a:t>Результаты реализации</a:t>
+            </a:r>
+            <a:endParaRPr lang="ru-RU" sz="2000" dirty="0"/>
+          </a:p>
+        </p:txBody>
+      </p:sp>
+      <p:sp>
+        <p:nvSpPr>
+          <p:cNvPr id="4" name="Номер слайда 3">
+            <a:extLst>
+              <a:ext uri="{FF2B5EF4-FFF2-40B4-BE49-F238E27FC236}">
+                <a16:creationId xmlns:a16="http://schemas.microsoft.com/office/drawing/2014/main" id="{43464F56-7AB1-43FB-8EF2-541E8608D0DA}"/>
+              </a:ext>
+            </a:extLst>
+          </p:cNvPr>
+          <p:cNvSpPr>
+            <a:spLocks noGrp="1"/>
+          </p:cNvSpPr>
+          <p:nvPr>
+            <p:ph type="sldNum" sz="quarter" idx="12"/>
+          </p:nvPr>
+        </p:nvSpPr>
+        <p:spPr/>
+        <p:txBody>
+          <a:bodyPr/>
+          <a:lstStyle/>
+          <a:p>
+            <a:fld id="{53C82F7A-B581-4A0B-8CFB-8CE1E64145D9}" type="slidenum">
+              <a:rPr lang="ru-RU" smtClean="0"/>
+              <a:t>18</a:t>
+            </a:fld>
+            <a:endParaRPr lang="ru-RU" dirty="0"/>
+          </a:p>
+        </p:txBody>
+      </p:sp>
+      <p:pic>
+        <p:nvPicPr>
+          <p:cNvPr id="6" name="Рисунок 5">
+            <a:extLst>
+              <a:ext uri="{FF2B5EF4-FFF2-40B4-BE49-F238E27FC236}">
+                <a16:creationId xmlns:a16="http://schemas.microsoft.com/office/drawing/2014/main" id="{BEADD2F5-FC1D-49FE-A9B3-54851E988835}"/>
+              </a:ext>
+            </a:extLst>
+          </p:cNvPr>
+          <p:cNvPicPr>
+            <a:picLocks noChangeAspect="1"/>
+          </p:cNvPicPr>
+          <p:nvPr/>
+        </p:nvPicPr>
+        <p:blipFill>
+          <a:blip r:embed="rId2">
+            <a:extLst>
+              <a:ext uri="{28A0092B-C50C-407E-A947-70E740481C1C}">
+                <a14:useLocalDpi xmlns:a14="http://schemas.microsoft.com/office/drawing/2010/main" val="0"/>
+              </a:ext>
+            </a:extLst>
+          </a:blip>
+          <a:stretch>
+            <a:fillRect/>
+          </a:stretch>
+        </p:blipFill>
+        <p:spPr>
+          <a:xfrm>
+            <a:off x="2341033" y="1485265"/>
+            <a:ext cx="7509933" cy="4505960"/>
+          </a:xfrm>
+          <a:prstGeom prst="rect">
+            <a:avLst/>
+          </a:prstGeom>
+        </p:spPr>
+      </p:pic>
+    </p:spTree>
+    <p:extLst>
+      <p:ext uri="{BB962C8B-B14F-4D97-AF65-F5344CB8AC3E}">
+        <p14:creationId xmlns:p14="http://schemas.microsoft.com/office/powerpoint/2010/main" val="2087981194"/>
+      </p:ext>
+    </p:extLst>
+  </p:cSld>
+  <p:clrMapOvr>
+    <a:masterClrMapping/>
+  </p:clrMapOvr>
+  <p:transition spd="slow">
+    <p:push dir="u"/>
+  </p:transition>
+</p:sld>
+</file>
+
+<file path=ppt/slides/slide19.xml><?xml version="1.0" encoding="utf-8"?>
+<p:sld xmlns:a="http://schemas.openxmlformats.org/drawingml/2006/main" xmlns:r="http://schemas.openxmlformats.org/officeDocument/2006/relationships" xmlns:p="http://schemas.openxmlformats.org/presentationml/2006/main">
+  <p:cSld>
+    <p:spTree>
+      <p:nvGrpSpPr>
+        <p:cNvPr id="1" name=""/>
+        <p:cNvGrpSpPr/>
+        <p:nvPr/>
+      </p:nvGrpSpPr>
+      <p:grpSpPr>
+        <a:xfrm>
+          <a:off x="0" y="0"/>
+          <a:ext cx="0" cy="0"/>
+          <a:chOff x="0" y="0"/>
+          <a:chExt cx="0" cy="0"/>
+        </a:xfrm>
+      </p:grpSpPr>
+      <p:sp>
+        <p:nvSpPr>
+          <p:cNvPr id="2" name="Заголовок 1">
+            <a:extLst>
+              <a:ext uri="{FF2B5EF4-FFF2-40B4-BE49-F238E27FC236}">
+                <a16:creationId xmlns:a16="http://schemas.microsoft.com/office/drawing/2014/main" id="{8767A4F2-1BA6-494A-8876-CA07390784A1}"/>
+              </a:ext>
+            </a:extLst>
+          </p:cNvPr>
+          <p:cNvSpPr>
+            <a:spLocks noGrp="1"/>
+          </p:cNvSpPr>
+          <p:nvPr>
+            <p:ph type="title"/>
+          </p:nvPr>
+        </p:nvSpPr>
+        <p:spPr/>
+        <p:txBody>
+          <a:bodyPr/>
+          <a:lstStyle/>
+          <a:p>
+            <a:r>
+              <a:rPr lang="ru-RU" dirty="0"/>
+              <a:t>Результаты реализации</a:t>
+            </a:r>
+            <a:endParaRPr lang="ru-RU" sz="2000" dirty="0"/>
+          </a:p>
+        </p:txBody>
+      </p:sp>
+      <p:sp>
+        <p:nvSpPr>
+          <p:cNvPr id="4" name="Номер слайда 3">
+            <a:extLst>
+              <a:ext uri="{FF2B5EF4-FFF2-40B4-BE49-F238E27FC236}">
+                <a16:creationId xmlns:a16="http://schemas.microsoft.com/office/drawing/2014/main" id="{43464F56-7AB1-43FB-8EF2-541E8608D0DA}"/>
+              </a:ext>
+            </a:extLst>
+          </p:cNvPr>
+          <p:cNvSpPr>
+            <a:spLocks noGrp="1"/>
+          </p:cNvSpPr>
+          <p:nvPr>
+            <p:ph type="sldNum" sz="quarter" idx="12"/>
+          </p:nvPr>
+        </p:nvSpPr>
+        <p:spPr/>
+        <p:txBody>
+          <a:bodyPr/>
+          <a:lstStyle/>
+          <a:p>
+            <a:fld id="{53C82F7A-B581-4A0B-8CFB-8CE1E64145D9}" type="slidenum">
+              <a:rPr lang="ru-RU" smtClean="0"/>
+              <a:t>19</a:t>
+            </a:fld>
+            <a:endParaRPr lang="ru-RU" dirty="0"/>
+          </a:p>
+        </p:txBody>
+      </p:sp>
+      <p:pic>
+        <p:nvPicPr>
+          <p:cNvPr id="6" name="Рисунок 5">
+            <a:extLst>
+              <a:ext uri="{FF2B5EF4-FFF2-40B4-BE49-F238E27FC236}">
+                <a16:creationId xmlns:a16="http://schemas.microsoft.com/office/drawing/2014/main" id="{639D7A34-990B-4131-AEDA-7E7331ECD9EF}"/>
+              </a:ext>
+            </a:extLst>
+          </p:cNvPr>
+          <p:cNvPicPr>
+            <a:picLocks noChangeAspect="1"/>
+          </p:cNvPicPr>
+          <p:nvPr/>
+        </p:nvPicPr>
+        <p:blipFill>
+          <a:blip r:embed="rId2">
+            <a:extLst>
+              <a:ext uri="{28A0092B-C50C-407E-A947-70E740481C1C}">
+                <a14:useLocalDpi xmlns:a14="http://schemas.microsoft.com/office/drawing/2010/main" val="0"/>
+              </a:ext>
+            </a:extLst>
+          </a:blip>
+          <a:stretch>
+            <a:fillRect/>
+          </a:stretch>
+        </p:blipFill>
+        <p:spPr>
+          <a:xfrm>
+            <a:off x="2434167" y="1597025"/>
+            <a:ext cx="7323666" cy="4394200"/>
+          </a:xfrm>
+          <a:prstGeom prst="rect">
+            <a:avLst/>
+          </a:prstGeom>
+        </p:spPr>
+      </p:pic>
+    </p:spTree>
+    <p:extLst>
+      <p:ext uri="{BB962C8B-B14F-4D97-AF65-F5344CB8AC3E}">
+        <p14:creationId xmlns:p14="http://schemas.microsoft.com/office/powerpoint/2010/main" val="2841208773"/>
       </p:ext>
     </p:extLst>
   </p:cSld>
@@ -5997,19 +7362,21 @@
         </p:nvSpPr>
         <p:spPr>
           <a:xfrm>
-            <a:off x="952500" y="968375"/>
-            <a:ext cx="10287000" cy="863600"/>
+            <a:off x="4214283" y="464079"/>
+            <a:ext cx="3763433" cy="863600"/>
           </a:xfrm>
         </p:spPr>
         <p:txBody>
-          <a:bodyPr/>
-          <a:lstStyle/>
-          <a:p>
-            <a:r>
-              <a:rPr lang="ru-RU" dirty="0">
+          <a:bodyPr>
+            <a:normAutofit/>
+          </a:bodyPr>
+          <a:lstStyle/>
+          <a:p>
+            <a:r>
+              <a:rPr lang="ru-RU" sz="3600" dirty="0">
                 <a:latin typeface="Montserrat Alternates" panose="00000500000000000000" pitchFamily="2" charset="-52"/>
               </a:rPr>
-              <a:t>Описание предметной области</a:t>
+              <a:t>Цель работы</a:t>
             </a:r>
           </a:p>
         </p:txBody>
@@ -6032,8 +7399,8 @@
         </p:nvSpPr>
         <p:spPr>
           <a:xfrm>
-            <a:off x="838200" y="2142435"/>
-            <a:ext cx="10515600" cy="3848790"/>
+            <a:off x="838200" y="1172634"/>
+            <a:ext cx="10515600" cy="1385358"/>
           </a:xfrm>
         </p:spPr>
         <p:txBody>
@@ -6042,40 +7409,17 @@
           </a:bodyPr>
           <a:lstStyle/>
           <a:p>
-            <a:pPr marL="0" indent="0" algn="ctr">
+            <a:pPr marL="0" indent="449263" algn="just">
               <a:lnSpc>
                 <a:spcPct val="150000"/>
               </a:lnSpc>
               <a:buNone/>
             </a:pPr>
             <a:r>
-              <a:rPr lang="ru-RU" sz="2000" dirty="0"/>
-              <a:t>Туристическое агентство занимается подбором, формированием и продажей туристических услуг, выступая посредником между клиентами и партнёрами.</a:t>
-            </a:r>
-            <a:endParaRPr lang="ru-RU" sz="2000" dirty="0">
-              <a:latin typeface="Montserrat Alternates" panose="00000500000000000000" pitchFamily="2" charset="-52"/>
-            </a:endParaRPr>
-          </a:p>
-          <a:p>
-            <a:pPr marL="0" indent="0" algn="ctr">
-              <a:lnSpc>
-                <a:spcPct val="150000"/>
-              </a:lnSpc>
-              <a:buNone/>
-            </a:pPr>
-            <a:r>
-              <a:rPr lang="ru-RU" sz="2000" dirty="0"/>
-              <a:t>Агентство обеспечивает удобный доступ к информации о турах и поддерживает клиентов на всех этапах взаимодействия.</a:t>
-            </a:r>
-            <a:r>
-              <a:rPr lang="en-US" sz="2000" dirty="0"/>
-              <a:t> </a:t>
-            </a:r>
-            <a:r>
-              <a:rPr lang="ru-RU" sz="2000" dirty="0"/>
-              <a:t>Ключевые процессы туристического агентства — это поиск и подбор туров, оформление и подтверждение бронирований, проведение оплат и управление актуальными предложениями.</a:t>
-            </a:r>
-            <a:endParaRPr lang="ru-RU" sz="2000" dirty="0">
+              <a:rPr lang="ru-RU" sz="1800" dirty="0"/>
+              <a:t>Разработать программную систему для автоматизации деятельности туристического агентства для повышения эффективности работы с клиентами и партнёрами. </a:t>
+            </a:r>
+            <a:endParaRPr lang="ru-RU" sz="1800" dirty="0">
               <a:latin typeface="Montserrat Alternates" panose="00000500000000000000" pitchFamily="2" charset="-52"/>
             </a:endParaRPr>
           </a:p>
@@ -6110,10 +7454,1075 @@
           </a:p>
         </p:txBody>
       </p:sp>
+      <p:sp>
+        <p:nvSpPr>
+          <p:cNvPr id="6" name="Объект 2">
+            <a:extLst>
+              <a:ext uri="{FF2B5EF4-FFF2-40B4-BE49-F238E27FC236}">
+                <a16:creationId xmlns:a16="http://schemas.microsoft.com/office/drawing/2014/main" id="{BCD65E2D-E212-485A-AB79-D82B35F16089}"/>
+              </a:ext>
+            </a:extLst>
+          </p:cNvPr>
+          <p:cNvSpPr txBox="1">
+            <a:spLocks/>
+          </p:cNvSpPr>
+          <p:nvPr/>
+        </p:nvSpPr>
+        <p:spPr>
+          <a:xfrm>
+            <a:off x="838200" y="3517370"/>
+            <a:ext cx="10515600" cy="2562225"/>
+          </a:xfrm>
+          <a:prstGeom prst="rect">
+            <a:avLst/>
+          </a:prstGeom>
+        </p:spPr>
+        <p:txBody>
+          <a:bodyPr vert="horz" lIns="91440" tIns="45720" rIns="91440" bIns="45720" rtlCol="0">
+            <a:noAutofit/>
+          </a:bodyPr>
+          <a:lstStyle>
+            <a:lvl1pPr marL="228600" indent="-228600" algn="l" defTabSz="914400" rtl="0" eaLnBrk="1" latinLnBrk="0" hangingPunct="1">
+              <a:lnSpc>
+                <a:spcPct val="90000"/>
+              </a:lnSpc>
+              <a:spcBef>
+                <a:spcPts val="1000"/>
+              </a:spcBef>
+              <a:buFont typeface="Arial" panose="020B0604020202020204" pitchFamily="34" charset="0"/>
+              <a:buChar char="•"/>
+              <a:defRPr sz="2800" kern="1200">
+                <a:solidFill>
+                  <a:schemeClr val="tx1"/>
+                </a:solidFill>
+                <a:latin typeface="Montserrat Alternates" panose="00000500000000000000" pitchFamily="2" charset="-52"/>
+                <a:ea typeface="+mn-ea"/>
+                <a:cs typeface="+mn-cs"/>
+              </a:defRPr>
+            </a:lvl1pPr>
+            <a:lvl2pPr marL="685800" indent="-228600" algn="l" defTabSz="914400" rtl="0" eaLnBrk="1" latinLnBrk="0" hangingPunct="1">
+              <a:lnSpc>
+                <a:spcPct val="90000"/>
+              </a:lnSpc>
+              <a:spcBef>
+                <a:spcPts val="500"/>
+              </a:spcBef>
+              <a:buFont typeface="Arial" panose="020B0604020202020204" pitchFamily="34" charset="0"/>
+              <a:buChar char="•"/>
+              <a:defRPr sz="2400" kern="1200">
+                <a:solidFill>
+                  <a:schemeClr val="tx1"/>
+                </a:solidFill>
+                <a:latin typeface="Montserrat Alternates" panose="00000500000000000000" pitchFamily="2" charset="-52"/>
+                <a:ea typeface="+mn-ea"/>
+                <a:cs typeface="+mn-cs"/>
+              </a:defRPr>
+            </a:lvl2pPr>
+            <a:lvl3pPr marL="1143000" indent="-228600" algn="l" defTabSz="914400" rtl="0" eaLnBrk="1" latinLnBrk="0" hangingPunct="1">
+              <a:lnSpc>
+                <a:spcPct val="90000"/>
+              </a:lnSpc>
+              <a:spcBef>
+                <a:spcPts val="500"/>
+              </a:spcBef>
+              <a:buFont typeface="Arial" panose="020B0604020202020204" pitchFamily="34" charset="0"/>
+              <a:buChar char="•"/>
+              <a:defRPr sz="2000" kern="1200">
+                <a:solidFill>
+                  <a:schemeClr val="tx1"/>
+                </a:solidFill>
+                <a:latin typeface="Montserrat Alternates" panose="00000500000000000000" pitchFamily="2" charset="-52"/>
+                <a:ea typeface="+mn-ea"/>
+                <a:cs typeface="+mn-cs"/>
+              </a:defRPr>
+            </a:lvl3pPr>
+            <a:lvl4pPr marL="1600200" indent="-228600" algn="l" defTabSz="914400" rtl="0" eaLnBrk="1" latinLnBrk="0" hangingPunct="1">
+              <a:lnSpc>
+                <a:spcPct val="90000"/>
+              </a:lnSpc>
+              <a:spcBef>
+                <a:spcPts val="500"/>
+              </a:spcBef>
+              <a:buFont typeface="Arial" panose="020B0604020202020204" pitchFamily="34" charset="0"/>
+              <a:buChar char="•"/>
+              <a:defRPr sz="1800" kern="1200">
+                <a:solidFill>
+                  <a:schemeClr val="tx1"/>
+                </a:solidFill>
+                <a:latin typeface="Montserrat Alternates" panose="00000500000000000000" pitchFamily="2" charset="-52"/>
+                <a:ea typeface="+mn-ea"/>
+                <a:cs typeface="+mn-cs"/>
+              </a:defRPr>
+            </a:lvl4pPr>
+            <a:lvl5pPr marL="2057400" indent="-228600" algn="l" defTabSz="914400" rtl="0" eaLnBrk="1" latinLnBrk="0" hangingPunct="1">
+              <a:lnSpc>
+                <a:spcPct val="90000"/>
+              </a:lnSpc>
+              <a:spcBef>
+                <a:spcPts val="500"/>
+              </a:spcBef>
+              <a:buFont typeface="Arial" panose="020B0604020202020204" pitchFamily="34" charset="0"/>
+              <a:buChar char="•"/>
+              <a:defRPr sz="1800" kern="1200">
+                <a:solidFill>
+                  <a:schemeClr val="tx1"/>
+                </a:solidFill>
+                <a:latin typeface="Montserrat Alternates" panose="00000500000000000000" pitchFamily="2" charset="-52"/>
+                <a:ea typeface="+mn-ea"/>
+                <a:cs typeface="+mn-cs"/>
+              </a:defRPr>
+            </a:lvl5pPr>
+            <a:lvl6pPr marL="2514600" indent="-228600" algn="l" defTabSz="914400" rtl="0" eaLnBrk="1" latinLnBrk="0" hangingPunct="1">
+              <a:lnSpc>
+                <a:spcPct val="90000"/>
+              </a:lnSpc>
+              <a:spcBef>
+                <a:spcPts val="500"/>
+              </a:spcBef>
+              <a:buFont typeface="Arial" panose="020B0604020202020204" pitchFamily="34" charset="0"/>
+              <a:buChar char="•"/>
+              <a:defRPr sz="1800" kern="1200">
+                <a:solidFill>
+                  <a:schemeClr val="tx1"/>
+                </a:solidFill>
+                <a:latin typeface="+mn-lt"/>
+                <a:ea typeface="+mn-ea"/>
+                <a:cs typeface="+mn-cs"/>
+              </a:defRPr>
+            </a:lvl6pPr>
+            <a:lvl7pPr marL="2971800" indent="-228600" algn="l" defTabSz="914400" rtl="0" eaLnBrk="1" latinLnBrk="0" hangingPunct="1">
+              <a:lnSpc>
+                <a:spcPct val="90000"/>
+              </a:lnSpc>
+              <a:spcBef>
+                <a:spcPts val="500"/>
+              </a:spcBef>
+              <a:buFont typeface="Arial" panose="020B0604020202020204" pitchFamily="34" charset="0"/>
+              <a:buChar char="•"/>
+              <a:defRPr sz="1800" kern="1200">
+                <a:solidFill>
+                  <a:schemeClr val="tx1"/>
+                </a:solidFill>
+                <a:latin typeface="+mn-lt"/>
+                <a:ea typeface="+mn-ea"/>
+                <a:cs typeface="+mn-cs"/>
+              </a:defRPr>
+            </a:lvl7pPr>
+            <a:lvl8pPr marL="3429000" indent="-228600" algn="l" defTabSz="914400" rtl="0" eaLnBrk="1" latinLnBrk="0" hangingPunct="1">
+              <a:lnSpc>
+                <a:spcPct val="90000"/>
+              </a:lnSpc>
+              <a:spcBef>
+                <a:spcPts val="500"/>
+              </a:spcBef>
+              <a:buFont typeface="Arial" panose="020B0604020202020204" pitchFamily="34" charset="0"/>
+              <a:buChar char="•"/>
+              <a:defRPr sz="1800" kern="1200">
+                <a:solidFill>
+                  <a:schemeClr val="tx1"/>
+                </a:solidFill>
+                <a:latin typeface="+mn-lt"/>
+                <a:ea typeface="+mn-ea"/>
+                <a:cs typeface="+mn-cs"/>
+              </a:defRPr>
+            </a:lvl8pPr>
+            <a:lvl9pPr marL="3886200" indent="-228600" algn="l" defTabSz="914400" rtl="0" eaLnBrk="1" latinLnBrk="0" hangingPunct="1">
+              <a:lnSpc>
+                <a:spcPct val="90000"/>
+              </a:lnSpc>
+              <a:spcBef>
+                <a:spcPts val="500"/>
+              </a:spcBef>
+              <a:buFont typeface="Arial" panose="020B0604020202020204" pitchFamily="34" charset="0"/>
+              <a:buChar char="•"/>
+              <a:defRPr sz="1800" kern="1200">
+                <a:solidFill>
+                  <a:schemeClr val="tx1"/>
+                </a:solidFill>
+                <a:latin typeface="+mn-lt"/>
+                <a:ea typeface="+mn-ea"/>
+                <a:cs typeface="+mn-cs"/>
+              </a:defRPr>
+            </a:lvl9pPr>
+          </a:lstStyle>
+          <a:p>
+            <a:pPr algn="just">
+              <a:lnSpc>
+                <a:spcPct val="100000"/>
+              </a:lnSpc>
+            </a:pPr>
+            <a:r>
+              <a:rPr lang="ru-RU" sz="1800" dirty="0"/>
+              <a:t>предоставить клиентам удобный инструмент для поиска, бронирования и оплаты туров;</a:t>
+            </a:r>
+          </a:p>
+          <a:p>
+            <a:pPr algn="just">
+              <a:lnSpc>
+                <a:spcPct val="100000"/>
+              </a:lnSpc>
+            </a:pPr>
+            <a:r>
+              <a:rPr lang="ru-RU" sz="1800" dirty="0"/>
+              <a:t>обеспечить менеджеров и контент-менеджеров средствами для управления турами и заказами;</a:t>
+            </a:r>
+          </a:p>
+          <a:p>
+            <a:pPr algn="just">
+              <a:lnSpc>
+                <a:spcPct val="100000"/>
+              </a:lnSpc>
+            </a:pPr>
+            <a:r>
+              <a:rPr lang="ru-RU" sz="1800" dirty="0"/>
+              <a:t>организовать взаимодействие с партнёрами (отелями, перевозчиками, туроператорами) через процесс подтверждения бронирований;</a:t>
+            </a:r>
+          </a:p>
+          <a:p>
+            <a:pPr algn="just">
+              <a:lnSpc>
+                <a:spcPct val="100000"/>
+              </a:lnSpc>
+            </a:pPr>
+            <a:r>
+              <a:rPr lang="ru-RU" sz="1800" dirty="0"/>
+              <a:t>вести учёт клиентов, туров, бронирований и оплат.</a:t>
+            </a:r>
+          </a:p>
+        </p:txBody>
+      </p:sp>
+      <p:sp>
+        <p:nvSpPr>
+          <p:cNvPr id="7" name="Заголовок 1">
+            <a:extLst>
+              <a:ext uri="{FF2B5EF4-FFF2-40B4-BE49-F238E27FC236}">
+                <a16:creationId xmlns:a16="http://schemas.microsoft.com/office/drawing/2014/main" id="{CC959731-3E59-45AA-A47C-46D69C712AC6}"/>
+              </a:ext>
+            </a:extLst>
+          </p:cNvPr>
+          <p:cNvSpPr txBox="1">
+            <a:spLocks/>
+          </p:cNvSpPr>
+          <p:nvPr/>
+        </p:nvSpPr>
+        <p:spPr>
+          <a:xfrm>
+            <a:off x="4057649" y="2653770"/>
+            <a:ext cx="4076700" cy="863600"/>
+          </a:xfrm>
+          <a:prstGeom prst="rect">
+            <a:avLst/>
+          </a:prstGeom>
+        </p:spPr>
+        <p:txBody>
+          <a:bodyPr vert="horz" lIns="91440" tIns="45720" rIns="91440" bIns="45720" rtlCol="0" anchor="ctr">
+            <a:normAutofit/>
+          </a:bodyPr>
+          <a:lstStyle>
+            <a:lvl1pPr algn="ctr" defTabSz="914400" rtl="0" eaLnBrk="1" latinLnBrk="0" hangingPunct="1">
+              <a:lnSpc>
+                <a:spcPct val="90000"/>
+              </a:lnSpc>
+              <a:spcBef>
+                <a:spcPct val="0"/>
+              </a:spcBef>
+              <a:buNone/>
+              <a:defRPr sz="4400" kern="1200">
+                <a:solidFill>
+                  <a:schemeClr val="tx1"/>
+                </a:solidFill>
+                <a:latin typeface="Montserrat Alternates" panose="00000500000000000000" pitchFamily="2" charset="-52"/>
+                <a:ea typeface="+mj-ea"/>
+                <a:cs typeface="+mj-cs"/>
+              </a:defRPr>
+            </a:lvl1pPr>
+          </a:lstStyle>
+          <a:p>
+            <a:r>
+              <a:rPr lang="ru-RU" sz="3200" dirty="0"/>
+              <a:t>Задачи системы</a:t>
+            </a:r>
+          </a:p>
+        </p:txBody>
+      </p:sp>
     </p:spTree>
     <p:extLst>
       <p:ext uri="{BB962C8B-B14F-4D97-AF65-F5344CB8AC3E}">
-        <p14:creationId xmlns:p14="http://schemas.microsoft.com/office/powerpoint/2010/main" val="3246186357"/>
+        <p14:creationId xmlns:p14="http://schemas.microsoft.com/office/powerpoint/2010/main" val="516938001"/>
+      </p:ext>
+    </p:extLst>
+  </p:cSld>
+  <p:clrMapOvr>
+    <a:masterClrMapping/>
+  </p:clrMapOvr>
+  <p:transition spd="slow">
+    <p:push dir="u"/>
+  </p:transition>
+</p:sld>
+</file>
+
+<file path=ppt/slides/slide20.xml><?xml version="1.0" encoding="utf-8"?>
+<p:sld xmlns:a="http://schemas.openxmlformats.org/drawingml/2006/main" xmlns:r="http://schemas.openxmlformats.org/officeDocument/2006/relationships" xmlns:p="http://schemas.openxmlformats.org/presentationml/2006/main">
+  <p:cSld>
+    <p:spTree>
+      <p:nvGrpSpPr>
+        <p:cNvPr id="1" name=""/>
+        <p:cNvGrpSpPr/>
+        <p:nvPr/>
+      </p:nvGrpSpPr>
+      <p:grpSpPr>
+        <a:xfrm>
+          <a:off x="0" y="0"/>
+          <a:ext cx="0" cy="0"/>
+          <a:chOff x="0" y="0"/>
+          <a:chExt cx="0" cy="0"/>
+        </a:xfrm>
+      </p:grpSpPr>
+      <p:sp>
+        <p:nvSpPr>
+          <p:cNvPr id="2" name="Заголовок 1">
+            <a:extLst>
+              <a:ext uri="{FF2B5EF4-FFF2-40B4-BE49-F238E27FC236}">
+                <a16:creationId xmlns:a16="http://schemas.microsoft.com/office/drawing/2014/main" id="{8767A4F2-1BA6-494A-8876-CA07390784A1}"/>
+              </a:ext>
+            </a:extLst>
+          </p:cNvPr>
+          <p:cNvSpPr>
+            <a:spLocks noGrp="1"/>
+          </p:cNvSpPr>
+          <p:nvPr>
+            <p:ph type="title"/>
+          </p:nvPr>
+        </p:nvSpPr>
+        <p:spPr/>
+        <p:txBody>
+          <a:bodyPr/>
+          <a:lstStyle/>
+          <a:p>
+            <a:r>
+              <a:rPr lang="ru-RU" dirty="0"/>
+              <a:t>Результаты реализации</a:t>
+            </a:r>
+            <a:endParaRPr lang="ru-RU" sz="2000" dirty="0"/>
+          </a:p>
+        </p:txBody>
+      </p:sp>
+      <p:sp>
+        <p:nvSpPr>
+          <p:cNvPr id="4" name="Номер слайда 3">
+            <a:extLst>
+              <a:ext uri="{FF2B5EF4-FFF2-40B4-BE49-F238E27FC236}">
+                <a16:creationId xmlns:a16="http://schemas.microsoft.com/office/drawing/2014/main" id="{43464F56-7AB1-43FB-8EF2-541E8608D0DA}"/>
+              </a:ext>
+            </a:extLst>
+          </p:cNvPr>
+          <p:cNvSpPr>
+            <a:spLocks noGrp="1"/>
+          </p:cNvSpPr>
+          <p:nvPr>
+            <p:ph type="sldNum" sz="quarter" idx="12"/>
+          </p:nvPr>
+        </p:nvSpPr>
+        <p:spPr/>
+        <p:txBody>
+          <a:bodyPr/>
+          <a:lstStyle/>
+          <a:p>
+            <a:fld id="{53C82F7A-B581-4A0B-8CFB-8CE1E64145D9}" type="slidenum">
+              <a:rPr lang="ru-RU" smtClean="0"/>
+              <a:t>20</a:t>
+            </a:fld>
+            <a:endParaRPr lang="ru-RU" dirty="0"/>
+          </a:p>
+        </p:txBody>
+      </p:sp>
+      <p:pic>
+        <p:nvPicPr>
+          <p:cNvPr id="6" name="Рисунок 5">
+            <a:extLst>
+              <a:ext uri="{FF2B5EF4-FFF2-40B4-BE49-F238E27FC236}">
+                <a16:creationId xmlns:a16="http://schemas.microsoft.com/office/drawing/2014/main" id="{6AE2B9D4-580A-42E6-BFE3-70AD698AAF59}"/>
+              </a:ext>
+            </a:extLst>
+          </p:cNvPr>
+          <p:cNvPicPr>
+            <a:picLocks noChangeAspect="1"/>
+          </p:cNvPicPr>
+          <p:nvPr/>
+        </p:nvPicPr>
+        <p:blipFill>
+          <a:blip r:embed="rId2">
+            <a:extLst>
+              <a:ext uri="{28A0092B-C50C-407E-A947-70E740481C1C}">
+                <a14:useLocalDpi xmlns:a14="http://schemas.microsoft.com/office/drawing/2010/main" val="0"/>
+              </a:ext>
+            </a:extLst>
+          </a:blip>
+          <a:stretch>
+            <a:fillRect/>
+          </a:stretch>
+        </p:blipFill>
+        <p:spPr>
+          <a:xfrm>
+            <a:off x="2400300" y="1556385"/>
+            <a:ext cx="7391400" cy="4434840"/>
+          </a:xfrm>
+          <a:prstGeom prst="rect">
+            <a:avLst/>
+          </a:prstGeom>
+        </p:spPr>
+      </p:pic>
+    </p:spTree>
+    <p:extLst>
+      <p:ext uri="{BB962C8B-B14F-4D97-AF65-F5344CB8AC3E}">
+        <p14:creationId xmlns:p14="http://schemas.microsoft.com/office/powerpoint/2010/main" val="3082371734"/>
+      </p:ext>
+    </p:extLst>
+  </p:cSld>
+  <p:clrMapOvr>
+    <a:masterClrMapping/>
+  </p:clrMapOvr>
+  <p:transition spd="slow">
+    <p:push dir="u"/>
+  </p:transition>
+</p:sld>
+</file>
+
+<file path=ppt/slides/slide21.xml><?xml version="1.0" encoding="utf-8"?>
+<p:sld xmlns:a="http://schemas.openxmlformats.org/drawingml/2006/main" xmlns:r="http://schemas.openxmlformats.org/officeDocument/2006/relationships" xmlns:p="http://schemas.openxmlformats.org/presentationml/2006/main">
+  <p:cSld>
+    <p:spTree>
+      <p:nvGrpSpPr>
+        <p:cNvPr id="1" name=""/>
+        <p:cNvGrpSpPr/>
+        <p:nvPr/>
+      </p:nvGrpSpPr>
+      <p:grpSpPr>
+        <a:xfrm>
+          <a:off x="0" y="0"/>
+          <a:ext cx="0" cy="0"/>
+          <a:chOff x="0" y="0"/>
+          <a:chExt cx="0" cy="0"/>
+        </a:xfrm>
+      </p:grpSpPr>
+      <p:sp>
+        <p:nvSpPr>
+          <p:cNvPr id="2" name="Заголовок 1">
+            <a:extLst>
+              <a:ext uri="{FF2B5EF4-FFF2-40B4-BE49-F238E27FC236}">
+                <a16:creationId xmlns:a16="http://schemas.microsoft.com/office/drawing/2014/main" id="{8767A4F2-1BA6-494A-8876-CA07390784A1}"/>
+              </a:ext>
+            </a:extLst>
+          </p:cNvPr>
+          <p:cNvSpPr>
+            <a:spLocks noGrp="1"/>
+          </p:cNvSpPr>
+          <p:nvPr>
+            <p:ph type="title"/>
+          </p:nvPr>
+        </p:nvSpPr>
+        <p:spPr/>
+        <p:txBody>
+          <a:bodyPr/>
+          <a:lstStyle/>
+          <a:p>
+            <a:r>
+              <a:rPr lang="ru-RU" dirty="0"/>
+              <a:t>Результаты реализации</a:t>
+            </a:r>
+            <a:endParaRPr lang="ru-RU" sz="2000" dirty="0"/>
+          </a:p>
+        </p:txBody>
+      </p:sp>
+      <p:sp>
+        <p:nvSpPr>
+          <p:cNvPr id="4" name="Номер слайда 3">
+            <a:extLst>
+              <a:ext uri="{FF2B5EF4-FFF2-40B4-BE49-F238E27FC236}">
+                <a16:creationId xmlns:a16="http://schemas.microsoft.com/office/drawing/2014/main" id="{43464F56-7AB1-43FB-8EF2-541E8608D0DA}"/>
+              </a:ext>
+            </a:extLst>
+          </p:cNvPr>
+          <p:cNvSpPr>
+            <a:spLocks noGrp="1"/>
+          </p:cNvSpPr>
+          <p:nvPr>
+            <p:ph type="sldNum" sz="quarter" idx="12"/>
+          </p:nvPr>
+        </p:nvSpPr>
+        <p:spPr/>
+        <p:txBody>
+          <a:bodyPr/>
+          <a:lstStyle/>
+          <a:p>
+            <a:fld id="{53C82F7A-B581-4A0B-8CFB-8CE1E64145D9}" type="slidenum">
+              <a:rPr lang="ru-RU" smtClean="0"/>
+              <a:t>21</a:t>
+            </a:fld>
+            <a:endParaRPr lang="ru-RU" dirty="0"/>
+          </a:p>
+        </p:txBody>
+      </p:sp>
+      <p:pic>
+        <p:nvPicPr>
+          <p:cNvPr id="6" name="Рисунок 5">
+            <a:extLst>
+              <a:ext uri="{FF2B5EF4-FFF2-40B4-BE49-F238E27FC236}">
+                <a16:creationId xmlns:a16="http://schemas.microsoft.com/office/drawing/2014/main" id="{7A83B9BC-BA68-4384-A517-7404995E1664}"/>
+              </a:ext>
+            </a:extLst>
+          </p:cNvPr>
+          <p:cNvPicPr>
+            <a:picLocks noChangeAspect="1"/>
+          </p:cNvPicPr>
+          <p:nvPr/>
+        </p:nvPicPr>
+        <p:blipFill>
+          <a:blip r:embed="rId2">
+            <a:extLst>
+              <a:ext uri="{28A0092B-C50C-407E-A947-70E740481C1C}">
+                <a14:useLocalDpi xmlns:a14="http://schemas.microsoft.com/office/drawing/2010/main" val="0"/>
+              </a:ext>
+            </a:extLst>
+          </a:blip>
+          <a:stretch>
+            <a:fillRect/>
+          </a:stretch>
+        </p:blipFill>
+        <p:spPr>
+          <a:xfrm>
+            <a:off x="2512219" y="1690688"/>
+            <a:ext cx="7167561" cy="4300537"/>
+          </a:xfrm>
+          <a:prstGeom prst="rect">
+            <a:avLst/>
+          </a:prstGeom>
+        </p:spPr>
+      </p:pic>
+    </p:spTree>
+    <p:extLst>
+      <p:ext uri="{BB962C8B-B14F-4D97-AF65-F5344CB8AC3E}">
+        <p14:creationId xmlns:p14="http://schemas.microsoft.com/office/powerpoint/2010/main" val="1963693307"/>
+      </p:ext>
+    </p:extLst>
+  </p:cSld>
+  <p:clrMapOvr>
+    <a:masterClrMapping/>
+  </p:clrMapOvr>
+  <p:transition spd="slow">
+    <p:push dir="u"/>
+  </p:transition>
+</p:sld>
+</file>
+
+<file path=ppt/slides/slide22.xml><?xml version="1.0" encoding="utf-8"?>
+<p:sld xmlns:a="http://schemas.openxmlformats.org/drawingml/2006/main" xmlns:r="http://schemas.openxmlformats.org/officeDocument/2006/relationships" xmlns:p="http://schemas.openxmlformats.org/presentationml/2006/main">
+  <p:cSld>
+    <p:spTree>
+      <p:nvGrpSpPr>
+        <p:cNvPr id="1" name=""/>
+        <p:cNvGrpSpPr/>
+        <p:nvPr/>
+      </p:nvGrpSpPr>
+      <p:grpSpPr>
+        <a:xfrm>
+          <a:off x="0" y="0"/>
+          <a:ext cx="0" cy="0"/>
+          <a:chOff x="0" y="0"/>
+          <a:chExt cx="0" cy="0"/>
+        </a:xfrm>
+      </p:grpSpPr>
+      <p:sp>
+        <p:nvSpPr>
+          <p:cNvPr id="2" name="Заголовок 1">
+            <a:extLst>
+              <a:ext uri="{FF2B5EF4-FFF2-40B4-BE49-F238E27FC236}">
+                <a16:creationId xmlns:a16="http://schemas.microsoft.com/office/drawing/2014/main" id="{8767A4F2-1BA6-494A-8876-CA07390784A1}"/>
+              </a:ext>
+            </a:extLst>
+          </p:cNvPr>
+          <p:cNvSpPr>
+            <a:spLocks noGrp="1"/>
+          </p:cNvSpPr>
+          <p:nvPr>
+            <p:ph type="title"/>
+          </p:nvPr>
+        </p:nvSpPr>
+        <p:spPr/>
+        <p:txBody>
+          <a:bodyPr/>
+          <a:lstStyle/>
+          <a:p>
+            <a:r>
+              <a:rPr lang="ru-RU" dirty="0"/>
+              <a:t>Результаты реализации</a:t>
+            </a:r>
+            <a:endParaRPr lang="ru-RU" sz="2000" dirty="0"/>
+          </a:p>
+        </p:txBody>
+      </p:sp>
+      <p:sp>
+        <p:nvSpPr>
+          <p:cNvPr id="4" name="Номер слайда 3">
+            <a:extLst>
+              <a:ext uri="{FF2B5EF4-FFF2-40B4-BE49-F238E27FC236}">
+                <a16:creationId xmlns:a16="http://schemas.microsoft.com/office/drawing/2014/main" id="{43464F56-7AB1-43FB-8EF2-541E8608D0DA}"/>
+              </a:ext>
+            </a:extLst>
+          </p:cNvPr>
+          <p:cNvSpPr>
+            <a:spLocks noGrp="1"/>
+          </p:cNvSpPr>
+          <p:nvPr>
+            <p:ph type="sldNum" sz="quarter" idx="12"/>
+          </p:nvPr>
+        </p:nvSpPr>
+        <p:spPr/>
+        <p:txBody>
+          <a:bodyPr/>
+          <a:lstStyle/>
+          <a:p>
+            <a:fld id="{53C82F7A-B581-4A0B-8CFB-8CE1E64145D9}" type="slidenum">
+              <a:rPr lang="ru-RU" smtClean="0"/>
+              <a:t>22</a:t>
+            </a:fld>
+            <a:endParaRPr lang="ru-RU" dirty="0"/>
+          </a:p>
+        </p:txBody>
+      </p:sp>
+      <p:pic>
+        <p:nvPicPr>
+          <p:cNvPr id="6" name="Рисунок 5">
+            <a:extLst>
+              <a:ext uri="{FF2B5EF4-FFF2-40B4-BE49-F238E27FC236}">
+                <a16:creationId xmlns:a16="http://schemas.microsoft.com/office/drawing/2014/main" id="{37A09C7A-EE2A-4942-A8D2-99E8301C8212}"/>
+              </a:ext>
+            </a:extLst>
+          </p:cNvPr>
+          <p:cNvPicPr>
+            <a:picLocks noChangeAspect="1"/>
+          </p:cNvPicPr>
+          <p:nvPr/>
+        </p:nvPicPr>
+        <p:blipFill>
+          <a:blip r:embed="rId2">
+            <a:extLst>
+              <a:ext uri="{28A0092B-C50C-407E-A947-70E740481C1C}">
+                <a14:useLocalDpi xmlns:a14="http://schemas.microsoft.com/office/drawing/2010/main" val="0"/>
+              </a:ext>
+            </a:extLst>
+          </a:blip>
+          <a:stretch>
+            <a:fillRect/>
+          </a:stretch>
+        </p:blipFill>
+        <p:spPr>
+          <a:xfrm>
+            <a:off x="2512219" y="1690688"/>
+            <a:ext cx="7167561" cy="4300537"/>
+          </a:xfrm>
+          <a:prstGeom prst="rect">
+            <a:avLst/>
+          </a:prstGeom>
+        </p:spPr>
+      </p:pic>
+    </p:spTree>
+    <p:extLst>
+      <p:ext uri="{BB962C8B-B14F-4D97-AF65-F5344CB8AC3E}">
+        <p14:creationId xmlns:p14="http://schemas.microsoft.com/office/powerpoint/2010/main" val="1307443442"/>
+      </p:ext>
+    </p:extLst>
+  </p:cSld>
+  <p:clrMapOvr>
+    <a:masterClrMapping/>
+  </p:clrMapOvr>
+  <p:transition spd="slow">
+    <p:push dir="u"/>
+  </p:transition>
+</p:sld>
+</file>
+
+<file path=ppt/slides/slide23.xml><?xml version="1.0" encoding="utf-8"?>
+<p:sld xmlns:a="http://schemas.openxmlformats.org/drawingml/2006/main" xmlns:r="http://schemas.openxmlformats.org/officeDocument/2006/relationships" xmlns:p="http://schemas.openxmlformats.org/presentationml/2006/main">
+  <p:cSld>
+    <p:spTree>
+      <p:nvGrpSpPr>
+        <p:cNvPr id="1" name=""/>
+        <p:cNvGrpSpPr/>
+        <p:nvPr/>
+      </p:nvGrpSpPr>
+      <p:grpSpPr>
+        <a:xfrm>
+          <a:off x="0" y="0"/>
+          <a:ext cx="0" cy="0"/>
+          <a:chOff x="0" y="0"/>
+          <a:chExt cx="0" cy="0"/>
+        </a:xfrm>
+      </p:grpSpPr>
+      <p:sp>
+        <p:nvSpPr>
+          <p:cNvPr id="2" name="Заголовок 1">
+            <a:extLst>
+              <a:ext uri="{FF2B5EF4-FFF2-40B4-BE49-F238E27FC236}">
+                <a16:creationId xmlns:a16="http://schemas.microsoft.com/office/drawing/2014/main" id="{8767A4F2-1BA6-494A-8876-CA07390784A1}"/>
+              </a:ext>
+            </a:extLst>
+          </p:cNvPr>
+          <p:cNvSpPr>
+            <a:spLocks noGrp="1"/>
+          </p:cNvSpPr>
+          <p:nvPr>
+            <p:ph type="title"/>
+          </p:nvPr>
+        </p:nvSpPr>
+        <p:spPr/>
+        <p:txBody>
+          <a:bodyPr/>
+          <a:lstStyle/>
+          <a:p>
+            <a:r>
+              <a:rPr lang="ru-RU" dirty="0"/>
+              <a:t>Результаты реализации</a:t>
+            </a:r>
+            <a:endParaRPr lang="ru-RU" sz="2000" dirty="0"/>
+          </a:p>
+        </p:txBody>
+      </p:sp>
+      <p:sp>
+        <p:nvSpPr>
+          <p:cNvPr id="4" name="Номер слайда 3">
+            <a:extLst>
+              <a:ext uri="{FF2B5EF4-FFF2-40B4-BE49-F238E27FC236}">
+                <a16:creationId xmlns:a16="http://schemas.microsoft.com/office/drawing/2014/main" id="{43464F56-7AB1-43FB-8EF2-541E8608D0DA}"/>
+              </a:ext>
+            </a:extLst>
+          </p:cNvPr>
+          <p:cNvSpPr>
+            <a:spLocks noGrp="1"/>
+          </p:cNvSpPr>
+          <p:nvPr>
+            <p:ph type="sldNum" sz="quarter" idx="12"/>
+          </p:nvPr>
+        </p:nvSpPr>
+        <p:spPr/>
+        <p:txBody>
+          <a:bodyPr/>
+          <a:lstStyle/>
+          <a:p>
+            <a:fld id="{53C82F7A-B581-4A0B-8CFB-8CE1E64145D9}" type="slidenum">
+              <a:rPr lang="ru-RU" smtClean="0"/>
+              <a:t>23</a:t>
+            </a:fld>
+            <a:endParaRPr lang="ru-RU" dirty="0"/>
+          </a:p>
+        </p:txBody>
+      </p:sp>
+      <p:pic>
+        <p:nvPicPr>
+          <p:cNvPr id="6" name="Рисунок 5">
+            <a:extLst>
+              <a:ext uri="{FF2B5EF4-FFF2-40B4-BE49-F238E27FC236}">
+                <a16:creationId xmlns:a16="http://schemas.microsoft.com/office/drawing/2014/main" id="{079FF4FD-FC20-467F-AAB9-763F89EC0D0F}"/>
+              </a:ext>
+            </a:extLst>
+          </p:cNvPr>
+          <p:cNvPicPr>
+            <a:picLocks noChangeAspect="1"/>
+          </p:cNvPicPr>
+          <p:nvPr/>
+        </p:nvPicPr>
+        <p:blipFill>
+          <a:blip r:embed="rId2">
+            <a:extLst>
+              <a:ext uri="{28A0092B-C50C-407E-A947-70E740481C1C}">
+                <a14:useLocalDpi xmlns:a14="http://schemas.microsoft.com/office/drawing/2010/main" val="0"/>
+              </a:ext>
+            </a:extLst>
+          </a:blip>
+          <a:stretch>
+            <a:fillRect/>
+          </a:stretch>
+        </p:blipFill>
+        <p:spPr>
+          <a:xfrm>
+            <a:off x="2463800" y="1661637"/>
+            <a:ext cx="7264400" cy="4358640"/>
+          </a:xfrm>
+          <a:prstGeom prst="rect">
+            <a:avLst/>
+          </a:prstGeom>
+        </p:spPr>
+      </p:pic>
+    </p:spTree>
+    <p:extLst>
+      <p:ext uri="{BB962C8B-B14F-4D97-AF65-F5344CB8AC3E}">
+        <p14:creationId xmlns:p14="http://schemas.microsoft.com/office/powerpoint/2010/main" val="675995344"/>
+      </p:ext>
+    </p:extLst>
+  </p:cSld>
+  <p:clrMapOvr>
+    <a:masterClrMapping/>
+  </p:clrMapOvr>
+  <p:transition spd="slow">
+    <p:push dir="u"/>
+  </p:transition>
+</p:sld>
+</file>
+
+<file path=ppt/slides/slide24.xml><?xml version="1.0" encoding="utf-8"?>
+<p:sld xmlns:a="http://schemas.openxmlformats.org/drawingml/2006/main" xmlns:r="http://schemas.openxmlformats.org/officeDocument/2006/relationships" xmlns:p="http://schemas.openxmlformats.org/presentationml/2006/main">
+  <p:cSld>
+    <p:spTree>
+      <p:nvGrpSpPr>
+        <p:cNvPr id="1" name=""/>
+        <p:cNvGrpSpPr/>
+        <p:nvPr/>
+      </p:nvGrpSpPr>
+      <p:grpSpPr>
+        <a:xfrm>
+          <a:off x="0" y="0"/>
+          <a:ext cx="0" cy="0"/>
+          <a:chOff x="0" y="0"/>
+          <a:chExt cx="0" cy="0"/>
+        </a:xfrm>
+      </p:grpSpPr>
+      <p:sp>
+        <p:nvSpPr>
+          <p:cNvPr id="2" name="Заголовок 1">
+            <a:extLst>
+              <a:ext uri="{FF2B5EF4-FFF2-40B4-BE49-F238E27FC236}">
+                <a16:creationId xmlns:a16="http://schemas.microsoft.com/office/drawing/2014/main" id="{EC8C8325-E058-49EC-B1F2-6F926BFC82B9}"/>
+              </a:ext>
+            </a:extLst>
+          </p:cNvPr>
+          <p:cNvSpPr>
+            <a:spLocks noGrp="1"/>
+          </p:cNvSpPr>
+          <p:nvPr>
+            <p:ph type="title"/>
+          </p:nvPr>
+        </p:nvSpPr>
+        <p:spPr>
+          <a:xfrm>
+            <a:off x="838200" y="203993"/>
+            <a:ext cx="10515600" cy="1325563"/>
+          </a:xfrm>
+        </p:spPr>
+        <p:txBody>
+          <a:bodyPr/>
+          <a:lstStyle/>
+          <a:p>
+            <a:r>
+              <a:rPr lang="ru-RU" dirty="0"/>
+              <a:t>Заключение</a:t>
+            </a:r>
+          </a:p>
+        </p:txBody>
+      </p:sp>
+      <p:sp>
+        <p:nvSpPr>
+          <p:cNvPr id="3" name="Объект 2">
+            <a:extLst>
+              <a:ext uri="{FF2B5EF4-FFF2-40B4-BE49-F238E27FC236}">
+                <a16:creationId xmlns:a16="http://schemas.microsoft.com/office/drawing/2014/main" id="{7F0F6151-1AA9-4DB0-B16B-65CD98B20C76}"/>
+              </a:ext>
+            </a:extLst>
+          </p:cNvPr>
+          <p:cNvSpPr>
+            <a:spLocks noGrp="1"/>
+          </p:cNvSpPr>
+          <p:nvPr>
+            <p:ph idx="1"/>
+          </p:nvPr>
+        </p:nvSpPr>
+        <p:spPr>
+          <a:xfrm>
+            <a:off x="838200" y="1333948"/>
+            <a:ext cx="10515600" cy="4351338"/>
+          </a:xfrm>
+        </p:spPr>
+        <p:txBody>
+          <a:bodyPr>
+            <a:noAutofit/>
+          </a:bodyPr>
+          <a:lstStyle/>
+          <a:p>
+            <a:pPr marL="0" indent="0" algn="just">
+              <a:lnSpc>
+                <a:spcPct val="130000"/>
+              </a:lnSpc>
+              <a:spcBef>
+                <a:spcPts val="1200"/>
+              </a:spcBef>
+              <a:buNone/>
+            </a:pPr>
+            <a:r>
+              <a:rPr lang="ru-RU" sz="1800" dirty="0"/>
+              <a:t>В рамках курсового проекта была разработана программная система «Туристическое агентство» на базе </a:t>
+            </a:r>
+            <a:r>
+              <a:rPr lang="ru-RU" sz="1800" dirty="0" err="1"/>
+              <a:t>микросервисной</a:t>
+            </a:r>
+            <a:r>
+              <a:rPr lang="ru-RU" sz="1800" dirty="0"/>
+              <a:t> архитектуры. Проект реализован путем декомпозиции общего функционала на пять независимых сервисов, каждый из которых управляет своим набором данных.</a:t>
+            </a:r>
+          </a:p>
+          <a:p>
+            <a:pPr marL="0" indent="0" algn="just">
+              <a:lnSpc>
+                <a:spcPct val="130000"/>
+              </a:lnSpc>
+              <a:spcBef>
+                <a:spcPts val="1200"/>
+              </a:spcBef>
+              <a:buNone/>
+            </a:pPr>
+            <a:r>
+              <a:rPr lang="ru-RU" sz="1800" dirty="0"/>
+              <a:t>Использовался стек ASP.NET </a:t>
+            </a:r>
+            <a:r>
+              <a:rPr lang="ru-RU" sz="1800" dirty="0" err="1"/>
+              <a:t>Core</a:t>
+            </a:r>
+            <a:r>
+              <a:rPr lang="ru-RU" sz="1800" dirty="0"/>
+              <a:t>, </a:t>
+            </a:r>
+            <a:r>
+              <a:rPr lang="ru-RU" sz="1800" dirty="0" err="1"/>
+              <a:t>Code</a:t>
+            </a:r>
+            <a:r>
+              <a:rPr lang="ru-RU" sz="1800" dirty="0"/>
+              <a:t> </a:t>
+            </a:r>
+            <a:r>
+              <a:rPr lang="ru-RU" sz="1800" dirty="0" err="1"/>
+              <a:t>First</a:t>
+            </a:r>
+            <a:r>
+              <a:rPr lang="ru-RU" sz="1800" dirty="0"/>
+              <a:t> с ORM </a:t>
+            </a:r>
+            <a:r>
+              <a:rPr lang="ru-RU" sz="1800" dirty="0" err="1"/>
+              <a:t>Entity</a:t>
+            </a:r>
+            <a:r>
+              <a:rPr lang="ru-RU" sz="1800" dirty="0"/>
+              <a:t> </a:t>
+            </a:r>
+            <a:r>
+              <a:rPr lang="ru-RU" sz="1800" dirty="0" err="1"/>
+              <a:t>Framework</a:t>
+            </a:r>
+            <a:r>
+              <a:rPr lang="ru-RU" sz="1800" dirty="0"/>
+              <a:t> </a:t>
+            </a:r>
+            <a:r>
+              <a:rPr lang="ru-RU" sz="1800" dirty="0" err="1"/>
+              <a:t>Core</a:t>
+            </a:r>
+            <a:r>
+              <a:rPr lang="ru-RU" sz="1800" dirty="0"/>
+              <a:t> на базе СУБД </a:t>
+            </a:r>
+            <a:r>
+              <a:rPr lang="ru-RU" sz="1800" dirty="0" err="1"/>
+              <a:t>MySQL</a:t>
+            </a:r>
+            <a:r>
+              <a:rPr lang="ru-RU" sz="1800" dirty="0"/>
+              <a:t>. Критически важные аспекты безопасности, включая аутентификацию и авторизацию, были реализованы на основе протокола JWT.</a:t>
+            </a:r>
+          </a:p>
+          <a:p>
+            <a:pPr marL="0" indent="0" algn="just">
+              <a:lnSpc>
+                <a:spcPct val="130000"/>
+              </a:lnSpc>
+              <a:spcBef>
+                <a:spcPts val="1200"/>
+              </a:spcBef>
+              <a:buNone/>
+            </a:pPr>
+            <a:r>
+              <a:rPr lang="ru-RU" sz="1800" dirty="0"/>
+              <a:t>Результатом работы стала полностью функционирующая система </a:t>
+            </a:r>
+            <a:r>
+              <a:rPr lang="ru-RU" sz="1800" dirty="0" err="1"/>
+              <a:t>микросервисов</a:t>
+            </a:r>
+            <a:r>
+              <a:rPr lang="ru-RU" sz="1800" dirty="0"/>
+              <a:t>, готовая к использованию в туристическом агентстве. Надёжность и корректность взаимодействия между всеми компонентами были подтверждены функциональным тестированием API с использованием инструмента </a:t>
+            </a:r>
+            <a:r>
+              <a:rPr lang="ru-RU" sz="1800" dirty="0" err="1"/>
+              <a:t>Postman</a:t>
+            </a:r>
+            <a:r>
+              <a:rPr lang="ru-RU" sz="1800" dirty="0"/>
+              <a:t>.</a:t>
+            </a:r>
+          </a:p>
+          <a:p>
+            <a:pPr marL="0" indent="0" algn="just">
+              <a:lnSpc>
+                <a:spcPct val="130000"/>
+              </a:lnSpc>
+              <a:spcBef>
+                <a:spcPts val="1200"/>
+              </a:spcBef>
+              <a:buNone/>
+            </a:pPr>
+            <a:endParaRPr lang="ru-RU" sz="1800" dirty="0"/>
+          </a:p>
+        </p:txBody>
+      </p:sp>
+      <p:sp>
+        <p:nvSpPr>
+          <p:cNvPr id="4" name="Номер слайда 3">
+            <a:extLst>
+              <a:ext uri="{FF2B5EF4-FFF2-40B4-BE49-F238E27FC236}">
+                <a16:creationId xmlns:a16="http://schemas.microsoft.com/office/drawing/2014/main" id="{377B06A1-8B12-481A-AFF1-7E7430DCBED7}"/>
+              </a:ext>
+            </a:extLst>
+          </p:cNvPr>
+          <p:cNvSpPr>
+            <a:spLocks noGrp="1"/>
+          </p:cNvSpPr>
+          <p:nvPr>
+            <p:ph type="sldNum" sz="quarter" idx="12"/>
+          </p:nvPr>
+        </p:nvSpPr>
+        <p:spPr>
+          <a:xfrm>
+            <a:off x="11380304" y="5991225"/>
+            <a:ext cx="514350" cy="365125"/>
+          </a:xfrm>
+        </p:spPr>
+        <p:txBody>
+          <a:bodyPr/>
+          <a:lstStyle/>
+          <a:p>
+            <a:fld id="{53C82F7A-B581-4A0B-8CFB-8CE1E64145D9}" type="slidenum">
+              <a:rPr lang="ru-RU" smtClean="0"/>
+              <a:t>24</a:t>
+            </a:fld>
+            <a:endParaRPr lang="ru-RU" dirty="0"/>
+          </a:p>
+        </p:txBody>
+      </p:sp>
+    </p:spTree>
+    <p:extLst>
+      <p:ext uri="{BB962C8B-B14F-4D97-AF65-F5344CB8AC3E}">
+        <p14:creationId xmlns:p14="http://schemas.microsoft.com/office/powerpoint/2010/main" val="1764304748"/>
       </p:ext>
     </p:extLst>
   </p:cSld>
@@ -6148,7 +8557,7 @@
           <p:cNvPr id="2" name="Заголовок 1">
             <a:extLst>
               <a:ext uri="{FF2B5EF4-FFF2-40B4-BE49-F238E27FC236}">
-                <a16:creationId xmlns:a16="http://schemas.microsoft.com/office/drawing/2014/main" id="{AC21A9D1-4F99-46ED-9B8C-884641DF6DCD}"/>
+                <a16:creationId xmlns:a16="http://schemas.microsoft.com/office/drawing/2014/main" id="{85EF92F7-1038-4DE6-88F8-8CA4E6FBFA27}"/>
               </a:ext>
             </a:extLst>
           </p:cNvPr>
@@ -6161,8 +8570,8 @@
         </p:nvSpPr>
         <p:spPr>
           <a:xfrm>
-            <a:off x="838200" y="488216"/>
-            <a:ext cx="10515600" cy="1325563"/>
+            <a:off x="952500" y="968375"/>
+            <a:ext cx="10287000" cy="863600"/>
           </a:xfrm>
         </p:spPr>
         <p:txBody>
@@ -6170,8 +8579,10 @@
           <a:lstStyle/>
           <a:p>
             <a:r>
-              <a:rPr lang="ru-RU" dirty="0"/>
-              <a:t>Пользователи подсистемы</a:t>
+              <a:rPr lang="ru-RU" dirty="0">
+                <a:latin typeface="Montserrat Alternates" panose="00000500000000000000" pitchFamily="2" charset="-52"/>
+              </a:rPr>
+              <a:t>Описание предметной области</a:t>
             </a:r>
           </a:p>
         </p:txBody>
@@ -6181,7 +8592,7 @@
           <p:cNvPr id="3" name="Объект 2">
             <a:extLst>
               <a:ext uri="{FF2B5EF4-FFF2-40B4-BE49-F238E27FC236}">
-                <a16:creationId xmlns:a16="http://schemas.microsoft.com/office/drawing/2014/main" id="{0366548A-8FA0-484D-A788-2DABDDDA8D04}"/>
+                <a16:creationId xmlns:a16="http://schemas.microsoft.com/office/drawing/2014/main" id="{53E56AF5-BCD5-40D5-9DB6-D55D9BD329B7}"/>
               </a:ext>
             </a:extLst>
           </p:cNvPr>
@@ -6194,8 +8605,8 @@
         </p:nvSpPr>
         <p:spPr>
           <a:xfrm>
-            <a:off x="1643126" y="1885649"/>
-            <a:ext cx="8905747" cy="3889074"/>
+            <a:off x="838200" y="2142435"/>
+            <a:ext cx="10515600" cy="3848790"/>
           </a:xfrm>
         </p:spPr>
         <p:txBody>
@@ -6204,48 +8615,42 @@
           </a:bodyPr>
           <a:lstStyle/>
           <a:p>
-            <a:pPr algn="just">
+            <a:pPr marL="0" indent="0" algn="ctr">
               <a:lnSpc>
-                <a:spcPct val="100000"/>
+                <a:spcPct val="150000"/>
               </a:lnSpc>
+              <a:buNone/>
             </a:pPr>
             <a:r>
               <a:rPr lang="ru-RU" sz="2000" dirty="0"/>
-              <a:t>Менеджер – сотрудник агентства, который консультирует клиентов, оформляет бронирования.</a:t>
-            </a:r>
-          </a:p>
-          <a:p>
-            <a:pPr algn="just">
+              <a:t>Туристическое агентство занимается подбором, формированием и продажей туристических услуг, выступая посредником между клиентами и партнёрами.</a:t>
+            </a:r>
+            <a:endParaRPr lang="ru-RU" sz="2000" dirty="0">
+              <a:latin typeface="Montserrat Alternates" panose="00000500000000000000" pitchFamily="2" charset="-52"/>
+            </a:endParaRPr>
+          </a:p>
+          <a:p>
+            <a:pPr marL="0" indent="0" algn="ctr">
               <a:lnSpc>
-                <a:spcPct val="100000"/>
+                <a:spcPct val="150000"/>
               </a:lnSpc>
+              <a:buNone/>
             </a:pPr>
             <a:r>
               <a:rPr lang="ru-RU" sz="2000" dirty="0"/>
-              <a:t>Контент-менеджер – сотрудник агентства, который формирует, обновляет и управляет данными о турах.</a:t>
-            </a:r>
-          </a:p>
-          <a:p>
-            <a:pPr algn="just">
-              <a:lnSpc>
-                <a:spcPct val="100000"/>
-              </a:lnSpc>
-            </a:pPr>
+              <a:t>Агентство обеспечивает удобный доступ к информации о турах и поддерживает клиентов на всех этапах взаимодействия.</a:t>
+            </a:r>
+            <a:r>
+              <a:rPr lang="en-US" sz="2000" dirty="0"/>
+              <a:t> </a:t>
+            </a:r>
             <a:r>
               <a:rPr lang="ru-RU" sz="2000" dirty="0"/>
-              <a:t>Клиент – человек, приобретающий туры, может просматривать доступные предложения, бронировать поездки, совершать платежи.</a:t>
-            </a:r>
-          </a:p>
-          <a:p>
-            <a:pPr algn="just">
-              <a:lnSpc>
-                <a:spcPct val="100000"/>
-              </a:lnSpc>
-            </a:pPr>
-            <a:r>
-              <a:rPr lang="ru-RU" sz="2000" dirty="0"/>
-              <a:t>Партнёр – внешний пользователь (отель, транспортная компания, туроператор), который подтверждает или отклоняет бронирования в рамках предоставляемых услуг.</a:t>
-            </a:r>
+              <a:t>Ключевые процессы туристического агентства — это поиск и подбор туров, оформление и подтверждение бронирований, проведение оплат и управление актуальными предложениями.</a:t>
+            </a:r>
+            <a:endParaRPr lang="ru-RU" sz="2000" dirty="0">
+              <a:latin typeface="Montserrat Alternates" panose="00000500000000000000" pitchFamily="2" charset="-52"/>
+            </a:endParaRPr>
           </a:p>
         </p:txBody>
       </p:sp>
@@ -6254,7 +8659,7 @@
           <p:cNvPr id="4" name="Номер слайда 3">
             <a:extLst>
               <a:ext uri="{FF2B5EF4-FFF2-40B4-BE49-F238E27FC236}">
-                <a16:creationId xmlns:a16="http://schemas.microsoft.com/office/drawing/2014/main" id="{A0C837F3-9B21-4E3D-AC44-1649256E2D87}"/>
+                <a16:creationId xmlns:a16="http://schemas.microsoft.com/office/drawing/2014/main" id="{358C5850-95CD-4B43-B549-014D4C298E06}"/>
               </a:ext>
             </a:extLst>
           </p:cNvPr>
@@ -6274,14 +8679,14 @@
               <a:rPr lang="ru-RU" smtClean="0"/>
               <a:t>3</a:t>
             </a:fld>
-            <a:endParaRPr lang="ru-RU"/>
+            <a:endParaRPr lang="ru-RU" dirty="0"/>
           </a:p>
         </p:txBody>
       </p:sp>
     </p:spTree>
     <p:extLst>
       <p:ext uri="{BB962C8B-B14F-4D97-AF65-F5344CB8AC3E}">
-        <p14:creationId xmlns:p14="http://schemas.microsoft.com/office/powerpoint/2010/main" val="3139531852"/>
+        <p14:creationId xmlns:p14="http://schemas.microsoft.com/office/powerpoint/2010/main" val="3246186357"/>
       </p:ext>
     </p:extLst>
   </p:cSld>
@@ -6316,7 +8721,7 @@
           <p:cNvPr id="2" name="Заголовок 1">
             <a:extLst>
               <a:ext uri="{FF2B5EF4-FFF2-40B4-BE49-F238E27FC236}">
-                <a16:creationId xmlns:a16="http://schemas.microsoft.com/office/drawing/2014/main" id="{F2E7F26D-A090-40D7-8F7D-0BD3344125D0}"/>
+                <a16:creationId xmlns:a16="http://schemas.microsoft.com/office/drawing/2014/main" id="{AC21A9D1-4F99-46ED-9B8C-884641DF6DCD}"/>
               </a:ext>
             </a:extLst>
           </p:cNvPr>
@@ -6327,23 +8732,93 @@
             <p:ph type="title"/>
           </p:nvPr>
         </p:nvSpPr>
-        <p:spPr/>
+        <p:spPr>
+          <a:xfrm>
+            <a:off x="838200" y="488216"/>
+            <a:ext cx="10515600" cy="1325563"/>
+          </a:xfrm>
+        </p:spPr>
         <p:txBody>
           <a:bodyPr/>
           <a:lstStyle/>
           <a:p>
             <a:r>
               <a:rPr lang="ru-RU" dirty="0"/>
-              <a:t>Проектирование</a:t>
-            </a:r>
-            <a:br>
-              <a:rPr lang="ru-RU" dirty="0"/>
-            </a:br>
+              <a:t>Пользователи подсистемы</a:t>
+            </a:r>
+          </a:p>
+        </p:txBody>
+      </p:sp>
+      <p:sp>
+        <p:nvSpPr>
+          <p:cNvPr id="3" name="Объект 2">
+            <a:extLst>
+              <a:ext uri="{FF2B5EF4-FFF2-40B4-BE49-F238E27FC236}">
+                <a16:creationId xmlns:a16="http://schemas.microsoft.com/office/drawing/2014/main" id="{0366548A-8FA0-484D-A788-2DABDDDA8D04}"/>
+              </a:ext>
+            </a:extLst>
+          </p:cNvPr>
+          <p:cNvSpPr>
+            <a:spLocks noGrp="1"/>
+          </p:cNvSpPr>
+          <p:nvPr>
+            <p:ph idx="1"/>
+          </p:nvPr>
+        </p:nvSpPr>
+        <p:spPr>
+          <a:xfrm>
+            <a:off x="1643126" y="1885649"/>
+            <a:ext cx="8905747" cy="3889074"/>
+          </a:xfrm>
+        </p:spPr>
+        <p:txBody>
+          <a:bodyPr>
+            <a:noAutofit/>
+          </a:bodyPr>
+          <a:lstStyle/>
+          <a:p>
+            <a:pPr algn="just">
+              <a:lnSpc>
+                <a:spcPct val="100000"/>
+              </a:lnSpc>
+            </a:pPr>
             <a:r>
               <a:rPr lang="ru-RU" sz="2000" dirty="0"/>
-              <a:t>Диаграмма состояний</a:t>
-            </a:r>
-            <a:endParaRPr lang="ru-RU" dirty="0"/>
+              <a:t>Менеджер – сотрудник агентства, который консультирует клиентов, оформляет бронирования.</a:t>
+            </a:r>
+          </a:p>
+          <a:p>
+            <a:pPr algn="just">
+              <a:lnSpc>
+                <a:spcPct val="100000"/>
+              </a:lnSpc>
+            </a:pPr>
+            <a:r>
+              <a:rPr lang="ru-RU" sz="2000" dirty="0"/>
+              <a:t>Контент-менеджер – сотрудник агентства, который формирует, обновляет и управляет данными о турах.</a:t>
+            </a:r>
+          </a:p>
+          <a:p>
+            <a:pPr algn="just">
+              <a:lnSpc>
+                <a:spcPct val="100000"/>
+              </a:lnSpc>
+            </a:pPr>
+            <a:r>
+              <a:rPr lang="ru-RU" sz="2000" dirty="0"/>
+              <a:t>Клиент – человек, приобретающий туры, может просматривать доступные предложения, бронировать поездки, совершать платежи.</a:t>
+            </a:r>
+          </a:p>
+          <a:p>
+            <a:pPr algn="just">
+              <a:lnSpc>
+                <a:spcPct val="100000"/>
+              </a:lnSpc>
+            </a:pPr>
+            <a:r>
+              <a:rPr lang="ru-RU" sz="2000" dirty="0"/>
+              <a:t>Партнёр – внешний пользователь (отель, транспортная компания, туроператор), который подтверждает или отклоняет бронирования в рамках предоставляемых услуг.</a:t>
+            </a:r>
           </a:p>
         </p:txBody>
       </p:sp>
@@ -6352,7 +8827,7 @@
           <p:cNvPr id="4" name="Номер слайда 3">
             <a:extLst>
               <a:ext uri="{FF2B5EF4-FFF2-40B4-BE49-F238E27FC236}">
-                <a16:creationId xmlns:a16="http://schemas.microsoft.com/office/drawing/2014/main" id="{1137DD95-CF8D-4595-B91A-F936BDCC4517}"/>
+                <a16:creationId xmlns:a16="http://schemas.microsoft.com/office/drawing/2014/main" id="{A0C837F3-9B21-4E3D-AC44-1649256E2D87}"/>
               </a:ext>
             </a:extLst>
           </p:cNvPr>
@@ -6372,44 +8847,14 @@
               <a:rPr lang="ru-RU" smtClean="0"/>
               <a:t>4</a:t>
             </a:fld>
-            <a:endParaRPr lang="ru-RU" dirty="0"/>
-          </a:p>
-        </p:txBody>
-      </p:sp>
-      <p:pic>
-        <p:nvPicPr>
-          <p:cNvPr id="3" name="Рисунок 2">
-            <a:extLst>
-              <a:ext uri="{FF2B5EF4-FFF2-40B4-BE49-F238E27FC236}">
-                <a16:creationId xmlns:a16="http://schemas.microsoft.com/office/drawing/2014/main" id="{7419D71B-1BCE-43BB-AF60-455C2573856A}"/>
-              </a:ext>
-            </a:extLst>
-          </p:cNvPr>
-          <p:cNvPicPr>
-            <a:picLocks noChangeAspect="1"/>
-          </p:cNvPicPr>
-          <p:nvPr/>
-        </p:nvPicPr>
-        <p:blipFill>
-          <a:blip r:embed="rId2"/>
-          <a:stretch>
-            <a:fillRect/>
-          </a:stretch>
-        </p:blipFill>
-        <p:spPr>
-          <a:xfrm>
-            <a:off x="4480902" y="1587043"/>
-            <a:ext cx="3230196" cy="4586744"/>
-          </a:xfrm>
-          <a:prstGeom prst="rect">
-            <a:avLst/>
-          </a:prstGeom>
-        </p:spPr>
-      </p:pic>
+            <a:endParaRPr lang="ru-RU"/>
+          </a:p>
+        </p:txBody>
+      </p:sp>
     </p:spTree>
     <p:extLst>
       <p:ext uri="{BB962C8B-B14F-4D97-AF65-F5344CB8AC3E}">
-        <p14:creationId xmlns:p14="http://schemas.microsoft.com/office/powerpoint/2010/main" val="1490063766"/>
+        <p14:creationId xmlns:p14="http://schemas.microsoft.com/office/powerpoint/2010/main" val="3139531852"/>
       </p:ext>
     </p:extLst>
   </p:cSld>
@@ -6469,7 +8914,7 @@
             </a:br>
             <a:r>
               <a:rPr lang="ru-RU" sz="2000" dirty="0"/>
-              <a:t>Диаграмма прецедентов</a:t>
+              <a:t>Диаграмма состояний</a:t>
             </a:r>
             <a:endParaRPr lang="ru-RU" dirty="0"/>
           </a:p>
@@ -6509,7 +8954,7 @@
           <p:cNvPr id="5" name="Рисунок 4">
             <a:extLst>
               <a:ext uri="{FF2B5EF4-FFF2-40B4-BE49-F238E27FC236}">
-                <a16:creationId xmlns:a16="http://schemas.microsoft.com/office/drawing/2014/main" id="{7AF3B4EF-878A-4866-BBEA-85ED384D394C}"/>
+                <a16:creationId xmlns:a16="http://schemas.microsoft.com/office/drawing/2014/main" id="{7A1BC668-8ED3-44B6-92B1-5F23D814AB58}"/>
               </a:ext>
             </a:extLst>
           </p:cNvPr>
@@ -6526,8 +8971,8 @@
         </p:blipFill>
         <p:spPr>
           <a:xfrm>
-            <a:off x="3275457" y="1690688"/>
-            <a:ext cx="5641085" cy="4646514"/>
+            <a:off x="3846445" y="1690688"/>
+            <a:ext cx="4499110" cy="4376789"/>
           </a:xfrm>
           <a:prstGeom prst="rect">
             <a:avLst/>
@@ -6537,7 +8982,7 @@
     </p:spTree>
     <p:extLst>
       <p:ext uri="{BB962C8B-B14F-4D97-AF65-F5344CB8AC3E}">
-        <p14:creationId xmlns:p14="http://schemas.microsoft.com/office/powerpoint/2010/main" val="1103251926"/>
+        <p14:creationId xmlns:p14="http://schemas.microsoft.com/office/powerpoint/2010/main" val="1490063766"/>
       </p:ext>
     </p:extLst>
   </p:cSld>
@@ -6572,7 +9017,7 @@
           <p:cNvPr id="2" name="Заголовок 1">
             <a:extLst>
               <a:ext uri="{FF2B5EF4-FFF2-40B4-BE49-F238E27FC236}">
-                <a16:creationId xmlns:a16="http://schemas.microsoft.com/office/drawing/2014/main" id="{01362EF1-2A88-4C67-915D-746CEE370AEF}"/>
+                <a16:creationId xmlns:a16="http://schemas.microsoft.com/office/drawing/2014/main" id="{F2E7F26D-A090-40D7-8F7D-0BD3344125D0}"/>
               </a:ext>
             </a:extLst>
           </p:cNvPr>
@@ -6583,158 +9028,23 @@
             <p:ph type="title"/>
           </p:nvPr>
         </p:nvSpPr>
-        <p:spPr>
-          <a:xfrm>
-            <a:off x="683260" y="320675"/>
-            <a:ext cx="10825480" cy="1325563"/>
-          </a:xfrm>
-        </p:spPr>
-        <p:txBody>
-          <a:bodyPr>
-            <a:normAutofit/>
-          </a:bodyPr>
-          <a:lstStyle/>
-          <a:p>
-            <a:r>
-              <a:rPr lang="ru-RU" sz="3600" dirty="0"/>
-              <a:t>Описание прецедента</a:t>
+        <p:spPr/>
+        <p:txBody>
+          <a:bodyPr/>
+          <a:lstStyle/>
+          <a:p>
+            <a:r>
+              <a:rPr lang="ru-RU" dirty="0"/>
+              <a:t>Проектирование</a:t>
             </a:r>
             <a:br>
-              <a:rPr lang="ru-RU" sz="3600" dirty="0"/>
+              <a:rPr lang="ru-RU" dirty="0"/>
             </a:br>
             <a:r>
-              <a:rPr lang="ru-RU" sz="2400" dirty="0"/>
-              <a:t>«Отменить бронь»</a:t>
-            </a:r>
-            <a:endParaRPr lang="ru-RU" sz="3600" dirty="0"/>
-          </a:p>
-        </p:txBody>
-      </p:sp>
-      <p:sp>
-        <p:nvSpPr>
-          <p:cNvPr id="3" name="Объект 2">
-            <a:extLst>
-              <a:ext uri="{FF2B5EF4-FFF2-40B4-BE49-F238E27FC236}">
-                <a16:creationId xmlns:a16="http://schemas.microsoft.com/office/drawing/2014/main" id="{C1C34876-14B1-456E-8F5D-03C0F2BBADC3}"/>
-              </a:ext>
-            </a:extLst>
-          </p:cNvPr>
-          <p:cNvSpPr>
-            <a:spLocks noGrp="1"/>
-          </p:cNvSpPr>
-          <p:nvPr>
-            <p:ph idx="1"/>
-          </p:nvPr>
-        </p:nvSpPr>
-        <p:spPr>
-          <a:xfrm>
-            <a:off x="838200" y="1639887"/>
-            <a:ext cx="10515600" cy="4351338"/>
-          </a:xfrm>
-        </p:spPr>
-        <p:txBody>
-          <a:bodyPr>
-            <a:noAutofit/>
-          </a:bodyPr>
-          <a:lstStyle/>
-          <a:p>
-            <a:pPr marL="0" indent="0">
-              <a:buNone/>
-            </a:pPr>
-            <a:r>
-              <a:rPr lang="ru-RU" sz="2000" b="1" dirty="0"/>
-              <a:t>Предусловие:</a:t>
-            </a:r>
-            <a:r>
               <a:rPr lang="ru-RU" sz="2000" dirty="0"/>
-              <a:t> клиент авторизован в системе и ранее оформлял бронь тура, сроки и условия отмены определены правилами тура.</a:t>
-            </a:r>
-          </a:p>
-          <a:p>
-            <a:pPr marL="0" indent="0">
-              <a:buNone/>
-            </a:pPr>
-            <a:r>
-              <a:rPr lang="ru-RU" sz="2000" b="1" dirty="0"/>
-              <a:t>Действующее лицо:</a:t>
-            </a:r>
-            <a:r>
-              <a:rPr lang="ru-RU" sz="2000" dirty="0"/>
-              <a:t> клиент, менеджер от имени клиента.</a:t>
-            </a:r>
-          </a:p>
-          <a:p>
-            <a:pPr marL="0" indent="0">
-              <a:buNone/>
-            </a:pPr>
-            <a:r>
-              <a:rPr lang="ru-RU" sz="2000" b="1" dirty="0"/>
-              <a:t>Основной поток:</a:t>
-            </a:r>
-            <a:r>
-              <a:rPr lang="ru-RU" sz="2000" dirty="0"/>
-              <a:t> Отменить бронь.</a:t>
-            </a:r>
-          </a:p>
-          <a:p>
-            <a:pPr marL="342900" indent="-342900">
-              <a:buFont typeface="+mj-lt"/>
-              <a:buAutoNum type="arabicPeriod"/>
-            </a:pPr>
-            <a:r>
-              <a:rPr lang="ru-RU" sz="2000" dirty="0"/>
-              <a:t>Клиент открывает личный кабинет и в разделе «Мои бронирования» находит нужную бронь.</a:t>
-            </a:r>
-          </a:p>
-          <a:p>
-            <a:pPr marL="342900" indent="-342900">
-              <a:buFont typeface="+mj-lt"/>
-              <a:buAutoNum type="arabicPeriod"/>
-            </a:pPr>
-            <a:r>
-              <a:rPr lang="ru-RU" sz="2000" dirty="0"/>
-              <a:t>Нажимает кнопку «Отменить бронирование».</a:t>
-            </a:r>
-          </a:p>
-          <a:p>
-            <a:pPr marL="342900" indent="-342900">
-              <a:buFont typeface="+mj-lt"/>
-              <a:buAutoNum type="arabicPeriod"/>
-            </a:pPr>
-            <a:r>
-              <a:rPr lang="ru-RU" sz="2000" dirty="0"/>
-              <a:t>Система проверяет условия отмены (сроки, штрафы, возврат).</a:t>
-            </a:r>
-          </a:p>
-          <a:p>
-            <a:pPr marL="342900" indent="-342900">
-              <a:buFont typeface="+mj-lt"/>
-              <a:buAutoNum type="arabicPeriod"/>
-            </a:pPr>
-            <a:r>
-              <a:rPr lang="ru-RU" sz="2000" dirty="0"/>
-              <a:t>Если отмена допустима, клиент подтверждает отмену. </a:t>
-            </a:r>
-          </a:p>
-          <a:p>
-            <a:pPr marL="342900" indent="-342900">
-              <a:buFont typeface="+mj-lt"/>
-              <a:buAutoNum type="arabicPeriod"/>
-            </a:pPr>
-            <a:r>
-              <a:rPr lang="ru-RU" sz="2000" dirty="0"/>
-              <a:t>Система меняет статус брони на «Отменена», фиксирует это в базе данных и при необходимости инициирует процесс возврата средств.	</a:t>
-            </a:r>
-          </a:p>
-          <a:p>
-            <a:pPr marL="342900" indent="-342900">
-              <a:buFont typeface="+mj-lt"/>
-              <a:buAutoNum type="arabicPeriod"/>
-            </a:pPr>
-            <a:r>
-              <a:rPr lang="ru-RU" sz="2000" dirty="0"/>
-              <a:t>Клиент получает уведомление об успешной отмене.</a:t>
-            </a:r>
+              <a:t>Диаграмма прецедентов</a:t>
+            </a:r>
+            <a:endParaRPr lang="ru-RU" dirty="0"/>
           </a:p>
         </p:txBody>
       </p:sp>
@@ -6743,7 +9053,7 @@
           <p:cNvPr id="4" name="Номер слайда 3">
             <a:extLst>
               <a:ext uri="{FF2B5EF4-FFF2-40B4-BE49-F238E27FC236}">
-                <a16:creationId xmlns:a16="http://schemas.microsoft.com/office/drawing/2014/main" id="{A871B873-5DBF-4B30-BC89-4262DC826DB2}"/>
+                <a16:creationId xmlns:a16="http://schemas.microsoft.com/office/drawing/2014/main" id="{1137DD95-CF8D-4595-B91A-F936BDCC4517}"/>
               </a:ext>
             </a:extLst>
           </p:cNvPr>
@@ -6767,10 +9077,40 @@
           </a:p>
         </p:txBody>
       </p:sp>
+      <p:pic>
+        <p:nvPicPr>
+          <p:cNvPr id="3" name="Рисунок 2">
+            <a:extLst>
+              <a:ext uri="{FF2B5EF4-FFF2-40B4-BE49-F238E27FC236}">
+                <a16:creationId xmlns:a16="http://schemas.microsoft.com/office/drawing/2014/main" id="{252ABA75-19C4-488A-8A0E-9720179ACF72}"/>
+              </a:ext>
+            </a:extLst>
+          </p:cNvPr>
+          <p:cNvPicPr>
+            <a:picLocks noChangeAspect="1"/>
+          </p:cNvPicPr>
+          <p:nvPr/>
+        </p:nvPicPr>
+        <p:blipFill>
+          <a:blip r:embed="rId2"/>
+          <a:stretch>
+            <a:fillRect/>
+          </a:stretch>
+        </p:blipFill>
+        <p:spPr>
+          <a:xfrm>
+            <a:off x="2188633" y="1760442"/>
+            <a:ext cx="7814734" cy="4161029"/>
+          </a:xfrm>
+          <a:prstGeom prst="rect">
+            <a:avLst/>
+          </a:prstGeom>
+        </p:spPr>
+      </p:pic>
     </p:spTree>
     <p:extLst>
       <p:ext uri="{BB962C8B-B14F-4D97-AF65-F5344CB8AC3E}">
-        <p14:creationId xmlns:p14="http://schemas.microsoft.com/office/powerpoint/2010/main" val="214377119"/>
+        <p14:creationId xmlns:p14="http://schemas.microsoft.com/office/powerpoint/2010/main" val="1103251926"/>
       </p:ext>
     </p:extLst>
   </p:cSld>
@@ -6861,7 +9201,7 @@
         </p:nvSpPr>
         <p:spPr>
           <a:xfrm>
-            <a:off x="838200" y="1705372"/>
+            <a:off x="838200" y="1639887"/>
             <a:ext cx="10515600" cy="4351338"/>
           </a:xfrm>
         </p:spPr>
@@ -6876,11 +9216,11 @@
             </a:pPr>
             <a:r>
               <a:rPr lang="ru-RU" sz="2000" b="1" dirty="0"/>
-              <a:t>Альтернативный поток 1: </a:t>
+              <a:t>Предусловие:</a:t>
             </a:r>
             <a:r>
               <a:rPr lang="ru-RU" sz="2000" dirty="0"/>
-              <a:t>отмена невозможна.</a:t>
+              <a:t> клиент авторизован в системе и ранее оформлял бронь тура, сроки и условия отмены определены правилами тура.</a:t>
             </a:r>
           </a:p>
           <a:p>
@@ -6888,8 +9228,12 @@
               <a:buNone/>
             </a:pPr>
             <a:r>
+              <a:rPr lang="ru-RU" sz="2000" b="1" dirty="0"/>
+              <a:t>Действующее лицо:</a:t>
+            </a:r>
+            <a:r>
               <a:rPr lang="ru-RU" sz="2000" dirty="0"/>
-              <a:t>Срок для бесплатной отмены истёк или условия брони не позволяют её отменить. Система уведомляет клиента и выводит информацию о штрафах.</a:t>
+              <a:t> клиент, менеджер от имени клиента.</a:t>
             </a:r>
           </a:p>
           <a:p>
@@ -6898,33 +9242,71 @@
             </a:pPr>
             <a:r>
               <a:rPr lang="ru-RU" sz="2000" b="1" dirty="0"/>
-              <a:t>Альтернативный поток 2:</a:t>
+              <a:t>Основной поток:</a:t>
             </a:r>
             <a:r>
               <a:rPr lang="ru-RU" sz="2000" dirty="0"/>
-              <a:t> сбой системы</a:t>
-            </a:r>
-          </a:p>
-          <a:p>
-            <a:pPr marL="0" indent="0">
-              <a:buNone/>
+              <a:t> Отменить бронь.</a:t>
+            </a:r>
+          </a:p>
+          <a:p>
+            <a:pPr marL="342900" indent="-342900">
+              <a:buFont typeface="+mj-lt"/>
+              <a:buAutoNum type="arabicPeriod"/>
             </a:pPr>
             <a:r>
               <a:rPr lang="ru-RU" sz="2000" dirty="0"/>
-              <a:t>Техническая ошибка (например, недоступность базы данных) не позволяет отменить бронь. В таком случае система уведомляет о невозможности выполнить отмену в данный момент и предлагает повторить позже.</a:t>
-            </a:r>
-          </a:p>
-          <a:p>
-            <a:pPr marL="0" indent="0">
-              <a:buNone/>
+              <a:t>Клиент открывает личный кабинет и в разделе «Мои бронирования» находит нужную бронь.</a:t>
+            </a:r>
+          </a:p>
+          <a:p>
+            <a:pPr marL="342900" indent="-342900">
+              <a:buFont typeface="+mj-lt"/>
+              <a:buAutoNum type="arabicPeriod"/>
             </a:pPr>
             <a:r>
-              <a:rPr lang="ru-RU" sz="2000" b="1" dirty="0"/>
-              <a:t>Постусловие:</a:t>
-            </a:r>
-            <a:r>
               <a:rPr lang="ru-RU" sz="2000" dirty="0"/>
-              <a:t> Статус брони изменён на «Отменена», либо клиент получил уведомление о невозможности отмены по условиям тура. Информация о брони обновлена в базе данных и доступна для дальнейшей обработки менеджером.</a:t>
+              <a:t>Нажимает кнопку «Отменить бронирование».</a:t>
+            </a:r>
+          </a:p>
+          <a:p>
+            <a:pPr marL="342900" indent="-342900">
+              <a:buFont typeface="+mj-lt"/>
+              <a:buAutoNum type="arabicPeriod"/>
+            </a:pPr>
+            <a:r>
+              <a:rPr lang="ru-RU" sz="2000" dirty="0"/>
+              <a:t>Система проверяет условия отмены (сроки, штрафы, возврат).</a:t>
+            </a:r>
+          </a:p>
+          <a:p>
+            <a:pPr marL="342900" indent="-342900">
+              <a:buFont typeface="+mj-lt"/>
+              <a:buAutoNum type="arabicPeriod"/>
+            </a:pPr>
+            <a:r>
+              <a:rPr lang="ru-RU" sz="2000" dirty="0"/>
+              <a:t>Если отмена допустима, клиент подтверждает отмену. </a:t>
+            </a:r>
+          </a:p>
+          <a:p>
+            <a:pPr marL="342900" indent="-342900">
+              <a:buFont typeface="+mj-lt"/>
+              <a:buAutoNum type="arabicPeriod"/>
+            </a:pPr>
+            <a:r>
+              <a:rPr lang="ru-RU" sz="2000" dirty="0"/>
+              <a:t>Система меняет статус брони на «Отменена», фиксирует это в базе данных и при необходимости инициирует процесс возврата средств.	</a:t>
+            </a:r>
+          </a:p>
+          <a:p>
+            <a:pPr marL="342900" indent="-342900">
+              <a:buFont typeface="+mj-lt"/>
+              <a:buAutoNum type="arabicPeriod"/>
+            </a:pPr>
+            <a:r>
+              <a:rPr lang="ru-RU" sz="2000" dirty="0"/>
+              <a:t>Клиент получает уведомление об успешной отмене.</a:t>
             </a:r>
           </a:p>
         </p:txBody>
@@ -6961,7 +9343,7 @@
     </p:spTree>
     <p:extLst>
       <p:ext uri="{BB962C8B-B14F-4D97-AF65-F5344CB8AC3E}">
-        <p14:creationId xmlns:p14="http://schemas.microsoft.com/office/powerpoint/2010/main" val="1666010148"/>
+        <p14:creationId xmlns:p14="http://schemas.microsoft.com/office/powerpoint/2010/main" val="214377119"/>
       </p:ext>
     </p:extLst>
   </p:cSld>
@@ -7021,14 +9403,14 @@
           <a:p>
             <a:r>
               <a:rPr lang="ru-RU" sz="3600" dirty="0"/>
-              <a:t>Реализация</a:t>
+              <a:t>Описание прецедента</a:t>
             </a:r>
             <a:br>
               <a:rPr lang="ru-RU" sz="3600" dirty="0"/>
             </a:br>
             <a:r>
               <a:rPr lang="ru-RU" sz="2400" dirty="0"/>
-              <a:t>Базы данных</a:t>
+              <a:t>«Отменить бронь»</a:t>
             </a:r>
             <a:endParaRPr lang="ru-RU" sz="3600" dirty="0"/>
           </a:p>
@@ -7052,8 +9434,8 @@
         </p:nvSpPr>
         <p:spPr>
           <a:xfrm>
-            <a:off x="1162263" y="2028200"/>
-            <a:ext cx="7045411" cy="3580566"/>
+            <a:off x="838200" y="1705372"/>
+            <a:ext cx="10515600" cy="4351338"/>
           </a:xfrm>
         </p:spPr>
         <p:txBody>
@@ -7063,76 +9445,60 @@
           <a:lstStyle/>
           <a:p>
             <a:pPr marL="0" indent="0">
-              <a:lnSpc>
-                <a:spcPct val="100000"/>
-              </a:lnSpc>
               <a:buNone/>
             </a:pPr>
             <a:r>
-              <a:rPr lang="ru-RU" sz="2200" dirty="0"/>
-              <a:t>Для работы с данными был выбран подход </a:t>
-            </a:r>
-            <a:r>
-              <a:rPr lang="ru-RU" sz="2200" dirty="0" err="1"/>
-              <a:t>Code</a:t>
-            </a:r>
-            <a:r>
-              <a:rPr lang="ru-RU" sz="2200" dirty="0"/>
-              <a:t> </a:t>
-            </a:r>
-            <a:r>
-              <a:rPr lang="ru-RU" sz="2200" dirty="0" err="1"/>
-              <a:t>First</a:t>
-            </a:r>
-            <a:r>
-              <a:rPr lang="ru-RU" sz="2200" dirty="0"/>
-              <a:t> с использованием ORM </a:t>
-            </a:r>
-            <a:r>
-              <a:rPr lang="ru-RU" sz="2200" dirty="0" err="1"/>
-              <a:t>Entity</a:t>
-            </a:r>
-            <a:r>
-              <a:rPr lang="ru-RU" sz="2200" dirty="0"/>
-              <a:t> </a:t>
-            </a:r>
-            <a:r>
-              <a:rPr lang="ru-RU" sz="2200" dirty="0" err="1"/>
-              <a:t>Framework</a:t>
-            </a:r>
-            <a:r>
-              <a:rPr lang="ru-RU" sz="2200" dirty="0"/>
-              <a:t> </a:t>
-            </a:r>
-            <a:r>
-              <a:rPr lang="ru-RU" sz="2200" dirty="0" err="1"/>
-              <a:t>Core</a:t>
-            </a:r>
-            <a:r>
-              <a:rPr lang="ru-RU" sz="2200" dirty="0"/>
-              <a:t>. В целях поддержания </a:t>
-            </a:r>
-            <a:r>
-              <a:rPr lang="ru-RU" sz="2200" dirty="0" err="1"/>
-              <a:t>микросервисной</a:t>
-            </a:r>
-            <a:r>
-              <a:rPr lang="ru-RU" sz="2200" dirty="0"/>
-              <a:t> архитектуры для каждого </a:t>
-            </a:r>
-            <a:r>
-              <a:rPr lang="ru-RU" sz="2200" dirty="0" err="1"/>
-              <a:t>микросервиса</a:t>
-            </a:r>
-            <a:r>
-              <a:rPr lang="ru-RU" sz="2200" dirty="0"/>
-              <a:t> была создана своя база данных, независимая от других. Таким образом сначала были реализованы целевые сущности, на основе которых затем был сгенерирован код создания базы данных </a:t>
-            </a:r>
-            <a:r>
-              <a:rPr lang="ru-RU" sz="2200" dirty="0" err="1"/>
-              <a:t>MySQL</a:t>
-            </a:r>
-            <a:endParaRPr lang="ru-RU" sz="2200" dirty="0"/>
+              <a:rPr lang="ru-RU" sz="2000" b="1" dirty="0"/>
+              <a:t>Альтернативный поток 1: </a:t>
+            </a:r>
+            <a:r>
+              <a:rPr lang="ru-RU" sz="2000" dirty="0"/>
+              <a:t>отмена невозможна.</a:t>
+            </a:r>
+          </a:p>
+          <a:p>
+            <a:pPr marL="0" indent="0">
+              <a:buNone/>
+            </a:pPr>
+            <a:r>
+              <a:rPr lang="ru-RU" sz="2000" dirty="0"/>
+              <a:t>Срок для бесплатной отмены истёк или условия брони не позволяют её отменить. Система уведомляет клиента и выводит информацию о штрафах.</a:t>
+            </a:r>
+          </a:p>
+          <a:p>
+            <a:pPr marL="0" indent="0">
+              <a:buNone/>
+            </a:pPr>
+            <a:r>
+              <a:rPr lang="ru-RU" sz="2000" b="1" dirty="0"/>
+              <a:t>Альтернативный поток 2:</a:t>
+            </a:r>
+            <a:r>
+              <a:rPr lang="ru-RU" sz="2000" dirty="0"/>
+              <a:t> сбой системы</a:t>
+            </a:r>
+          </a:p>
+          <a:p>
+            <a:pPr marL="0" indent="0">
+              <a:buNone/>
+            </a:pPr>
+            <a:r>
+              <a:rPr lang="ru-RU" sz="2000" dirty="0"/>
+              <a:t>Техническая ошибка (например, недоступность базы данных) не позволяет отменить бронь. В таком случае система уведомляет о невозможности выполнить отмену в данный момент и предлагает повторить позже.</a:t>
+            </a:r>
+          </a:p>
+          <a:p>
+            <a:pPr marL="0" indent="0">
+              <a:buNone/>
+            </a:pPr>
+            <a:r>
+              <a:rPr lang="ru-RU" sz="2000" b="1" dirty="0"/>
+              <a:t>Постусловие:</a:t>
+            </a:r>
+            <a:r>
+              <a:rPr lang="ru-RU" sz="2000" dirty="0"/>
+              <a:t> Статус брони изменён на «Отменена», либо клиент получил уведомление о невозможности отмены по условиям тура. Информация о брони обновлена в базе данных и доступна для дальнейшей обработки менеджером.</a:t>
+            </a:r>
           </a:p>
         </p:txBody>
       </p:sp>
@@ -7165,40 +9531,10 @@
           </a:p>
         </p:txBody>
       </p:sp>
-      <p:pic>
-        <p:nvPicPr>
-          <p:cNvPr id="5" name="Рисунок 4">
-            <a:extLst>
-              <a:ext uri="{FF2B5EF4-FFF2-40B4-BE49-F238E27FC236}">
-                <a16:creationId xmlns:a16="http://schemas.microsoft.com/office/drawing/2014/main" id="{8B649220-95E2-422A-8AE8-9A6F6C8F3DD5}"/>
-              </a:ext>
-            </a:extLst>
-          </p:cNvPr>
-          <p:cNvPicPr>
-            <a:picLocks noChangeAspect="1"/>
-          </p:cNvPicPr>
-          <p:nvPr/>
-        </p:nvPicPr>
-        <p:blipFill>
-          <a:blip r:embed="rId2"/>
-          <a:stretch>
-            <a:fillRect/>
-          </a:stretch>
-        </p:blipFill>
-        <p:spPr>
-          <a:xfrm>
-            <a:off x="8543365" y="1827480"/>
-            <a:ext cx="2486372" cy="3982006"/>
-          </a:xfrm>
-          <a:prstGeom prst="rect">
-            <a:avLst/>
-          </a:prstGeom>
-        </p:spPr>
-      </p:pic>
     </p:spTree>
     <p:extLst>
       <p:ext uri="{BB962C8B-B14F-4D97-AF65-F5344CB8AC3E}">
-        <p14:creationId xmlns:p14="http://schemas.microsoft.com/office/powerpoint/2010/main" val="3186957526"/>
+        <p14:creationId xmlns:p14="http://schemas.microsoft.com/office/powerpoint/2010/main" val="1666010148"/>
       </p:ext>
     </p:extLst>
   </p:cSld>
@@ -7230,920 +9566,10 @@
       </p:grpSpPr>
       <p:sp>
         <p:nvSpPr>
-          <p:cNvPr id="3" name="Объект 2">
-            <a:extLst>
-              <a:ext uri="{FF2B5EF4-FFF2-40B4-BE49-F238E27FC236}">
-                <a16:creationId xmlns:a16="http://schemas.microsoft.com/office/drawing/2014/main" id="{F390DBCE-CB13-4B52-BAF8-B83E8E4EE106}"/>
-              </a:ext>
-            </a:extLst>
-          </p:cNvPr>
-          <p:cNvSpPr>
-            <a:spLocks noGrp="1"/>
-          </p:cNvSpPr>
-          <p:nvPr>
-            <p:ph idx="1"/>
-          </p:nvPr>
-        </p:nvSpPr>
-        <p:spPr>
-          <a:xfrm>
-            <a:off x="712306" y="1875498"/>
-            <a:ext cx="5579994" cy="4180025"/>
-          </a:xfrm>
-        </p:spPr>
-        <p:txBody>
-          <a:bodyPr>
-            <a:noAutofit/>
-          </a:bodyPr>
-          <a:lstStyle/>
-          <a:p>
-            <a:pPr marL="0" indent="0">
-              <a:lnSpc>
-                <a:spcPct val="100000"/>
-              </a:lnSpc>
-              <a:spcBef>
-                <a:spcPts val="0"/>
-              </a:spcBef>
-              <a:buNone/>
-            </a:pPr>
-            <a:r>
-              <a:rPr lang="en-US" sz="1400" dirty="0">
-                <a:latin typeface="Courier New" panose="02070309020205020404" pitchFamily="49" charset="0"/>
-                <a:cs typeface="Courier New" panose="02070309020205020404" pitchFamily="49" charset="0"/>
-              </a:rPr>
-              <a:t>[</a:t>
-            </a:r>
-            <a:r>
-              <a:rPr lang="en-US" sz="1400" dirty="0" err="1">
-                <a:latin typeface="Courier New" panose="02070309020205020404" pitchFamily="49" charset="0"/>
-                <a:cs typeface="Courier New" panose="02070309020205020404" pitchFamily="49" charset="0"/>
-              </a:rPr>
-              <a:t>HttpPost</a:t>
-            </a:r>
-            <a:r>
-              <a:rPr lang="en-US" sz="1400" dirty="0">
-                <a:latin typeface="Courier New" panose="02070309020205020404" pitchFamily="49" charset="0"/>
-                <a:cs typeface="Courier New" panose="02070309020205020404" pitchFamily="49" charset="0"/>
-              </a:rPr>
-              <a:t>("cancel/{id}")]</a:t>
-            </a:r>
-          </a:p>
-          <a:p>
-            <a:pPr marL="0" indent="0">
-              <a:lnSpc>
-                <a:spcPct val="100000"/>
-              </a:lnSpc>
-              <a:spcBef>
-                <a:spcPts val="0"/>
-              </a:spcBef>
-              <a:buNone/>
-            </a:pPr>
-            <a:r>
-              <a:rPr lang="en-US" sz="1400" dirty="0">
-                <a:latin typeface="Courier New" panose="02070309020205020404" pitchFamily="49" charset="0"/>
-                <a:cs typeface="Courier New" panose="02070309020205020404" pitchFamily="49" charset="0"/>
-              </a:rPr>
-              <a:t>public async Task&lt;</a:t>
-            </a:r>
-            <a:r>
-              <a:rPr lang="en-US" sz="1400" dirty="0" err="1">
-                <a:latin typeface="Courier New" panose="02070309020205020404" pitchFamily="49" charset="0"/>
-                <a:cs typeface="Courier New" panose="02070309020205020404" pitchFamily="49" charset="0"/>
-              </a:rPr>
-              <a:t>IActionResult</a:t>
-            </a:r>
-            <a:r>
-              <a:rPr lang="en-US" sz="1400" dirty="0">
-                <a:latin typeface="Courier New" panose="02070309020205020404" pitchFamily="49" charset="0"/>
-                <a:cs typeface="Courier New" panose="02070309020205020404" pitchFamily="49" charset="0"/>
-              </a:rPr>
-              <a:t>&gt; </a:t>
-            </a:r>
-            <a:r>
-              <a:rPr lang="en-US" sz="1400" dirty="0" err="1">
-                <a:latin typeface="Courier New" panose="02070309020205020404" pitchFamily="49" charset="0"/>
-                <a:cs typeface="Courier New" panose="02070309020205020404" pitchFamily="49" charset="0"/>
-              </a:rPr>
-              <a:t>CancelBooking</a:t>
-            </a:r>
-            <a:r>
-              <a:rPr lang="en-US" sz="1400" dirty="0">
-                <a:latin typeface="Courier New" panose="02070309020205020404" pitchFamily="49" charset="0"/>
-                <a:cs typeface="Courier New" panose="02070309020205020404" pitchFamily="49" charset="0"/>
-              </a:rPr>
-              <a:t>(int id)</a:t>
-            </a:r>
-          </a:p>
-          <a:p>
-            <a:pPr marL="0" indent="0">
-              <a:lnSpc>
-                <a:spcPct val="100000"/>
-              </a:lnSpc>
-              <a:spcBef>
-                <a:spcPts val="0"/>
-              </a:spcBef>
-              <a:buNone/>
-            </a:pPr>
-            <a:r>
-              <a:rPr lang="en-US" sz="1400" dirty="0">
-                <a:latin typeface="Courier New" panose="02070309020205020404" pitchFamily="49" charset="0"/>
-                <a:cs typeface="Courier New" panose="02070309020205020404" pitchFamily="49" charset="0"/>
-              </a:rPr>
-              <a:t>{</a:t>
-            </a:r>
-          </a:p>
-          <a:p>
-            <a:pPr marL="0" indent="0">
-              <a:lnSpc>
-                <a:spcPct val="100000"/>
-              </a:lnSpc>
-              <a:spcBef>
-                <a:spcPts val="0"/>
-              </a:spcBef>
-              <a:buNone/>
-            </a:pPr>
-            <a:r>
-              <a:rPr lang="en-US" sz="1400" dirty="0">
-                <a:latin typeface="Courier New" panose="02070309020205020404" pitchFamily="49" charset="0"/>
-                <a:cs typeface="Courier New" panose="02070309020205020404" pitchFamily="49" charset="0"/>
-              </a:rPr>
-              <a:t>    var </a:t>
-            </a:r>
-            <a:r>
-              <a:rPr lang="en-US" sz="1400" dirty="0" err="1">
-                <a:latin typeface="Courier New" panose="02070309020205020404" pitchFamily="49" charset="0"/>
-                <a:cs typeface="Courier New" panose="02070309020205020404" pitchFamily="49" charset="0"/>
-              </a:rPr>
-              <a:t>userId</a:t>
-            </a:r>
-            <a:r>
-              <a:rPr lang="en-US" sz="1400" dirty="0">
-                <a:latin typeface="Courier New" panose="02070309020205020404" pitchFamily="49" charset="0"/>
-                <a:cs typeface="Courier New" panose="02070309020205020404" pitchFamily="49" charset="0"/>
-              </a:rPr>
-              <a:t> = </a:t>
-            </a:r>
-            <a:r>
-              <a:rPr lang="en-US" sz="1400" dirty="0" err="1">
-                <a:latin typeface="Courier New" panose="02070309020205020404" pitchFamily="49" charset="0"/>
-                <a:cs typeface="Courier New" panose="02070309020205020404" pitchFamily="49" charset="0"/>
-              </a:rPr>
-              <a:t>GetUserId</a:t>
-            </a:r>
-            <a:r>
-              <a:rPr lang="en-US" sz="1400" dirty="0">
-                <a:latin typeface="Courier New" panose="02070309020205020404" pitchFamily="49" charset="0"/>
-                <a:cs typeface="Courier New" panose="02070309020205020404" pitchFamily="49" charset="0"/>
-              </a:rPr>
-              <a:t>();</a:t>
-            </a:r>
-          </a:p>
-          <a:p>
-            <a:pPr marL="0" indent="0">
-              <a:lnSpc>
-                <a:spcPct val="100000"/>
-              </a:lnSpc>
-              <a:spcBef>
-                <a:spcPts val="0"/>
-              </a:spcBef>
-              <a:buNone/>
-            </a:pPr>
-            <a:r>
-              <a:rPr lang="en-US" sz="1400" dirty="0">
-                <a:latin typeface="Courier New" panose="02070309020205020404" pitchFamily="49" charset="0"/>
-                <a:cs typeface="Courier New" panose="02070309020205020404" pitchFamily="49" charset="0"/>
-              </a:rPr>
-              <a:t>    var token = </a:t>
-            </a:r>
-            <a:r>
-              <a:rPr lang="en-US" sz="1400" dirty="0" err="1">
-                <a:latin typeface="Courier New" panose="02070309020205020404" pitchFamily="49" charset="0"/>
-                <a:cs typeface="Courier New" panose="02070309020205020404" pitchFamily="49" charset="0"/>
-              </a:rPr>
-              <a:t>GetToken</a:t>
-            </a:r>
-            <a:r>
-              <a:rPr lang="en-US" sz="1400" dirty="0">
-                <a:latin typeface="Courier New" panose="02070309020205020404" pitchFamily="49" charset="0"/>
-                <a:cs typeface="Courier New" panose="02070309020205020404" pitchFamily="49" charset="0"/>
-              </a:rPr>
-              <a:t>();</a:t>
-            </a:r>
-          </a:p>
-          <a:p>
-            <a:pPr marL="0" indent="0">
-              <a:lnSpc>
-                <a:spcPct val="100000"/>
-              </a:lnSpc>
-              <a:spcBef>
-                <a:spcPts val="0"/>
-              </a:spcBef>
-              <a:buNone/>
-            </a:pPr>
-            <a:r>
-              <a:rPr lang="en-US" sz="1400" dirty="0">
-                <a:latin typeface="Courier New" panose="02070309020205020404" pitchFamily="49" charset="0"/>
-                <a:cs typeface="Courier New" panose="02070309020205020404" pitchFamily="49" charset="0"/>
-              </a:rPr>
-              <a:t>    var booking = await _</a:t>
-            </a:r>
-            <a:r>
-              <a:rPr lang="en-US" sz="1400" dirty="0" err="1">
-                <a:latin typeface="Courier New" panose="02070309020205020404" pitchFamily="49" charset="0"/>
-                <a:cs typeface="Courier New" panose="02070309020205020404" pitchFamily="49" charset="0"/>
-              </a:rPr>
-              <a:t>context.Bookings.FindAsync</a:t>
-            </a:r>
-            <a:r>
-              <a:rPr lang="en-US" sz="1400" dirty="0">
-                <a:latin typeface="Courier New" panose="02070309020205020404" pitchFamily="49" charset="0"/>
-                <a:cs typeface="Courier New" panose="02070309020205020404" pitchFamily="49" charset="0"/>
-              </a:rPr>
-              <a:t>(id);</a:t>
-            </a:r>
-          </a:p>
-          <a:p>
-            <a:pPr marL="0" indent="0">
-              <a:lnSpc>
-                <a:spcPct val="100000"/>
-              </a:lnSpc>
-              <a:spcBef>
-                <a:spcPts val="0"/>
-              </a:spcBef>
-              <a:buNone/>
-            </a:pPr>
-            <a:endParaRPr lang="en-US" sz="1400" dirty="0">
-              <a:latin typeface="Courier New" panose="02070309020205020404" pitchFamily="49" charset="0"/>
-              <a:cs typeface="Courier New" panose="02070309020205020404" pitchFamily="49" charset="0"/>
-            </a:endParaRPr>
-          </a:p>
-          <a:p>
-            <a:pPr marL="0" indent="0">
-              <a:lnSpc>
-                <a:spcPct val="100000"/>
-              </a:lnSpc>
-              <a:spcBef>
-                <a:spcPts val="0"/>
-              </a:spcBef>
-              <a:buNone/>
-            </a:pPr>
-            <a:r>
-              <a:rPr lang="en-US" sz="1400" dirty="0">
-                <a:latin typeface="Courier New" panose="02070309020205020404" pitchFamily="49" charset="0"/>
-                <a:cs typeface="Courier New" panose="02070309020205020404" pitchFamily="49" charset="0"/>
-              </a:rPr>
-              <a:t>    if (booking == null) return </a:t>
-            </a:r>
-            <a:r>
-              <a:rPr lang="en-US" sz="1400" dirty="0" err="1">
-                <a:latin typeface="Courier New" panose="02070309020205020404" pitchFamily="49" charset="0"/>
-                <a:cs typeface="Courier New" panose="02070309020205020404" pitchFamily="49" charset="0"/>
-              </a:rPr>
-              <a:t>NotFound</a:t>
-            </a:r>
-            <a:r>
-              <a:rPr lang="en-US" sz="1400" dirty="0">
-                <a:latin typeface="Courier New" panose="02070309020205020404" pitchFamily="49" charset="0"/>
-                <a:cs typeface="Courier New" panose="02070309020205020404" pitchFamily="49" charset="0"/>
-              </a:rPr>
-              <a:t>();</a:t>
-            </a:r>
-          </a:p>
-          <a:p>
-            <a:pPr marL="0" indent="0">
-              <a:lnSpc>
-                <a:spcPct val="100000"/>
-              </a:lnSpc>
-              <a:spcBef>
-                <a:spcPts val="0"/>
-              </a:spcBef>
-              <a:buNone/>
-            </a:pPr>
-            <a:endParaRPr lang="en-US" sz="1400" dirty="0">
-              <a:latin typeface="Courier New" panose="02070309020205020404" pitchFamily="49" charset="0"/>
-              <a:cs typeface="Courier New" panose="02070309020205020404" pitchFamily="49" charset="0"/>
-            </a:endParaRPr>
-          </a:p>
-          <a:p>
-            <a:pPr marL="0" indent="0">
-              <a:lnSpc>
-                <a:spcPct val="100000"/>
-              </a:lnSpc>
-              <a:spcBef>
-                <a:spcPts val="0"/>
-              </a:spcBef>
-              <a:buNone/>
-            </a:pPr>
-            <a:r>
-              <a:rPr lang="en-US" sz="1400" dirty="0">
-                <a:latin typeface="Courier New" panose="02070309020205020404" pitchFamily="49" charset="0"/>
-                <a:cs typeface="Courier New" panose="02070309020205020404" pitchFamily="49" charset="0"/>
-              </a:rPr>
-              <a:t>    bool </a:t>
-            </a:r>
-            <a:r>
-              <a:rPr lang="en-US" sz="1400" dirty="0" err="1">
-                <a:latin typeface="Courier New" panose="02070309020205020404" pitchFamily="49" charset="0"/>
-                <a:cs typeface="Courier New" panose="02070309020205020404" pitchFamily="49" charset="0"/>
-              </a:rPr>
-              <a:t>isStaff</a:t>
-            </a:r>
-            <a:r>
-              <a:rPr lang="en-US" sz="1400" dirty="0">
-                <a:latin typeface="Courier New" panose="02070309020205020404" pitchFamily="49" charset="0"/>
-                <a:cs typeface="Courier New" panose="02070309020205020404" pitchFamily="49" charset="0"/>
-              </a:rPr>
-              <a:t> = </a:t>
-            </a:r>
-            <a:r>
-              <a:rPr lang="en-US" sz="1400" dirty="0" err="1">
-                <a:latin typeface="Courier New" panose="02070309020205020404" pitchFamily="49" charset="0"/>
-                <a:cs typeface="Courier New" panose="02070309020205020404" pitchFamily="49" charset="0"/>
-              </a:rPr>
-              <a:t>User.IsInRole</a:t>
-            </a:r>
-            <a:r>
-              <a:rPr lang="en-US" sz="1400" dirty="0">
-                <a:latin typeface="Courier New" panose="02070309020205020404" pitchFamily="49" charset="0"/>
-                <a:cs typeface="Courier New" panose="02070309020205020404" pitchFamily="49" charset="0"/>
-              </a:rPr>
-              <a:t>("Admin") || </a:t>
-            </a:r>
-            <a:r>
-              <a:rPr lang="en-US" sz="1400" dirty="0" err="1">
-                <a:latin typeface="Courier New" panose="02070309020205020404" pitchFamily="49" charset="0"/>
-                <a:cs typeface="Courier New" panose="02070309020205020404" pitchFamily="49" charset="0"/>
-              </a:rPr>
-              <a:t>User.IsInRole</a:t>
-            </a:r>
-            <a:r>
-              <a:rPr lang="en-US" sz="1400" dirty="0">
-                <a:latin typeface="Courier New" panose="02070309020205020404" pitchFamily="49" charset="0"/>
-                <a:cs typeface="Courier New" panose="02070309020205020404" pitchFamily="49" charset="0"/>
-              </a:rPr>
-              <a:t>("Manager");</a:t>
-            </a:r>
-          </a:p>
-          <a:p>
-            <a:pPr marL="0" indent="0">
-              <a:lnSpc>
-                <a:spcPct val="100000"/>
-              </a:lnSpc>
-              <a:spcBef>
-                <a:spcPts val="0"/>
-              </a:spcBef>
-              <a:buNone/>
-            </a:pPr>
-            <a:r>
-              <a:rPr lang="en-US" sz="1400" dirty="0">
-                <a:latin typeface="Courier New" panose="02070309020205020404" pitchFamily="49" charset="0"/>
-                <a:cs typeface="Courier New" panose="02070309020205020404" pitchFamily="49" charset="0"/>
-              </a:rPr>
-              <a:t>    if (</a:t>
-            </a:r>
-            <a:r>
-              <a:rPr lang="en-US" sz="1400" dirty="0" err="1">
-                <a:latin typeface="Courier New" panose="02070309020205020404" pitchFamily="49" charset="0"/>
-                <a:cs typeface="Courier New" panose="02070309020205020404" pitchFamily="49" charset="0"/>
-              </a:rPr>
-              <a:t>booking.UserId</a:t>
-            </a:r>
-            <a:r>
-              <a:rPr lang="en-US" sz="1400" dirty="0">
-                <a:latin typeface="Courier New" panose="02070309020205020404" pitchFamily="49" charset="0"/>
-                <a:cs typeface="Courier New" panose="02070309020205020404" pitchFamily="49" charset="0"/>
-              </a:rPr>
-              <a:t> != </a:t>
-            </a:r>
-            <a:r>
-              <a:rPr lang="en-US" sz="1400" dirty="0" err="1">
-                <a:latin typeface="Courier New" panose="02070309020205020404" pitchFamily="49" charset="0"/>
-                <a:cs typeface="Courier New" panose="02070309020205020404" pitchFamily="49" charset="0"/>
-              </a:rPr>
-              <a:t>userId</a:t>
-            </a:r>
-            <a:r>
-              <a:rPr lang="en-US" sz="1400" dirty="0">
-                <a:latin typeface="Courier New" panose="02070309020205020404" pitchFamily="49" charset="0"/>
-                <a:cs typeface="Courier New" panose="02070309020205020404" pitchFamily="49" charset="0"/>
-              </a:rPr>
-              <a:t> &amp;&amp; !</a:t>
-            </a:r>
-            <a:r>
-              <a:rPr lang="en-US" sz="1400" dirty="0" err="1">
-                <a:latin typeface="Courier New" panose="02070309020205020404" pitchFamily="49" charset="0"/>
-                <a:cs typeface="Courier New" panose="02070309020205020404" pitchFamily="49" charset="0"/>
-              </a:rPr>
-              <a:t>isStaff</a:t>
-            </a:r>
-            <a:r>
-              <a:rPr lang="en-US" sz="1400" dirty="0">
-                <a:latin typeface="Courier New" panose="02070309020205020404" pitchFamily="49" charset="0"/>
-                <a:cs typeface="Courier New" panose="02070309020205020404" pitchFamily="49" charset="0"/>
-              </a:rPr>
-              <a:t>) return Forbid();</a:t>
-            </a:r>
-          </a:p>
-          <a:p>
-            <a:pPr marL="0" indent="0">
-              <a:lnSpc>
-                <a:spcPct val="100000"/>
-              </a:lnSpc>
-              <a:spcBef>
-                <a:spcPts val="0"/>
-              </a:spcBef>
-              <a:buNone/>
-            </a:pPr>
-            <a:endParaRPr lang="en-US" sz="1400" dirty="0">
-              <a:latin typeface="Courier New" panose="02070309020205020404" pitchFamily="49" charset="0"/>
-              <a:cs typeface="Courier New" panose="02070309020205020404" pitchFamily="49" charset="0"/>
-            </a:endParaRPr>
-          </a:p>
-          <a:p>
-            <a:pPr marL="0" indent="0">
-              <a:lnSpc>
-                <a:spcPct val="100000"/>
-              </a:lnSpc>
-              <a:spcBef>
-                <a:spcPts val="0"/>
-              </a:spcBef>
-              <a:buNone/>
-            </a:pPr>
-            <a:r>
-              <a:rPr lang="en-US" sz="1400" dirty="0">
-                <a:latin typeface="Courier New" panose="02070309020205020404" pitchFamily="49" charset="0"/>
-                <a:cs typeface="Courier New" panose="02070309020205020404" pitchFamily="49" charset="0"/>
-              </a:rPr>
-              <a:t>    if (</a:t>
-            </a:r>
-            <a:r>
-              <a:rPr lang="en-US" sz="1400" dirty="0" err="1">
-                <a:latin typeface="Courier New" panose="02070309020205020404" pitchFamily="49" charset="0"/>
-                <a:cs typeface="Courier New" panose="02070309020205020404" pitchFamily="49" charset="0"/>
-              </a:rPr>
-              <a:t>booking.Status</a:t>
-            </a:r>
-            <a:r>
-              <a:rPr lang="en-US" sz="1400" dirty="0">
-                <a:latin typeface="Courier New" panose="02070309020205020404" pitchFamily="49" charset="0"/>
-                <a:cs typeface="Courier New" panose="02070309020205020404" pitchFamily="49" charset="0"/>
-              </a:rPr>
-              <a:t> == </a:t>
-            </a:r>
-            <a:r>
-              <a:rPr lang="en-US" sz="1400" dirty="0" err="1">
-                <a:latin typeface="Courier New" panose="02070309020205020404" pitchFamily="49" charset="0"/>
-                <a:cs typeface="Courier New" panose="02070309020205020404" pitchFamily="49" charset="0"/>
-              </a:rPr>
-              <a:t>BookingStatus.Cancelled</a:t>
-            </a:r>
-            <a:r>
-              <a:rPr lang="en-US" sz="1400" dirty="0">
-                <a:latin typeface="Courier New" panose="02070309020205020404" pitchFamily="49" charset="0"/>
-                <a:cs typeface="Courier New" panose="02070309020205020404" pitchFamily="49" charset="0"/>
-              </a:rPr>
-              <a:t> || </a:t>
-            </a:r>
-            <a:r>
-              <a:rPr lang="en-US" sz="1400" dirty="0" err="1">
-                <a:latin typeface="Courier New" panose="02070309020205020404" pitchFamily="49" charset="0"/>
-                <a:cs typeface="Courier New" panose="02070309020205020404" pitchFamily="49" charset="0"/>
-              </a:rPr>
-              <a:t>booking.Status</a:t>
-            </a:r>
-            <a:r>
-              <a:rPr lang="en-US" sz="1400" dirty="0">
-                <a:latin typeface="Courier New" panose="02070309020205020404" pitchFamily="49" charset="0"/>
-                <a:cs typeface="Courier New" panose="02070309020205020404" pitchFamily="49" charset="0"/>
-              </a:rPr>
-              <a:t> == </a:t>
-            </a:r>
-            <a:r>
-              <a:rPr lang="en-US" sz="1400" dirty="0" err="1">
-                <a:latin typeface="Courier New" panose="02070309020205020404" pitchFamily="49" charset="0"/>
-                <a:cs typeface="Courier New" panose="02070309020205020404" pitchFamily="49" charset="0"/>
-              </a:rPr>
-              <a:t>BookingStatus.Failed</a:t>
-            </a:r>
-            <a:r>
-              <a:rPr lang="en-US" sz="1400" dirty="0">
-                <a:latin typeface="Courier New" panose="02070309020205020404" pitchFamily="49" charset="0"/>
-                <a:cs typeface="Courier New" panose="02070309020205020404" pitchFamily="49" charset="0"/>
-              </a:rPr>
-              <a:t>)</a:t>
-            </a:r>
-          </a:p>
-          <a:p>
-            <a:pPr marL="0" indent="0">
-              <a:lnSpc>
-                <a:spcPct val="100000"/>
-              </a:lnSpc>
-              <a:spcBef>
-                <a:spcPts val="0"/>
-              </a:spcBef>
-              <a:buNone/>
-            </a:pPr>
-            <a:r>
-              <a:rPr lang="en-US" sz="1400" dirty="0">
-                <a:latin typeface="Courier New" panose="02070309020205020404" pitchFamily="49" charset="0"/>
-                <a:cs typeface="Courier New" panose="02070309020205020404" pitchFamily="49" charset="0"/>
-              </a:rPr>
-              <a:t>        return </a:t>
-            </a:r>
-            <a:r>
-              <a:rPr lang="en-US" sz="1400" dirty="0" err="1">
-                <a:latin typeface="Courier New" panose="02070309020205020404" pitchFamily="49" charset="0"/>
-                <a:cs typeface="Courier New" panose="02070309020205020404" pitchFamily="49" charset="0"/>
-              </a:rPr>
-              <a:t>BadRequest</a:t>
-            </a:r>
-            <a:r>
-              <a:rPr lang="en-US" sz="1400" dirty="0">
-                <a:latin typeface="Courier New" panose="02070309020205020404" pitchFamily="49" charset="0"/>
-                <a:cs typeface="Courier New" panose="02070309020205020404" pitchFamily="49" charset="0"/>
-              </a:rPr>
-              <a:t>("Booking cannot be cancelled.");</a:t>
-            </a:r>
-          </a:p>
-          <a:p>
-            <a:pPr marL="0" indent="0">
-              <a:lnSpc>
-                <a:spcPct val="100000"/>
-              </a:lnSpc>
-              <a:spcBef>
-                <a:spcPts val="0"/>
-              </a:spcBef>
-              <a:buNone/>
-            </a:pPr>
-            <a:endParaRPr lang="en-US" sz="1400" dirty="0">
-              <a:latin typeface="Courier New" panose="02070309020205020404" pitchFamily="49" charset="0"/>
-              <a:cs typeface="Courier New" panose="02070309020205020404" pitchFamily="49" charset="0"/>
-            </a:endParaRPr>
-          </a:p>
-          <a:p>
-            <a:pPr marL="0" indent="0">
-              <a:lnSpc>
-                <a:spcPct val="100000"/>
-              </a:lnSpc>
-              <a:spcBef>
-                <a:spcPts val="0"/>
-              </a:spcBef>
-              <a:buNone/>
-            </a:pPr>
-            <a:endParaRPr lang="ru-RU" sz="1300" dirty="0">
-              <a:latin typeface="Courier New" panose="02070309020205020404" pitchFamily="49" charset="0"/>
-              <a:cs typeface="Courier New" panose="02070309020205020404" pitchFamily="49" charset="0"/>
-            </a:endParaRPr>
-          </a:p>
-          <a:p>
-            <a:pPr marL="0" indent="0">
-              <a:lnSpc>
-                <a:spcPct val="100000"/>
-              </a:lnSpc>
-              <a:buNone/>
-            </a:pPr>
-            <a:endParaRPr lang="ru-RU" sz="1200" dirty="0">
-              <a:latin typeface="Courier New" panose="02070309020205020404" pitchFamily="49" charset="0"/>
-              <a:cs typeface="Courier New" panose="02070309020205020404" pitchFamily="49" charset="0"/>
-            </a:endParaRPr>
-          </a:p>
-        </p:txBody>
-      </p:sp>
-      <p:sp>
-        <p:nvSpPr>
-          <p:cNvPr id="4" name="Номер слайда 3">
-            <a:extLst>
-              <a:ext uri="{FF2B5EF4-FFF2-40B4-BE49-F238E27FC236}">
-                <a16:creationId xmlns:a16="http://schemas.microsoft.com/office/drawing/2014/main" id="{43464F56-7AB1-43FB-8EF2-541E8608D0DA}"/>
-              </a:ext>
-            </a:extLst>
-          </p:cNvPr>
-          <p:cNvSpPr>
-            <a:spLocks noGrp="1"/>
-          </p:cNvSpPr>
-          <p:nvPr>
-            <p:ph type="sldNum" sz="quarter" idx="12"/>
-          </p:nvPr>
-        </p:nvSpPr>
-        <p:spPr>
-          <a:xfrm>
-            <a:off x="11353800" y="5991225"/>
-            <a:ext cx="514350" cy="365125"/>
-          </a:xfrm>
-        </p:spPr>
-        <p:txBody>
-          <a:bodyPr/>
-          <a:lstStyle/>
-          <a:p>
-            <a:fld id="{53C82F7A-B581-4A0B-8CFB-8CE1E64145D9}" type="slidenum">
-              <a:rPr lang="ru-RU" smtClean="0"/>
-              <a:t>9</a:t>
-            </a:fld>
-            <a:endParaRPr lang="ru-RU" dirty="0"/>
-          </a:p>
-        </p:txBody>
-      </p:sp>
-      <p:sp>
-        <p:nvSpPr>
-          <p:cNvPr id="7" name="TextBox 6">
-            <a:extLst>
-              <a:ext uri="{FF2B5EF4-FFF2-40B4-BE49-F238E27FC236}">
-                <a16:creationId xmlns:a16="http://schemas.microsoft.com/office/drawing/2014/main" id="{B6D5C462-6D7F-48CD-B376-2B3D97669118}"/>
-              </a:ext>
-            </a:extLst>
-          </p:cNvPr>
-          <p:cNvSpPr txBox="1"/>
-          <p:nvPr/>
-        </p:nvSpPr>
-        <p:spPr>
-          <a:xfrm>
-            <a:off x="6427302" y="1780298"/>
-            <a:ext cx="5052392" cy="4185761"/>
-          </a:xfrm>
-          <a:prstGeom prst="rect">
-            <a:avLst/>
-          </a:prstGeom>
-          <a:noFill/>
-        </p:spPr>
-        <p:txBody>
-          <a:bodyPr wrap="square" rtlCol="0">
-            <a:spAutoFit/>
-          </a:bodyPr>
-          <a:lstStyle/>
-          <a:p>
-            <a:r>
-              <a:rPr lang="en-US" sz="1400" dirty="0">
-                <a:latin typeface="Courier New" panose="02070309020205020404" pitchFamily="49" charset="0"/>
-                <a:cs typeface="Courier New" panose="02070309020205020404" pitchFamily="49" charset="0"/>
-              </a:rPr>
-              <a:t> if (</a:t>
-            </a:r>
-            <a:r>
-              <a:rPr lang="en-US" sz="1400" dirty="0" err="1">
-                <a:latin typeface="Courier New" panose="02070309020205020404" pitchFamily="49" charset="0"/>
-                <a:cs typeface="Courier New" panose="02070309020205020404" pitchFamily="49" charset="0"/>
-              </a:rPr>
-              <a:t>booking.Status</a:t>
-            </a:r>
-            <a:r>
-              <a:rPr lang="en-US" sz="1400" dirty="0">
-                <a:latin typeface="Courier New" panose="02070309020205020404" pitchFamily="49" charset="0"/>
-                <a:cs typeface="Courier New" panose="02070309020205020404" pitchFamily="49" charset="0"/>
-              </a:rPr>
-              <a:t> == </a:t>
-            </a:r>
-            <a:r>
-              <a:rPr lang="en-US" sz="1400" dirty="0" err="1">
-                <a:latin typeface="Courier New" panose="02070309020205020404" pitchFamily="49" charset="0"/>
-                <a:cs typeface="Courier New" panose="02070309020205020404" pitchFamily="49" charset="0"/>
-              </a:rPr>
-              <a:t>BookingStatus.Confirmed</a:t>
-            </a:r>
-            <a:r>
-              <a:rPr lang="en-US" sz="1400" dirty="0">
-                <a:latin typeface="Courier New" panose="02070309020205020404" pitchFamily="49" charset="0"/>
-                <a:cs typeface="Courier New" panose="02070309020205020404" pitchFamily="49" charset="0"/>
-              </a:rPr>
-              <a:t> &amp;&amp; </a:t>
-            </a:r>
-            <a:r>
-              <a:rPr lang="en-US" sz="1400" dirty="0" err="1">
-                <a:latin typeface="Courier New" panose="02070309020205020404" pitchFamily="49" charset="0"/>
-                <a:cs typeface="Courier New" panose="02070309020205020404" pitchFamily="49" charset="0"/>
-              </a:rPr>
-              <a:t>booking.PaymentId.HasValue</a:t>
-            </a:r>
-            <a:r>
-              <a:rPr lang="en-US" sz="1400" dirty="0">
-                <a:latin typeface="Courier New" panose="02070309020205020404" pitchFamily="49" charset="0"/>
-                <a:cs typeface="Courier New" panose="02070309020205020404" pitchFamily="49" charset="0"/>
-              </a:rPr>
-              <a:t>)</a:t>
-            </a:r>
-          </a:p>
-          <a:p>
-            <a:r>
-              <a:rPr lang="en-US" sz="1400" dirty="0">
-                <a:latin typeface="Courier New" panose="02070309020205020404" pitchFamily="49" charset="0"/>
-                <a:cs typeface="Courier New" panose="02070309020205020404" pitchFamily="49" charset="0"/>
-              </a:rPr>
-              <a:t>    {</a:t>
-            </a:r>
-          </a:p>
-          <a:p>
-            <a:r>
-              <a:rPr lang="en-US" sz="1400" dirty="0">
-                <a:latin typeface="Courier New" panose="02070309020205020404" pitchFamily="49" charset="0"/>
-                <a:cs typeface="Courier New" panose="02070309020205020404" pitchFamily="49" charset="0"/>
-              </a:rPr>
-              <a:t>        var </a:t>
-            </a:r>
-            <a:r>
-              <a:rPr lang="en-US" sz="1400" dirty="0" err="1">
-                <a:latin typeface="Courier New" panose="02070309020205020404" pitchFamily="49" charset="0"/>
-                <a:cs typeface="Courier New" panose="02070309020205020404" pitchFamily="49" charset="0"/>
-              </a:rPr>
-              <a:t>refundReq</a:t>
-            </a:r>
-            <a:r>
-              <a:rPr lang="en-US" sz="1400" dirty="0">
-                <a:latin typeface="Courier New" panose="02070309020205020404" pitchFamily="49" charset="0"/>
-                <a:cs typeface="Courier New" panose="02070309020205020404" pitchFamily="49" charset="0"/>
-              </a:rPr>
-              <a:t> = new </a:t>
-            </a:r>
-            <a:r>
-              <a:rPr lang="en-US" sz="1400" dirty="0" err="1">
-                <a:latin typeface="Courier New" panose="02070309020205020404" pitchFamily="49" charset="0"/>
-                <a:cs typeface="Courier New" panose="02070309020205020404" pitchFamily="49" charset="0"/>
-              </a:rPr>
-              <a:t>RefundRequest</a:t>
-            </a:r>
-            <a:endParaRPr lang="en-US" sz="1400" dirty="0">
-              <a:latin typeface="Courier New" panose="02070309020205020404" pitchFamily="49" charset="0"/>
-              <a:cs typeface="Courier New" panose="02070309020205020404" pitchFamily="49" charset="0"/>
-            </a:endParaRPr>
-          </a:p>
-          <a:p>
-            <a:r>
-              <a:rPr lang="en-US" sz="1400" dirty="0">
-                <a:latin typeface="Courier New" panose="02070309020205020404" pitchFamily="49" charset="0"/>
-                <a:cs typeface="Courier New" panose="02070309020205020404" pitchFamily="49" charset="0"/>
-              </a:rPr>
-              <a:t>        {</a:t>
-            </a:r>
-          </a:p>
-          <a:p>
-            <a:r>
-              <a:rPr lang="en-US" sz="1400" dirty="0">
-                <a:latin typeface="Courier New" panose="02070309020205020404" pitchFamily="49" charset="0"/>
-                <a:cs typeface="Courier New" panose="02070309020205020404" pitchFamily="49" charset="0"/>
-              </a:rPr>
-              <a:t>            </a:t>
-            </a:r>
-            <a:r>
-              <a:rPr lang="en-US" sz="1400" dirty="0" err="1">
-                <a:latin typeface="Courier New" panose="02070309020205020404" pitchFamily="49" charset="0"/>
-                <a:cs typeface="Courier New" panose="02070309020205020404" pitchFamily="49" charset="0"/>
-              </a:rPr>
-              <a:t>PaymentId</a:t>
-            </a:r>
-            <a:r>
-              <a:rPr lang="en-US" sz="1400" dirty="0">
-                <a:latin typeface="Courier New" panose="02070309020205020404" pitchFamily="49" charset="0"/>
-                <a:cs typeface="Courier New" panose="02070309020205020404" pitchFamily="49" charset="0"/>
-              </a:rPr>
-              <a:t> = </a:t>
-            </a:r>
-            <a:r>
-              <a:rPr lang="en-US" sz="1400" dirty="0" err="1">
-                <a:latin typeface="Courier New" panose="02070309020205020404" pitchFamily="49" charset="0"/>
-                <a:cs typeface="Courier New" panose="02070309020205020404" pitchFamily="49" charset="0"/>
-              </a:rPr>
-              <a:t>booking.PaymentId.Value</a:t>
-            </a:r>
-            <a:r>
-              <a:rPr lang="en-US" sz="1400" dirty="0">
-                <a:latin typeface="Courier New" panose="02070309020205020404" pitchFamily="49" charset="0"/>
-                <a:cs typeface="Courier New" panose="02070309020205020404" pitchFamily="49" charset="0"/>
-              </a:rPr>
-              <a:t>,</a:t>
-            </a:r>
-          </a:p>
-          <a:p>
-            <a:r>
-              <a:rPr lang="en-US" sz="1400" dirty="0">
-                <a:latin typeface="Courier New" panose="02070309020205020404" pitchFamily="49" charset="0"/>
-                <a:cs typeface="Courier New" panose="02070309020205020404" pitchFamily="49" charset="0"/>
-              </a:rPr>
-              <a:t>            Reason = "User requested cancellation of booking."</a:t>
-            </a:r>
-          </a:p>
-          <a:p>
-            <a:r>
-              <a:rPr lang="en-US" sz="1400" dirty="0">
-                <a:latin typeface="Courier New" panose="02070309020205020404" pitchFamily="49" charset="0"/>
-                <a:cs typeface="Courier New" panose="02070309020205020404" pitchFamily="49" charset="0"/>
-              </a:rPr>
-              <a:t>        };</a:t>
-            </a:r>
-          </a:p>
-          <a:p>
-            <a:endParaRPr lang="en-US" sz="1400" dirty="0">
-              <a:latin typeface="Courier New" panose="02070309020205020404" pitchFamily="49" charset="0"/>
-              <a:cs typeface="Courier New" panose="02070309020205020404" pitchFamily="49" charset="0"/>
-            </a:endParaRPr>
-          </a:p>
-          <a:p>
-            <a:r>
-              <a:rPr lang="en-US" sz="1400" dirty="0">
-                <a:latin typeface="Courier New" panose="02070309020205020404" pitchFamily="49" charset="0"/>
-                <a:cs typeface="Courier New" panose="02070309020205020404" pitchFamily="49" charset="0"/>
-              </a:rPr>
-              <a:t>        var </a:t>
-            </a:r>
-            <a:r>
-              <a:rPr lang="en-US" sz="1400" dirty="0" err="1">
-                <a:latin typeface="Courier New" panose="02070309020205020404" pitchFamily="49" charset="0"/>
-                <a:cs typeface="Courier New" panose="02070309020205020404" pitchFamily="49" charset="0"/>
-              </a:rPr>
-              <a:t>refundResponse</a:t>
-            </a:r>
-            <a:r>
-              <a:rPr lang="en-US" sz="1400" dirty="0">
-                <a:latin typeface="Courier New" panose="02070309020205020404" pitchFamily="49" charset="0"/>
-                <a:cs typeface="Courier New" panose="02070309020205020404" pitchFamily="49" charset="0"/>
-              </a:rPr>
-              <a:t> = await _</a:t>
-            </a:r>
-            <a:r>
-              <a:rPr lang="en-US" sz="1400" dirty="0" err="1">
-                <a:latin typeface="Courier New" panose="02070309020205020404" pitchFamily="49" charset="0"/>
-                <a:cs typeface="Courier New" panose="02070309020205020404" pitchFamily="49" charset="0"/>
-              </a:rPr>
-              <a:t>paymentService.RefundPaymentAsync</a:t>
-            </a:r>
-            <a:r>
-              <a:rPr lang="en-US" sz="1400" dirty="0">
-                <a:latin typeface="Courier New" panose="02070309020205020404" pitchFamily="49" charset="0"/>
-                <a:cs typeface="Courier New" panose="02070309020205020404" pitchFamily="49" charset="0"/>
-              </a:rPr>
-              <a:t>(</a:t>
-            </a:r>
-            <a:r>
-              <a:rPr lang="en-US" sz="1400" dirty="0" err="1">
-                <a:latin typeface="Courier New" panose="02070309020205020404" pitchFamily="49" charset="0"/>
-                <a:cs typeface="Courier New" panose="02070309020205020404" pitchFamily="49" charset="0"/>
-              </a:rPr>
-              <a:t>refundReq</a:t>
-            </a:r>
-            <a:r>
-              <a:rPr lang="en-US" sz="1400" dirty="0">
-                <a:latin typeface="Courier New" panose="02070309020205020404" pitchFamily="49" charset="0"/>
-                <a:cs typeface="Courier New" panose="02070309020205020404" pitchFamily="49" charset="0"/>
-              </a:rPr>
-              <a:t>, token);</a:t>
-            </a:r>
-          </a:p>
-          <a:p>
-            <a:endParaRPr lang="en-US" sz="1400" dirty="0">
-              <a:latin typeface="Courier New" panose="02070309020205020404" pitchFamily="49" charset="0"/>
-              <a:cs typeface="Courier New" panose="02070309020205020404" pitchFamily="49" charset="0"/>
-            </a:endParaRPr>
-          </a:p>
-          <a:p>
-            <a:r>
-              <a:rPr lang="en-US" sz="1400" dirty="0">
-                <a:latin typeface="Courier New" panose="02070309020205020404" pitchFamily="49" charset="0"/>
-                <a:cs typeface="Courier New" panose="02070309020205020404" pitchFamily="49" charset="0"/>
-              </a:rPr>
-              <a:t>        if (</a:t>
-            </a:r>
-            <a:r>
-              <a:rPr lang="en-US" sz="1400" dirty="0" err="1">
-                <a:latin typeface="Courier New" panose="02070309020205020404" pitchFamily="49" charset="0"/>
-                <a:cs typeface="Courier New" panose="02070309020205020404" pitchFamily="49" charset="0"/>
-              </a:rPr>
-              <a:t>refundResponse</a:t>
-            </a:r>
-            <a:r>
-              <a:rPr lang="en-US" sz="1400" dirty="0">
-                <a:latin typeface="Courier New" panose="02070309020205020404" pitchFamily="49" charset="0"/>
-                <a:cs typeface="Courier New" panose="02070309020205020404" pitchFamily="49" charset="0"/>
-              </a:rPr>
-              <a:t> == null || !</a:t>
-            </a:r>
-            <a:r>
-              <a:rPr lang="en-US" sz="1400" dirty="0" err="1">
-                <a:latin typeface="Courier New" panose="02070309020205020404" pitchFamily="49" charset="0"/>
-                <a:cs typeface="Courier New" panose="02070309020205020404" pitchFamily="49" charset="0"/>
-              </a:rPr>
-              <a:t>refundResponse.IsSuccess</a:t>
-            </a:r>
-            <a:r>
-              <a:rPr lang="en-US" sz="1400" dirty="0">
-                <a:latin typeface="Courier New" panose="02070309020205020404" pitchFamily="49" charset="0"/>
-                <a:cs typeface="Courier New" panose="02070309020205020404" pitchFamily="49" charset="0"/>
-              </a:rPr>
-              <a:t>)</a:t>
-            </a:r>
-          </a:p>
-          <a:p>
-            <a:r>
-              <a:rPr lang="en-US" sz="1400" dirty="0">
-                <a:latin typeface="Courier New" panose="02070309020205020404" pitchFamily="49" charset="0"/>
-                <a:cs typeface="Courier New" panose="02070309020205020404" pitchFamily="49" charset="0"/>
-              </a:rPr>
-              <a:t>        {</a:t>
-            </a:r>
-          </a:p>
-        </p:txBody>
-      </p:sp>
-      <p:sp>
-        <p:nvSpPr>
-          <p:cNvPr id="9" name="Заголовок 1">
-            <a:extLst>
-              <a:ext uri="{FF2B5EF4-FFF2-40B4-BE49-F238E27FC236}">
-                <a16:creationId xmlns:a16="http://schemas.microsoft.com/office/drawing/2014/main" id="{9538AF17-E65C-47E0-978B-04F070465663}"/>
+          <p:cNvPr id="2" name="Заголовок 1">
+            <a:extLst>
+              <a:ext uri="{FF2B5EF4-FFF2-40B4-BE49-F238E27FC236}">
+                <a16:creationId xmlns:a16="http://schemas.microsoft.com/office/drawing/2014/main" id="{01362EF1-2A88-4C67-915D-746CEE370AEF}"/>
               </a:ext>
             </a:extLst>
           </p:cNvPr>
@@ -8175,16 +9601,177 @@
             </a:br>
             <a:r>
               <a:rPr lang="ru-RU" sz="2400" dirty="0"/>
-              <a:t>Веб-приложение: метод отмены бронирования</a:t>
+              <a:t>Базы данных</a:t>
             </a:r>
             <a:endParaRPr lang="ru-RU" sz="3600" dirty="0"/>
           </a:p>
         </p:txBody>
       </p:sp>
+      <p:sp>
+        <p:nvSpPr>
+          <p:cNvPr id="3" name="Объект 2">
+            <a:extLst>
+              <a:ext uri="{FF2B5EF4-FFF2-40B4-BE49-F238E27FC236}">
+                <a16:creationId xmlns:a16="http://schemas.microsoft.com/office/drawing/2014/main" id="{C1C34876-14B1-456E-8F5D-03C0F2BBADC3}"/>
+              </a:ext>
+            </a:extLst>
+          </p:cNvPr>
+          <p:cNvSpPr>
+            <a:spLocks noGrp="1"/>
+          </p:cNvSpPr>
+          <p:nvPr>
+            <p:ph idx="1"/>
+          </p:nvPr>
+        </p:nvSpPr>
+        <p:spPr>
+          <a:xfrm>
+            <a:off x="1162263" y="2028200"/>
+            <a:ext cx="7045411" cy="3580566"/>
+          </a:xfrm>
+        </p:spPr>
+        <p:txBody>
+          <a:bodyPr>
+            <a:noAutofit/>
+          </a:bodyPr>
+          <a:lstStyle/>
+          <a:p>
+            <a:pPr marL="0" indent="0">
+              <a:lnSpc>
+                <a:spcPct val="100000"/>
+              </a:lnSpc>
+              <a:buNone/>
+            </a:pPr>
+            <a:r>
+              <a:rPr lang="ru-RU" sz="2200" dirty="0"/>
+              <a:t>Для работы с данными был выбран подход </a:t>
+            </a:r>
+            <a:r>
+              <a:rPr lang="ru-RU" sz="2200" dirty="0" err="1"/>
+              <a:t>Code</a:t>
+            </a:r>
+            <a:r>
+              <a:rPr lang="ru-RU" sz="2200" dirty="0"/>
+              <a:t> </a:t>
+            </a:r>
+            <a:r>
+              <a:rPr lang="ru-RU" sz="2200" dirty="0" err="1"/>
+              <a:t>First</a:t>
+            </a:r>
+            <a:r>
+              <a:rPr lang="ru-RU" sz="2200" dirty="0"/>
+              <a:t> с использованием ORM </a:t>
+            </a:r>
+            <a:r>
+              <a:rPr lang="ru-RU" sz="2200" dirty="0" err="1"/>
+              <a:t>Entity</a:t>
+            </a:r>
+            <a:r>
+              <a:rPr lang="ru-RU" sz="2200" dirty="0"/>
+              <a:t> </a:t>
+            </a:r>
+            <a:r>
+              <a:rPr lang="ru-RU" sz="2200" dirty="0" err="1"/>
+              <a:t>Framework</a:t>
+            </a:r>
+            <a:r>
+              <a:rPr lang="ru-RU" sz="2200" dirty="0"/>
+              <a:t> </a:t>
+            </a:r>
+            <a:r>
+              <a:rPr lang="ru-RU" sz="2200" dirty="0" err="1"/>
+              <a:t>Core</a:t>
+            </a:r>
+            <a:r>
+              <a:rPr lang="ru-RU" sz="2200" dirty="0"/>
+              <a:t>. В целях поддержания </a:t>
+            </a:r>
+            <a:r>
+              <a:rPr lang="ru-RU" sz="2200" dirty="0" err="1"/>
+              <a:t>микросервисной</a:t>
+            </a:r>
+            <a:r>
+              <a:rPr lang="ru-RU" sz="2200" dirty="0"/>
+              <a:t> архитектуры для каждого </a:t>
+            </a:r>
+            <a:r>
+              <a:rPr lang="ru-RU" sz="2200" dirty="0" err="1"/>
+              <a:t>микросервиса</a:t>
+            </a:r>
+            <a:r>
+              <a:rPr lang="ru-RU" sz="2200" dirty="0"/>
+              <a:t> была создана своя база данных, независимая от других. Таким образом сначала были реализованы целевые сущности, на основе которых затем был сгенерирован код создания базы данных </a:t>
+            </a:r>
+            <a:r>
+              <a:rPr lang="ru-RU" sz="2200" dirty="0" err="1"/>
+              <a:t>MySQL</a:t>
+            </a:r>
+            <a:endParaRPr lang="ru-RU" sz="2200" dirty="0"/>
+          </a:p>
+        </p:txBody>
+      </p:sp>
+      <p:sp>
+        <p:nvSpPr>
+          <p:cNvPr id="4" name="Номер слайда 3">
+            <a:extLst>
+              <a:ext uri="{FF2B5EF4-FFF2-40B4-BE49-F238E27FC236}">
+                <a16:creationId xmlns:a16="http://schemas.microsoft.com/office/drawing/2014/main" id="{A871B873-5DBF-4B30-BC89-4262DC826DB2}"/>
+              </a:ext>
+            </a:extLst>
+          </p:cNvPr>
+          <p:cNvSpPr>
+            <a:spLocks noGrp="1"/>
+          </p:cNvSpPr>
+          <p:nvPr>
+            <p:ph type="sldNum" sz="quarter" idx="12"/>
+          </p:nvPr>
+        </p:nvSpPr>
+        <p:spPr/>
+        <p:txBody>
+          <a:bodyPr/>
+          <a:lstStyle/>
+          <a:p>
+            <a:fld id="{53C82F7A-B581-4A0B-8CFB-8CE1E64145D9}" type="slidenum">
+              <a:rPr lang="ru-RU" smtClean="0"/>
+              <a:t>9</a:t>
+            </a:fld>
+            <a:endParaRPr lang="ru-RU" dirty="0"/>
+          </a:p>
+        </p:txBody>
+      </p:sp>
+      <p:pic>
+        <p:nvPicPr>
+          <p:cNvPr id="5" name="Рисунок 4">
+            <a:extLst>
+              <a:ext uri="{FF2B5EF4-FFF2-40B4-BE49-F238E27FC236}">
+                <a16:creationId xmlns:a16="http://schemas.microsoft.com/office/drawing/2014/main" id="{8B649220-95E2-422A-8AE8-9A6F6C8F3DD5}"/>
+              </a:ext>
+            </a:extLst>
+          </p:cNvPr>
+          <p:cNvPicPr>
+            <a:picLocks noChangeAspect="1"/>
+          </p:cNvPicPr>
+          <p:nvPr/>
+        </p:nvPicPr>
+        <p:blipFill>
+          <a:blip r:embed="rId2"/>
+          <a:stretch>
+            <a:fillRect/>
+          </a:stretch>
+        </p:blipFill>
+        <p:spPr>
+          <a:xfrm>
+            <a:off x="8543365" y="1827480"/>
+            <a:ext cx="2486372" cy="3982006"/>
+          </a:xfrm>
+          <a:prstGeom prst="rect">
+            <a:avLst/>
+          </a:prstGeom>
+        </p:spPr>
+      </p:pic>
     </p:spTree>
     <p:extLst>
       <p:ext uri="{BB962C8B-B14F-4D97-AF65-F5344CB8AC3E}">
-        <p14:creationId xmlns:p14="http://schemas.microsoft.com/office/powerpoint/2010/main" val="3167726737"/>
+        <p14:creationId xmlns:p14="http://schemas.microsoft.com/office/powerpoint/2010/main" val="3186957526"/>
       </p:ext>
     </p:extLst>
   </p:cSld>
